--- a/docs/SmartReadAgent_V1.0_期末演示PPT.pptx
+++ b/docs/SmartReadAgent_V1.0_期末演示PPT.pptx
@@ -3201,51 +3201,18 @@
           </a:bodyPr>
           <a:lstStyle/>
           <a:p>
-            <a:pPr>
-              <a:spcAft>
-                <a:spcPts val="800"/>
-              </a:spcAft>
-              <a:defRPr sz="1600">
-                <a:solidFill>
-                  <a:srgbClr val="15202B"/>
-                </a:solidFill>
-                <a:latin typeface="Microsoft YaHei"/>
-              </a:defRPr>
-            </a:pPr>
+            <a:r>
+              <a:t>A03 组｜林立洲 121072021030｜江轩宇 121052023075</a:t>
+            </a:r>
+          </a:p>
+          <a:p>
+            <a:r>
+              <a:t>福建师范大学 2023 级软件工程 2 班</a:t>
+            </a:r>
+          </a:p>
+          <a:p>
             <a:r>
               <a:t>面向课程资料、教材片段和技术文章的移动端阅读辅助 App。</a:t>
-            </a:r>
-          </a:p>
-          <a:p>
-            <a:pPr>
-              <a:spcAft>
-                <a:spcPts val="800"/>
-              </a:spcAft>
-              <a:defRPr sz="1600">
-                <a:solidFill>
-                  <a:srgbClr val="15202B"/>
-                </a:solidFill>
-                <a:latin typeface="Microsoft YaHei"/>
-              </a:defRPr>
-            </a:pPr>
-            <a:r>
-              <a:t>V1.0 冻结功能范围，重点保证演示稳定、材料完整、过程可追溯。</a:t>
-            </a:r>
-          </a:p>
-          <a:p>
-            <a:pPr>
-              <a:spcAft>
-                <a:spcPts val="800"/>
-              </a:spcAft>
-              <a:defRPr sz="1600">
-                <a:solidFill>
-                  <a:srgbClr val="15202B"/>
-                </a:solidFill>
-                <a:latin typeface="Microsoft YaHei"/>
-              </a:defRPr>
-            </a:pPr>
-            <a:r>
-              <a:t>项目同时服务《软件开发实践（三）》与《软件项目管理》两门课程。</a:t>
             </a:r>
           </a:p>
         </p:txBody>
@@ -3480,67 +3447,23 @@
           </a:bodyPr>
           <a:lstStyle/>
           <a:p>
-            <a:pPr>
-              <a:spcAft>
-                <a:spcPts val="800"/>
-              </a:spcAft>
-              <a:defRPr sz="1600">
-                <a:solidFill>
-                  <a:srgbClr val="15202B"/>
-                </a:solidFill>
-                <a:latin typeface="Microsoft YaHei"/>
-              </a:defRPr>
-            </a:pPr>
             <a:r>
               <a:t>Gradle :app:clean :app:assembleDebug 构建通过。</a:t>
             </a:r>
           </a:p>
           <a:p>
-            <a:pPr>
-              <a:spcAft>
-                <a:spcPts val="800"/>
-              </a:spcAft>
-              <a:defRPr sz="1600">
-                <a:solidFill>
-                  <a:srgbClr val="15202B"/>
-                </a:solidFill>
-                <a:latin typeface="Microsoft YaHei"/>
-              </a:defRPr>
-            </a:pPr>
-            <a:r>
-              <a:t>V1.0 APK 已生成并安装到模拟器验证。</a:t>
-            </a:r>
-          </a:p>
-          <a:p>
-            <a:pPr>
-              <a:spcAft>
-                <a:spcPts val="800"/>
-              </a:spcAft>
-              <a:defRPr sz="1600">
-                <a:solidFill>
-                  <a:srgbClr val="15202B"/>
-                </a:solidFill>
-                <a:latin typeface="Microsoft YaHei"/>
-              </a:defRPr>
-            </a:pPr>
-            <a:r>
-              <a:t>TC-021 到 TC-044 已整理，未真实复测项保留待测。</a:t>
-            </a:r>
-          </a:p>
-          <a:p>
-            <a:pPr>
-              <a:spcAft>
-                <a:spcPts val="800"/>
-              </a:spcAft>
-              <a:defRPr sz="1600">
-                <a:solidFill>
-                  <a:srgbClr val="15202B"/>
-                </a:solidFill>
-                <a:latin typeface="Microsoft YaHei"/>
-              </a:defRPr>
-            </a:pPr>
-            <a:r>
-              <a:t>release 分支、main/dev 合并和 v1.0 标签已完成。</a:t>
+            <a:r>
+              <a:t>V1.0 APK 已生成，模拟器回归验证完成。</a:t>
+            </a:r>
+          </a:p>
+          <a:p>
+            <a:r>
+              <a:t>安卓真机体验反馈已补充，可用手机录屏替代现场演示。</a:t>
+            </a:r>
+          </a:p>
+          <a:p>
+            <a:r>
+              <a:t>Gitee/GitHub 仓库、v1.0 标签和 Release 材料已整理。</a:t>
             </a:r>
           </a:p>
         </p:txBody>
@@ -4041,51 +3964,18 @@
           </a:bodyPr>
           <a:lstStyle/>
           <a:p>
-            <a:pPr>
-              <a:spcAft>
-                <a:spcPts val="800"/>
-              </a:spcAft>
-              <a:defRPr sz="1600">
-                <a:solidFill>
-                  <a:srgbClr val="15202B"/>
-                </a:solidFill>
-                <a:latin typeface="Microsoft YaHei"/>
-              </a:defRPr>
-            </a:pPr>
             <a:r>
               <a:t>SmartRead Agent V1.0 已形成移动端 AI 阅读辅助闭环。</a:t>
             </a:r>
           </a:p>
           <a:p>
-            <a:pPr>
-              <a:spcAft>
-                <a:spcPts val="800"/>
-              </a:spcAft>
-              <a:defRPr sz="1600">
-                <a:solidFill>
-                  <a:srgbClr val="15202B"/>
-                </a:solidFill>
-                <a:latin typeface="Microsoft YaHei"/>
-              </a:defRPr>
-            </a:pPr>
             <a:r>
               <a:t>技术成果包括 Android 源码、LiteRT 模型、APK、截图和演示文档。</a:t>
             </a:r>
           </a:p>
           <a:p>
-            <a:pPr>
-              <a:spcAft>
-                <a:spcPts val="800"/>
-              </a:spcAft>
-              <a:defRPr sz="1600">
-                <a:solidFill>
-                  <a:srgbClr val="15202B"/>
-                </a:solidFill>
-                <a:latin typeface="Microsoft YaHei"/>
-              </a:defRPr>
-            </a:pPr>
-            <a:r>
-              <a:t>项目管理成果包括版本管理、沟通记录、看板、测试 Bug 和个人报告。</a:t>
+            <a:r>
+              <a:t>录屏流程已准备，可在无法现场演示时完整展示手机端效果。</a:t>
             </a:r>
           </a:p>
         </p:txBody>

--- a/docs/SmartReadAgent_V1.0_期末演示PPT.pptx
+++ b/docs/SmartReadAgent_V1.0_期末演示PPT.pptx
@@ -4437,8 +4437,8 @@
         </p:nvSpPr>
         <p:spPr>
           <a:xfrm>
-            <a:off x="7683246" y="1801367"/>
-            <a:ext cx="1961388" cy="4224528"/>
+            <a:off x="7351776" y="1942300"/>
+            <a:ext cx="2624328" cy="3942661"/>
           </a:xfrm>
           <a:prstGeom prst="roundRect">
             <a:avLst/>
@@ -5181,7 +5181,7 @@
       </p:sp>
       <p:pic>
         <p:nvPicPr>
-          <p:cNvPr id="21" name="Picture 20" descr="V1.0历史记录页_20260512.png"/>
+          <p:cNvPr id="21" name="Picture 20" descr="history_list_focus.png"/>
           <p:cNvPicPr>
             <a:picLocks noChangeAspect="1"/>
           </p:cNvPicPr>
@@ -5195,8 +5195,8 @@
         </p:blipFill>
         <p:spPr>
           <a:xfrm>
-            <a:off x="7738110" y="1856231"/>
-            <a:ext cx="1851660" cy="4114800"/>
+            <a:off x="7406640" y="1997164"/>
+            <a:ext cx="2514600" cy="3832933"/>
           </a:xfrm>
           <a:prstGeom prst="rect">
             <a:avLst/>
@@ -6850,8 +6850,8 @@
         </p:nvSpPr>
         <p:spPr>
           <a:xfrm>
-            <a:off x="7766685" y="1773936"/>
-            <a:ext cx="2023110" cy="4361688"/>
+            <a:off x="7488936" y="2018294"/>
+            <a:ext cx="2578608" cy="3872972"/>
           </a:xfrm>
           <a:prstGeom prst="roundRect">
             <a:avLst/>
@@ -7479,7 +7479,7 @@
       </p:sp>
       <p:pic>
         <p:nvPicPr>
-          <p:cNvPr id="18" name="Picture 17" descr="V1.0首页_20260512.png"/>
+          <p:cNvPr id="18" name="Picture 17" descr="history_focus.png"/>
           <p:cNvPicPr>
             <a:picLocks noChangeAspect="1"/>
           </p:cNvPicPr>
@@ -7493,8 +7493,8 @@
         </p:blipFill>
         <p:spPr>
           <a:xfrm>
-            <a:off x="7821549" y="1828800"/>
-            <a:ext cx="1913382" cy="4251960"/>
+            <a:off x="7543800" y="2073158"/>
+            <a:ext cx="2468880" cy="3763244"/>
           </a:xfrm>
           <a:prstGeom prst="rect">
             <a:avLst/>
@@ -8143,8 +8143,8 @@
         </p:nvSpPr>
         <p:spPr>
           <a:xfrm>
-            <a:off x="7863840" y="1819655"/>
-            <a:ext cx="1920240" cy="4133088"/>
+            <a:off x="7953245" y="1728216"/>
+            <a:ext cx="3067310" cy="4818888"/>
           </a:xfrm>
           <a:prstGeom prst="roundRect">
             <a:avLst/>
@@ -8433,8 +8433,8 @@
         </p:nvSpPr>
         <p:spPr>
           <a:xfrm>
-            <a:off x="685800" y="1920240"/>
-            <a:ext cx="2514600" cy="1371600"/>
+            <a:off x="713232" y="1883664"/>
+            <a:ext cx="6080760" cy="841248"/>
           </a:xfrm>
           <a:prstGeom prst="roundRect">
             <a:avLst/>
@@ -8478,23 +8478,23 @@
         </p:nvSpPr>
         <p:spPr>
           <a:xfrm>
-            <a:off x="886968" y="2103120"/>
-            <a:ext cx="2103120" cy="292608"/>
-          </a:xfrm>
-          <a:prstGeom prst="rect">
-            <a:avLst/>
-          </a:prstGeom>
-          <a:noFill/>
-        </p:spPr>
-        <p:txBody>
-          <a:bodyPr wrap="square" lIns="18288" rIns="18288">
-            <a:spAutoFit/>
-          </a:bodyPr>
-          <a:lstStyle/>
-          <a:p>
-            <a:pPr algn="l"/>
-            <a:r>
-              <a:rPr sz="1800" b="1">
+            <a:off x="960120" y="2020824"/>
+            <a:ext cx="1325880" cy="256032"/>
+          </a:xfrm>
+          <a:prstGeom prst="rect">
+            <a:avLst/>
+          </a:prstGeom>
+          <a:noFill/>
+        </p:spPr>
+        <p:txBody>
+          <a:bodyPr wrap="square" lIns="18288" rIns="18288">
+            <a:spAutoFit/>
+          </a:bodyPr>
+          <a:lstStyle/>
+          <a:p>
+            <a:pPr algn="l"/>
+            <a:r>
+              <a:rPr sz="1500" b="1">
                 <a:solidFill>
                   <a:srgbClr val="1E40AF"/>
                 </a:solidFill>
@@ -8513,23 +8513,23 @@
         </p:nvSpPr>
         <p:spPr>
           <a:xfrm>
-            <a:off x="886968" y="2542032"/>
-            <a:ext cx="2103120" cy="530352"/>
-          </a:xfrm>
-          <a:prstGeom prst="rect">
-            <a:avLst/>
-          </a:prstGeom>
-          <a:noFill/>
-        </p:spPr>
-        <p:txBody>
-          <a:bodyPr wrap="square" lIns="18288" rIns="18288">
-            <a:spAutoFit/>
-          </a:bodyPr>
-          <a:lstStyle/>
-          <a:p>
-            <a:pPr algn="l"/>
-            <a:r>
-              <a:rPr sz="1250" b="0">
+            <a:off x="2331720" y="2020824"/>
+            <a:ext cx="3977639" cy="329184"/>
+          </a:xfrm>
+          <a:prstGeom prst="rect">
+            <a:avLst/>
+          </a:prstGeom>
+          <a:noFill/>
+        </p:spPr>
+        <p:txBody>
+          <a:bodyPr wrap="square" lIns="18288" rIns="18288">
+            <a:spAutoFit/>
+          </a:bodyPr>
+          <a:lstStyle/>
+          <a:p>
+            <a:pPr algn="l"/>
+            <a:r>
+              <a:rPr sz="1150" b="0">
                 <a:solidFill>
                   <a:srgbClr val="1E293B"/>
                 </a:solidFill>
@@ -8548,8 +8548,8 @@
         </p:nvSpPr>
         <p:spPr>
           <a:xfrm>
-            <a:off x="3474720" y="1920240"/>
-            <a:ext cx="2514600" cy="1371600"/>
+            <a:off x="713232" y="2843784"/>
+            <a:ext cx="6080760" cy="841248"/>
           </a:xfrm>
           <a:prstGeom prst="roundRect">
             <a:avLst/>
@@ -8593,23 +8593,23 @@
         </p:nvSpPr>
         <p:spPr>
           <a:xfrm>
-            <a:off x="3675888" y="2103120"/>
-            <a:ext cx="2103120" cy="292608"/>
-          </a:xfrm>
-          <a:prstGeom prst="rect">
-            <a:avLst/>
-          </a:prstGeom>
-          <a:noFill/>
-        </p:spPr>
-        <p:txBody>
-          <a:bodyPr wrap="square" lIns="18288" rIns="18288">
-            <a:spAutoFit/>
-          </a:bodyPr>
-          <a:lstStyle/>
-          <a:p>
-            <a:pPr algn="l"/>
-            <a:r>
-              <a:rPr sz="1800" b="1">
+            <a:off x="960120" y="2980944"/>
+            <a:ext cx="1325880" cy="256032"/>
+          </a:xfrm>
+          <a:prstGeom prst="rect">
+            <a:avLst/>
+          </a:prstGeom>
+          <a:noFill/>
+        </p:spPr>
+        <p:txBody>
+          <a:bodyPr wrap="square" lIns="18288" rIns="18288">
+            <a:spAutoFit/>
+          </a:bodyPr>
+          <a:lstStyle/>
+          <a:p>
+            <a:pPr algn="l"/>
+            <a:r>
+              <a:rPr sz="1500" b="1">
                 <a:solidFill>
                   <a:srgbClr val="1E40AF"/>
                 </a:solidFill>
@@ -8628,23 +8628,23 @@
         </p:nvSpPr>
         <p:spPr>
           <a:xfrm>
-            <a:off x="3675888" y="2542032"/>
-            <a:ext cx="2103120" cy="530352"/>
-          </a:xfrm>
-          <a:prstGeom prst="rect">
-            <a:avLst/>
-          </a:prstGeom>
-          <a:noFill/>
-        </p:spPr>
-        <p:txBody>
-          <a:bodyPr wrap="square" lIns="18288" rIns="18288">
-            <a:spAutoFit/>
-          </a:bodyPr>
-          <a:lstStyle/>
-          <a:p>
-            <a:pPr algn="l"/>
-            <a:r>
-              <a:rPr sz="1250" b="0">
+            <a:off x="2331720" y="2980944"/>
+            <a:ext cx="3977639" cy="329184"/>
+          </a:xfrm>
+          <a:prstGeom prst="rect">
+            <a:avLst/>
+          </a:prstGeom>
+          <a:noFill/>
+        </p:spPr>
+        <p:txBody>
+          <a:bodyPr wrap="square" lIns="18288" rIns="18288">
+            <a:spAutoFit/>
+          </a:bodyPr>
+          <a:lstStyle/>
+          <a:p>
+            <a:pPr algn="l"/>
+            <a:r>
+              <a:rPr sz="1150" b="0">
                 <a:solidFill>
                   <a:srgbClr val="1E293B"/>
                 </a:solidFill>
@@ -8663,8 +8663,8 @@
         </p:nvSpPr>
         <p:spPr>
           <a:xfrm>
-            <a:off x="6263640" y="1920240"/>
-            <a:ext cx="2514600" cy="1371600"/>
+            <a:off x="713232" y="3803904"/>
+            <a:ext cx="6080760" cy="841248"/>
           </a:xfrm>
           <a:prstGeom prst="roundRect">
             <a:avLst/>
@@ -8708,23 +8708,23 @@
         </p:nvSpPr>
         <p:spPr>
           <a:xfrm>
-            <a:off x="6464808" y="2103120"/>
-            <a:ext cx="2103120" cy="292608"/>
-          </a:xfrm>
-          <a:prstGeom prst="rect">
-            <a:avLst/>
-          </a:prstGeom>
-          <a:noFill/>
-        </p:spPr>
-        <p:txBody>
-          <a:bodyPr wrap="square" lIns="18288" rIns="18288">
-            <a:spAutoFit/>
-          </a:bodyPr>
-          <a:lstStyle/>
-          <a:p>
-            <a:pPr algn="l"/>
-            <a:r>
-              <a:rPr sz="1800" b="1">
+            <a:off x="960120" y="3941064"/>
+            <a:ext cx="1325880" cy="256032"/>
+          </a:xfrm>
+          <a:prstGeom prst="rect">
+            <a:avLst/>
+          </a:prstGeom>
+          <a:noFill/>
+        </p:spPr>
+        <p:txBody>
+          <a:bodyPr wrap="square" lIns="18288" rIns="18288">
+            <a:spAutoFit/>
+          </a:bodyPr>
+          <a:lstStyle/>
+          <a:p>
+            <a:pPr algn="l"/>
+            <a:r>
+              <a:rPr sz="1500" b="1">
                 <a:solidFill>
                   <a:srgbClr val="1E40AF"/>
                 </a:solidFill>
@@ -8743,23 +8743,23 @@
         </p:nvSpPr>
         <p:spPr>
           <a:xfrm>
-            <a:off x="6464808" y="2542032"/>
-            <a:ext cx="2103120" cy="530352"/>
-          </a:xfrm>
-          <a:prstGeom prst="rect">
-            <a:avLst/>
-          </a:prstGeom>
-          <a:noFill/>
-        </p:spPr>
-        <p:txBody>
-          <a:bodyPr wrap="square" lIns="18288" rIns="18288">
-            <a:spAutoFit/>
-          </a:bodyPr>
-          <a:lstStyle/>
-          <a:p>
-            <a:pPr algn="l"/>
-            <a:r>
-              <a:rPr sz="1250" b="0">
+            <a:off x="2331720" y="3941064"/>
+            <a:ext cx="3977639" cy="329184"/>
+          </a:xfrm>
+          <a:prstGeom prst="rect">
+            <a:avLst/>
+          </a:prstGeom>
+          <a:noFill/>
+        </p:spPr>
+        <p:txBody>
+          <a:bodyPr wrap="square" lIns="18288" rIns="18288">
+            <a:spAutoFit/>
+          </a:bodyPr>
+          <a:lstStyle/>
+          <a:p>
+            <a:pPr algn="l"/>
+            <a:r>
+              <a:rPr sz="1150" b="0">
                 <a:solidFill>
                   <a:srgbClr val="1E293B"/>
                 </a:solidFill>
@@ -8778,8 +8778,8 @@
         </p:nvSpPr>
         <p:spPr>
           <a:xfrm>
-            <a:off x="713232" y="3749039"/>
-            <a:ext cx="5440680" cy="1170432"/>
+            <a:off x="713232" y="4919472"/>
+            <a:ext cx="6080760" cy="841248"/>
           </a:xfrm>
           <a:prstGeom prst="roundRect">
             <a:avLst/>
@@ -8846,7 +8846,7 @@
       </p:sp>
       <p:pic>
         <p:nvPicPr>
-          <p:cNvPr id="19" name="Picture 18" descr="V1.0首页_20260512.png"/>
+          <p:cNvPr id="19" name="Picture 18" descr="text_input_focus.png"/>
           <p:cNvPicPr>
             <a:picLocks noChangeAspect="1"/>
           </p:cNvPicPr>
@@ -8860,8 +8860,8 @@
         </p:blipFill>
         <p:spPr>
           <a:xfrm>
-            <a:off x="7918704" y="1874519"/>
-            <a:ext cx="1810512" cy="4023360"/>
+            <a:off x="8008109" y="1783080"/>
+            <a:ext cx="2957582" cy="4709160"/>
           </a:xfrm>
           <a:prstGeom prst="rect">
             <a:avLst/>
@@ -8896,14 +8896,14 @@
       <p:grpSpPr/>
       <p:sp>
         <p:nvSpPr>
-          <p:cNvPr id="29" name="Rounded Rectangle 28"/>
+          <p:cNvPr id="26" name="Rounded Rectangle 25"/>
           <p:cNvSpPr/>
           <p:nvPr/>
         </p:nvSpPr>
         <p:spPr>
           <a:xfrm>
-            <a:off x="5710428" y="3739896"/>
-            <a:ext cx="1014984" cy="2121408"/>
+            <a:off x="8037576" y="1985446"/>
+            <a:ext cx="2990088" cy="4304427"/>
           </a:xfrm>
           <a:prstGeom prst="roundRect">
             <a:avLst/>
@@ -9192,8 +9192,8 @@
         </p:nvSpPr>
         <p:spPr>
           <a:xfrm>
-            <a:off x="685800" y="1920240"/>
-            <a:ext cx="2331720" cy="1417320"/>
+            <a:off x="713232" y="1920240"/>
+            <a:ext cx="2697480" cy="1353312"/>
           </a:xfrm>
           <a:prstGeom prst="roundRect">
             <a:avLst/>
@@ -9237,7 +9237,7 @@
         </p:nvSpPr>
         <p:spPr>
           <a:xfrm>
-            <a:off x="868680" y="2084831"/>
+            <a:off x="914400" y="2121408"/>
             <a:ext cx="502920" cy="274320"/>
           </a:xfrm>
           <a:prstGeom prst="rect">
@@ -9272,23 +9272,23 @@
         </p:nvSpPr>
         <p:spPr>
           <a:xfrm>
-            <a:off x="1435608" y="2057400"/>
-            <a:ext cx="1463040" cy="292608"/>
-          </a:xfrm>
-          <a:prstGeom prst="rect">
-            <a:avLst/>
-          </a:prstGeom>
-          <a:noFill/>
-        </p:spPr>
-        <p:txBody>
-          <a:bodyPr wrap="square" lIns="18288" rIns="18288">
-            <a:spAutoFit/>
-          </a:bodyPr>
-          <a:lstStyle/>
-          <a:p>
-            <a:pPr algn="l"/>
-            <a:r>
-              <a:rPr sz="1700" b="1">
+            <a:off x="1499616" y="2103120"/>
+            <a:ext cx="1600200" cy="292608"/>
+          </a:xfrm>
+          <a:prstGeom prst="rect">
+            <a:avLst/>
+          </a:prstGeom>
+          <a:noFill/>
+        </p:spPr>
+        <p:txBody>
+          <a:bodyPr wrap="square" lIns="18288" rIns="18288">
+            <a:spAutoFit/>
+          </a:bodyPr>
+          <a:lstStyle/>
+          <a:p>
+            <a:pPr algn="l"/>
+            <a:r>
+              <a:rPr sz="1600" b="1">
                 <a:solidFill>
                   <a:srgbClr val="0F172A"/>
                 </a:solidFill>
@@ -9307,23 +9307,23 @@
         </p:nvSpPr>
         <p:spPr>
           <a:xfrm>
-            <a:off x="914400" y="2596896"/>
-            <a:ext cx="1920240" cy="384048"/>
-          </a:xfrm>
-          <a:prstGeom prst="rect">
-            <a:avLst/>
-          </a:prstGeom>
-          <a:noFill/>
-        </p:spPr>
-        <p:txBody>
-          <a:bodyPr wrap="square" lIns="18288" rIns="18288">
-            <a:spAutoFit/>
-          </a:bodyPr>
-          <a:lstStyle/>
-          <a:p>
-            <a:pPr algn="l"/>
-            <a:r>
-              <a:rPr sz="1250" b="0">
+            <a:off x="941832" y="2670048"/>
+            <a:ext cx="2148840" cy="329184"/>
+          </a:xfrm>
+          <a:prstGeom prst="rect">
+            <a:avLst/>
+          </a:prstGeom>
+          <a:noFill/>
+        </p:spPr>
+        <p:txBody>
+          <a:bodyPr wrap="square" lIns="18288" rIns="18288">
+            <a:spAutoFit/>
+          </a:bodyPr>
+          <a:lstStyle/>
+          <a:p>
+            <a:pPr algn="l"/>
+            <a:r>
+              <a:rPr sz="1150" b="0">
                 <a:solidFill>
                   <a:srgbClr val="64748B"/>
                 </a:solidFill>
@@ -9336,49 +9336,14 @@
       </p:sp>
       <p:sp>
         <p:nvSpPr>
-          <p:cNvPr id="13" name="TextBox 12"/>
-          <p:cNvSpPr txBox="1"/>
-          <p:nvPr/>
-        </p:nvSpPr>
-        <p:spPr>
-          <a:xfrm>
-            <a:off x="2953512" y="2468880"/>
-            <a:ext cx="256032" cy="219456"/>
-          </a:xfrm>
-          <a:prstGeom prst="rect">
-            <a:avLst/>
-          </a:prstGeom>
-          <a:noFill/>
-        </p:spPr>
-        <p:txBody>
-          <a:bodyPr wrap="square" lIns="18288" rIns="18288">
-            <a:spAutoFit/>
-          </a:bodyPr>
-          <a:lstStyle/>
-          <a:p>
-            <a:pPr algn="l"/>
-            <a:r>
-              <a:rPr sz="1800" b="1">
-                <a:solidFill>
-                  <a:srgbClr val="64748B"/>
-                </a:solidFill>
-                <a:latin typeface="Microsoft YaHei"/>
-              </a:rPr>
-              <a:t>→</a:t>
-            </a:r>
-          </a:p>
-        </p:txBody>
-      </p:sp>
-      <p:sp>
-        <p:nvSpPr>
-          <p:cNvPr id="14" name="Rounded Rectangle 13"/>
+          <p:cNvPr id="13" name="Rounded Rectangle 12"/>
           <p:cNvSpPr/>
           <p:nvPr/>
         </p:nvSpPr>
         <p:spPr>
           <a:xfrm>
-            <a:off x="3264408" y="1920240"/>
-            <a:ext cx="2331720" cy="1417320"/>
+            <a:off x="3703320" y="1920240"/>
+            <a:ext cx="2697480" cy="1353312"/>
           </a:xfrm>
           <a:prstGeom prst="roundRect">
             <a:avLst/>
@@ -9416,35 +9381,70 @@
       </p:sp>
       <p:sp>
         <p:nvSpPr>
+          <p:cNvPr id="14" name="TextBox 13"/>
+          <p:cNvSpPr txBox="1"/>
+          <p:nvPr/>
+        </p:nvSpPr>
+        <p:spPr>
+          <a:xfrm>
+            <a:off x="3904487" y="2121408"/>
+            <a:ext cx="502920" cy="274320"/>
+          </a:xfrm>
+          <a:prstGeom prst="rect">
+            <a:avLst/>
+          </a:prstGeom>
+          <a:noFill/>
+        </p:spPr>
+        <p:txBody>
+          <a:bodyPr wrap="square" lIns="18288" rIns="18288">
+            <a:spAutoFit/>
+          </a:bodyPr>
+          <a:lstStyle/>
+          <a:p>
+            <a:pPr algn="l"/>
+            <a:r>
+              <a:rPr sz="1800" b="1">
+                <a:solidFill>
+                  <a:srgbClr val="1E40AF"/>
+                </a:solidFill>
+                <a:latin typeface="Microsoft YaHei"/>
+              </a:rPr>
+              <a:t>02</a:t>
+            </a:r>
+          </a:p>
+        </p:txBody>
+      </p:sp>
+      <p:sp>
+        <p:nvSpPr>
           <p:cNvPr id="15" name="TextBox 14"/>
           <p:cNvSpPr txBox="1"/>
           <p:nvPr/>
         </p:nvSpPr>
         <p:spPr>
           <a:xfrm>
-            <a:off x="3447288" y="2084831"/>
-            <a:ext cx="502920" cy="274320"/>
-          </a:xfrm>
-          <a:prstGeom prst="rect">
-            <a:avLst/>
-          </a:prstGeom>
-          <a:noFill/>
-        </p:spPr>
-        <p:txBody>
-          <a:bodyPr wrap="square" lIns="18288" rIns="18288">
-            <a:spAutoFit/>
-          </a:bodyPr>
-          <a:lstStyle/>
-          <a:p>
-            <a:pPr algn="l"/>
-            <a:r>
-              <a:rPr sz="1800" b="1">
-                <a:solidFill>
-                  <a:srgbClr val="1E40AF"/>
-                </a:solidFill>
-                <a:latin typeface="Microsoft YaHei"/>
-              </a:rPr>
-              <a:t>02</a:t>
+            <a:off x="4489704" y="2103120"/>
+            <a:ext cx="1600200" cy="292608"/>
+          </a:xfrm>
+          <a:prstGeom prst="rect">
+            <a:avLst/>
+          </a:prstGeom>
+          <a:noFill/>
+        </p:spPr>
+        <p:txBody>
+          <a:bodyPr wrap="square" lIns="18288" rIns="18288">
+            <a:spAutoFit/>
+          </a:bodyPr>
+          <a:lstStyle/>
+          <a:p>
+            <a:pPr algn="l"/>
+            <a:r>
+              <a:rPr sz="1600" b="1">
+                <a:solidFill>
+                  <a:srgbClr val="0F172A"/>
+                </a:solidFill>
+                <a:latin typeface="Microsoft YaHei"/>
+              </a:rPr>
+              <a:t>智能分析</a:t>
             </a:r>
           </a:p>
         </p:txBody>
@@ -9457,58 +9457,23 @@
         </p:nvSpPr>
         <p:spPr>
           <a:xfrm>
-            <a:off x="4014216" y="2057400"/>
-            <a:ext cx="1463040" cy="292608"/>
-          </a:xfrm>
-          <a:prstGeom prst="rect">
-            <a:avLst/>
-          </a:prstGeom>
-          <a:noFill/>
-        </p:spPr>
-        <p:txBody>
-          <a:bodyPr wrap="square" lIns="18288" rIns="18288">
-            <a:spAutoFit/>
-          </a:bodyPr>
-          <a:lstStyle/>
-          <a:p>
-            <a:pPr algn="l"/>
-            <a:r>
-              <a:rPr sz="1700" b="1">
-                <a:solidFill>
-                  <a:srgbClr val="0F172A"/>
-                </a:solidFill>
-                <a:latin typeface="Microsoft YaHei"/>
-              </a:rPr>
-              <a:t>智能分析</a:t>
-            </a:r>
-          </a:p>
-        </p:txBody>
-      </p:sp>
-      <p:sp>
-        <p:nvSpPr>
-          <p:cNvPr id="17" name="TextBox 16"/>
-          <p:cNvSpPr txBox="1"/>
-          <p:nvPr/>
-        </p:nvSpPr>
-        <p:spPr>
-          <a:xfrm>
-            <a:off x="3493008" y="2596896"/>
-            <a:ext cx="1920240" cy="384048"/>
-          </a:xfrm>
-          <a:prstGeom prst="rect">
-            <a:avLst/>
-          </a:prstGeom>
-          <a:noFill/>
-        </p:spPr>
-        <p:txBody>
-          <a:bodyPr wrap="square" lIns="18288" rIns="18288">
-            <a:spAutoFit/>
-          </a:bodyPr>
-          <a:lstStyle/>
-          <a:p>
-            <a:pPr algn="l"/>
-            <a:r>
-              <a:rPr sz="1250" b="0">
+            <a:off x="3931920" y="2670048"/>
+            <a:ext cx="2148840" cy="329184"/>
+          </a:xfrm>
+          <a:prstGeom prst="rect">
+            <a:avLst/>
+          </a:prstGeom>
+          <a:noFill/>
+        </p:spPr>
+        <p:txBody>
+          <a:bodyPr wrap="square" lIns="18288" rIns="18288">
+            <a:spAutoFit/>
+          </a:bodyPr>
+          <a:lstStyle/>
+          <a:p>
+            <a:pPr algn="l"/>
+            <a:r>
+              <a:rPr sz="1150" b="0">
                 <a:solidFill>
                   <a:srgbClr val="64748B"/>
                 </a:solidFill>
@@ -9521,49 +9486,14 @@
       </p:sp>
       <p:sp>
         <p:nvSpPr>
-          <p:cNvPr id="18" name="TextBox 17"/>
-          <p:cNvSpPr txBox="1"/>
-          <p:nvPr/>
-        </p:nvSpPr>
-        <p:spPr>
-          <a:xfrm>
-            <a:off x="5532120" y="2468880"/>
-            <a:ext cx="256032" cy="219456"/>
-          </a:xfrm>
-          <a:prstGeom prst="rect">
-            <a:avLst/>
-          </a:prstGeom>
-          <a:noFill/>
-        </p:spPr>
-        <p:txBody>
-          <a:bodyPr wrap="square" lIns="18288" rIns="18288">
-            <a:spAutoFit/>
-          </a:bodyPr>
-          <a:lstStyle/>
-          <a:p>
-            <a:pPr algn="l"/>
-            <a:r>
-              <a:rPr sz="1800" b="1">
-                <a:solidFill>
-                  <a:srgbClr val="64748B"/>
-                </a:solidFill>
-                <a:latin typeface="Microsoft YaHei"/>
-              </a:rPr>
-              <a:t>→</a:t>
-            </a:r>
-          </a:p>
-        </p:txBody>
-      </p:sp>
-      <p:sp>
-        <p:nvSpPr>
-          <p:cNvPr id="19" name="Rounded Rectangle 18"/>
+          <p:cNvPr id="17" name="Rounded Rectangle 16"/>
           <p:cNvSpPr/>
           <p:nvPr/>
         </p:nvSpPr>
         <p:spPr>
           <a:xfrm>
-            <a:off x="5843016" y="1920240"/>
-            <a:ext cx="2331720" cy="1417320"/>
+            <a:off x="713232" y="3767328"/>
+            <a:ext cx="2697480" cy="1353312"/>
           </a:xfrm>
           <a:prstGeom prst="roundRect">
             <a:avLst/>
@@ -9601,99 +9531,99 @@
       </p:sp>
       <p:sp>
         <p:nvSpPr>
+          <p:cNvPr id="18" name="TextBox 17"/>
+          <p:cNvSpPr txBox="1"/>
+          <p:nvPr/>
+        </p:nvSpPr>
+        <p:spPr>
+          <a:xfrm>
+            <a:off x="914400" y="3968496"/>
+            <a:ext cx="502920" cy="274320"/>
+          </a:xfrm>
+          <a:prstGeom prst="rect">
+            <a:avLst/>
+          </a:prstGeom>
+          <a:noFill/>
+        </p:spPr>
+        <p:txBody>
+          <a:bodyPr wrap="square" lIns="18288" rIns="18288">
+            <a:spAutoFit/>
+          </a:bodyPr>
+          <a:lstStyle/>
+          <a:p>
+            <a:pPr algn="l"/>
+            <a:r>
+              <a:rPr sz="1800" b="1">
+                <a:solidFill>
+                  <a:srgbClr val="1E40AF"/>
+                </a:solidFill>
+                <a:latin typeface="Microsoft YaHei"/>
+              </a:rPr>
+              <a:t>03</a:t>
+            </a:r>
+          </a:p>
+        </p:txBody>
+      </p:sp>
+      <p:sp>
+        <p:nvSpPr>
+          <p:cNvPr id="19" name="TextBox 18"/>
+          <p:cNvSpPr txBox="1"/>
+          <p:nvPr/>
+        </p:nvSpPr>
+        <p:spPr>
+          <a:xfrm>
+            <a:off x="1499616" y="3950208"/>
+            <a:ext cx="1600200" cy="292608"/>
+          </a:xfrm>
+          <a:prstGeom prst="rect">
+            <a:avLst/>
+          </a:prstGeom>
+          <a:noFill/>
+        </p:spPr>
+        <p:txBody>
+          <a:bodyPr wrap="square" lIns="18288" rIns="18288">
+            <a:spAutoFit/>
+          </a:bodyPr>
+          <a:lstStyle/>
+          <a:p>
+            <a:pPr algn="l"/>
+            <a:r>
+              <a:rPr sz="1600" b="1">
+                <a:solidFill>
+                  <a:srgbClr val="0F172A"/>
+                </a:solidFill>
+                <a:latin typeface="Microsoft YaHei"/>
+              </a:rPr>
+              <a:t>端侧评分</a:t>
+            </a:r>
+          </a:p>
+        </p:txBody>
+      </p:sp>
+      <p:sp>
+        <p:nvSpPr>
           <p:cNvPr id="20" name="TextBox 19"/>
           <p:cNvSpPr txBox="1"/>
           <p:nvPr/>
         </p:nvSpPr>
         <p:spPr>
           <a:xfrm>
-            <a:off x="6025896" y="2084831"/>
-            <a:ext cx="502920" cy="274320"/>
-          </a:xfrm>
-          <a:prstGeom prst="rect">
-            <a:avLst/>
-          </a:prstGeom>
-          <a:noFill/>
-        </p:spPr>
-        <p:txBody>
-          <a:bodyPr wrap="square" lIns="18288" rIns="18288">
-            <a:spAutoFit/>
-          </a:bodyPr>
-          <a:lstStyle/>
-          <a:p>
-            <a:pPr algn="l"/>
-            <a:r>
-              <a:rPr sz="1800" b="1">
-                <a:solidFill>
-                  <a:srgbClr val="1E40AF"/>
-                </a:solidFill>
-                <a:latin typeface="Microsoft YaHei"/>
-              </a:rPr>
-              <a:t>03</a:t>
-            </a:r>
-          </a:p>
-        </p:txBody>
-      </p:sp>
-      <p:sp>
-        <p:nvSpPr>
-          <p:cNvPr id="21" name="TextBox 20"/>
-          <p:cNvSpPr txBox="1"/>
-          <p:nvPr/>
-        </p:nvSpPr>
-        <p:spPr>
-          <a:xfrm>
-            <a:off x="6592824" y="2057400"/>
-            <a:ext cx="1463040" cy="292608"/>
-          </a:xfrm>
-          <a:prstGeom prst="rect">
-            <a:avLst/>
-          </a:prstGeom>
-          <a:noFill/>
-        </p:spPr>
-        <p:txBody>
-          <a:bodyPr wrap="square" lIns="18288" rIns="18288">
-            <a:spAutoFit/>
-          </a:bodyPr>
-          <a:lstStyle/>
-          <a:p>
-            <a:pPr algn="l"/>
-            <a:r>
-              <a:rPr sz="1700" b="1">
-                <a:solidFill>
-                  <a:srgbClr val="0F172A"/>
-                </a:solidFill>
-                <a:latin typeface="Microsoft YaHei"/>
-              </a:rPr>
-              <a:t>端侧评分</a:t>
-            </a:r>
-          </a:p>
-        </p:txBody>
-      </p:sp>
-      <p:sp>
-        <p:nvSpPr>
-          <p:cNvPr id="22" name="TextBox 21"/>
-          <p:cNvSpPr txBox="1"/>
-          <p:nvPr/>
-        </p:nvSpPr>
-        <p:spPr>
-          <a:xfrm>
-            <a:off x="6071616" y="2596896"/>
-            <a:ext cx="1920240" cy="384048"/>
-          </a:xfrm>
-          <a:prstGeom prst="rect">
-            <a:avLst/>
-          </a:prstGeom>
-          <a:noFill/>
-        </p:spPr>
-        <p:txBody>
-          <a:bodyPr wrap="square" lIns="18288" rIns="18288">
-            <a:spAutoFit/>
-          </a:bodyPr>
-          <a:lstStyle/>
-          <a:p>
-            <a:pPr algn="l"/>
-            <a:r>
-              <a:rPr sz="1250" b="0">
+            <a:off x="941832" y="4517136"/>
+            <a:ext cx="2148840" cy="329184"/>
+          </a:xfrm>
+          <a:prstGeom prst="rect">
+            <a:avLst/>
+          </a:prstGeom>
+          <a:noFill/>
+        </p:spPr>
+        <p:txBody>
+          <a:bodyPr wrap="square" lIns="18288" rIns="18288">
+            <a:spAutoFit/>
+          </a:bodyPr>
+          <a:lstStyle/>
+          <a:p>
+            <a:pPr algn="l"/>
+            <a:r>
+              <a:rPr sz="1150" b="0">
                 <a:solidFill>
                   <a:srgbClr val="64748B"/>
                 </a:solidFill>
@@ -9706,49 +9636,14 @@
       </p:sp>
       <p:sp>
         <p:nvSpPr>
-          <p:cNvPr id="23" name="TextBox 22"/>
-          <p:cNvSpPr txBox="1"/>
-          <p:nvPr/>
-        </p:nvSpPr>
-        <p:spPr>
-          <a:xfrm>
-            <a:off x="8110728" y="2468880"/>
-            <a:ext cx="256032" cy="219456"/>
-          </a:xfrm>
-          <a:prstGeom prst="rect">
-            <a:avLst/>
-          </a:prstGeom>
-          <a:noFill/>
-        </p:spPr>
-        <p:txBody>
-          <a:bodyPr wrap="square" lIns="18288" rIns="18288">
-            <a:spAutoFit/>
-          </a:bodyPr>
-          <a:lstStyle/>
-          <a:p>
-            <a:pPr algn="l"/>
-            <a:r>
-              <a:rPr sz="1800" b="1">
-                <a:solidFill>
-                  <a:srgbClr val="64748B"/>
-                </a:solidFill>
-                <a:latin typeface="Microsoft YaHei"/>
-              </a:rPr>
-              <a:t>→</a:t>
-            </a:r>
-          </a:p>
-        </p:txBody>
-      </p:sp>
-      <p:sp>
-        <p:nvSpPr>
-          <p:cNvPr id="24" name="Rounded Rectangle 23"/>
+          <p:cNvPr id="21" name="Rounded Rectangle 20"/>
           <p:cNvSpPr/>
           <p:nvPr/>
         </p:nvSpPr>
         <p:spPr>
           <a:xfrm>
-            <a:off x="8421624" y="1920240"/>
-            <a:ext cx="2331720" cy="1417320"/>
+            <a:off x="3703320" y="3767328"/>
+            <a:ext cx="2697480" cy="1353312"/>
           </a:xfrm>
           <a:prstGeom prst="roundRect">
             <a:avLst/>
@@ -9786,13 +9681,13 @@
       </p:sp>
       <p:sp>
         <p:nvSpPr>
-          <p:cNvPr id="25" name="TextBox 24"/>
-          <p:cNvSpPr txBox="1"/>
-          <p:nvPr/>
-        </p:nvSpPr>
-        <p:spPr>
-          <a:xfrm>
-            <a:off x="8604504" y="2084831"/>
+          <p:cNvPr id="22" name="TextBox 21"/>
+          <p:cNvSpPr txBox="1"/>
+          <p:nvPr/>
+        </p:nvSpPr>
+        <p:spPr>
+          <a:xfrm>
+            <a:off x="3904487" y="3968496"/>
             <a:ext cx="502920" cy="274320"/>
           </a:xfrm>
           <a:prstGeom prst="rect">
@@ -9821,29 +9716,29 @@
       </p:sp>
       <p:sp>
         <p:nvSpPr>
-          <p:cNvPr id="26" name="TextBox 25"/>
-          <p:cNvSpPr txBox="1"/>
-          <p:nvPr/>
-        </p:nvSpPr>
-        <p:spPr>
-          <a:xfrm>
-            <a:off x="9171432" y="2057400"/>
-            <a:ext cx="1463040" cy="292608"/>
-          </a:xfrm>
-          <a:prstGeom prst="rect">
-            <a:avLst/>
-          </a:prstGeom>
-          <a:noFill/>
-        </p:spPr>
-        <p:txBody>
-          <a:bodyPr wrap="square" lIns="18288" rIns="18288">
-            <a:spAutoFit/>
-          </a:bodyPr>
-          <a:lstStyle/>
-          <a:p>
-            <a:pPr algn="l"/>
-            <a:r>
-              <a:rPr sz="1700" b="1">
+          <p:cNvPr id="23" name="TextBox 22"/>
+          <p:cNvSpPr txBox="1"/>
+          <p:nvPr/>
+        </p:nvSpPr>
+        <p:spPr>
+          <a:xfrm>
+            <a:off x="4489704" y="3950208"/>
+            <a:ext cx="1600200" cy="292608"/>
+          </a:xfrm>
+          <a:prstGeom prst="rect">
+            <a:avLst/>
+          </a:prstGeom>
+          <a:noFill/>
+        </p:spPr>
+        <p:txBody>
+          <a:bodyPr wrap="square" lIns="18288" rIns="18288">
+            <a:spAutoFit/>
+          </a:bodyPr>
+          <a:lstStyle/>
+          <a:p>
+            <a:pPr algn="l"/>
+            <a:r>
+              <a:rPr sz="1600" b="1">
                 <a:solidFill>
                   <a:srgbClr val="0F172A"/>
                 </a:solidFill>
@@ -9856,29 +9751,29 @@
       </p:sp>
       <p:sp>
         <p:nvSpPr>
-          <p:cNvPr id="27" name="TextBox 26"/>
-          <p:cNvSpPr txBox="1"/>
-          <p:nvPr/>
-        </p:nvSpPr>
-        <p:spPr>
-          <a:xfrm>
-            <a:off x="8650224" y="2596896"/>
-            <a:ext cx="1920240" cy="384048"/>
-          </a:xfrm>
-          <a:prstGeom prst="rect">
-            <a:avLst/>
-          </a:prstGeom>
-          <a:noFill/>
-        </p:spPr>
-        <p:txBody>
-          <a:bodyPr wrap="square" lIns="18288" rIns="18288">
-            <a:spAutoFit/>
-          </a:bodyPr>
-          <a:lstStyle/>
-          <a:p>
-            <a:pPr algn="l"/>
-            <a:r>
-              <a:rPr sz="1250" b="0">
+          <p:cNvPr id="24" name="TextBox 23"/>
+          <p:cNvSpPr txBox="1"/>
+          <p:nvPr/>
+        </p:nvSpPr>
+        <p:spPr>
+          <a:xfrm>
+            <a:off x="3931920" y="4517136"/>
+            <a:ext cx="2148840" cy="329184"/>
+          </a:xfrm>
+          <a:prstGeom prst="rect">
+            <a:avLst/>
+          </a:prstGeom>
+          <a:noFill/>
+        </p:spPr>
+        <p:txBody>
+          <a:bodyPr wrap="square" lIns="18288" rIns="18288">
+            <a:spAutoFit/>
+          </a:bodyPr>
+          <a:lstStyle/>
+          <a:p>
+            <a:pPr algn="l"/>
+            <a:r>
+              <a:rPr sz="1150" b="0">
                 <a:solidFill>
                   <a:srgbClr val="64748B"/>
                 </a:solidFill>
@@ -9891,7 +9786,7 @@
       </p:sp>
       <p:pic>
         <p:nvPicPr>
-          <p:cNvPr id="28" name="Picture 27" descr="V1.0摘要结果_20260512.png"/>
+          <p:cNvPr id="25" name="Picture 24" descr="summary_focus.png"/>
           <p:cNvPicPr>
             <a:picLocks noChangeAspect="1"/>
           </p:cNvPicPr>
@@ -9905,8 +9800,8 @@
         </p:blipFill>
         <p:spPr>
           <a:xfrm>
-            <a:off x="5765292" y="3794760"/>
-            <a:ext cx="905256" cy="2011680"/>
+            <a:off x="8092440" y="2040310"/>
+            <a:ext cx="2880360" cy="4194699"/>
           </a:xfrm>
           <a:prstGeom prst="rect">
             <a:avLst/>
@@ -9947,8 +9842,8 @@
         </p:nvSpPr>
         <p:spPr>
           <a:xfrm>
-            <a:off x="8947404" y="1773936"/>
-            <a:ext cx="2084831" cy="4498848"/>
+            <a:off x="8037576" y="1901553"/>
+            <a:ext cx="2990088" cy="4472214"/>
           </a:xfrm>
           <a:prstGeom prst="roundRect">
             <a:avLst/>
@@ -10237,8 +10132,8 @@
         </p:nvSpPr>
         <p:spPr>
           <a:xfrm>
-            <a:off x="685800" y="1920240"/>
-            <a:ext cx="2395728" cy="1243584"/>
+            <a:off x="713232" y="1874519"/>
+            <a:ext cx="2487168" cy="1097280"/>
           </a:xfrm>
           <a:prstGeom prst="roundRect">
             <a:avLst/>
@@ -10282,7 +10177,7 @@
         </p:nvSpPr>
         <p:spPr>
           <a:xfrm>
-            <a:off x="886968" y="2084832"/>
+            <a:off x="914400" y="2039112"/>
             <a:ext cx="1920240" cy="274320"/>
           </a:xfrm>
           <a:prstGeom prst="rect">
@@ -10317,23 +10212,23 @@
         </p:nvSpPr>
         <p:spPr>
           <a:xfrm>
-            <a:off x="886968" y="2468880"/>
-            <a:ext cx="1920240" cy="438912"/>
-          </a:xfrm>
-          <a:prstGeom prst="rect">
-            <a:avLst/>
-          </a:prstGeom>
-          <a:noFill/>
-        </p:spPr>
-        <p:txBody>
-          <a:bodyPr wrap="square" lIns="18288" rIns="18288">
-            <a:spAutoFit/>
-          </a:bodyPr>
-          <a:lstStyle/>
-          <a:p>
-            <a:pPr algn="l"/>
-            <a:r>
-              <a:rPr sz="1250" b="0">
+            <a:off x="914400" y="2404872"/>
+            <a:ext cx="1965960" cy="365760"/>
+          </a:xfrm>
+          <a:prstGeom prst="rect">
+            <a:avLst/>
+          </a:prstGeom>
+          <a:noFill/>
+        </p:spPr>
+        <p:txBody>
+          <a:bodyPr wrap="square" lIns="18288" rIns="18288">
+            <a:spAutoFit/>
+          </a:bodyPr>
+          <a:lstStyle/>
+          <a:p>
+            <a:pPr algn="l"/>
+            <a:r>
+              <a:rPr sz="1120" b="0">
                 <a:solidFill>
                   <a:srgbClr val="1E293B"/>
                 </a:solidFill>
@@ -10352,8 +10247,8 @@
         </p:nvSpPr>
         <p:spPr>
           <a:xfrm>
-            <a:off x="3429000" y="1920240"/>
-            <a:ext cx="2395728" cy="1243584"/>
+            <a:off x="3474720" y="1874519"/>
+            <a:ext cx="2487168" cy="1097280"/>
           </a:xfrm>
           <a:prstGeom prst="roundRect">
             <a:avLst/>
@@ -10397,7 +10292,7 @@
         </p:nvSpPr>
         <p:spPr>
           <a:xfrm>
-            <a:off x="3630168" y="2084832"/>
+            <a:off x="3675887" y="2039112"/>
             <a:ext cx="1920240" cy="274320"/>
           </a:xfrm>
           <a:prstGeom prst="rect">
@@ -10432,23 +10327,23 @@
         </p:nvSpPr>
         <p:spPr>
           <a:xfrm>
-            <a:off x="3630168" y="2468880"/>
-            <a:ext cx="1920240" cy="438912"/>
-          </a:xfrm>
-          <a:prstGeom prst="rect">
-            <a:avLst/>
-          </a:prstGeom>
-          <a:noFill/>
-        </p:spPr>
-        <p:txBody>
-          <a:bodyPr wrap="square" lIns="18288" rIns="18288">
-            <a:spAutoFit/>
-          </a:bodyPr>
-          <a:lstStyle/>
-          <a:p>
-            <a:pPr algn="l"/>
-            <a:r>
-              <a:rPr sz="1250" b="0">
+            <a:off x="3675887" y="2404872"/>
+            <a:ext cx="1965960" cy="365760"/>
+          </a:xfrm>
+          <a:prstGeom prst="rect">
+            <a:avLst/>
+          </a:prstGeom>
+          <a:noFill/>
+        </p:spPr>
+        <p:txBody>
+          <a:bodyPr wrap="square" lIns="18288" rIns="18288">
+            <a:spAutoFit/>
+          </a:bodyPr>
+          <a:lstStyle/>
+          <a:p>
+            <a:pPr algn="l"/>
+            <a:r>
+              <a:rPr sz="1120" b="0">
                 <a:solidFill>
                   <a:srgbClr val="1E293B"/>
                 </a:solidFill>
@@ -10467,8 +10362,8 @@
         </p:nvSpPr>
         <p:spPr>
           <a:xfrm>
-            <a:off x="6172200" y="1920240"/>
-            <a:ext cx="2395728" cy="1243584"/>
+            <a:off x="713232" y="3456432"/>
+            <a:ext cx="2487168" cy="1097280"/>
           </a:xfrm>
           <a:prstGeom prst="roundRect">
             <a:avLst/>
@@ -10512,7 +10407,7 @@
         </p:nvSpPr>
         <p:spPr>
           <a:xfrm>
-            <a:off x="6373368" y="2084832"/>
+            <a:off x="914400" y="3621024"/>
             <a:ext cx="1920240" cy="274320"/>
           </a:xfrm>
           <a:prstGeom prst="rect">
@@ -10547,23 +10442,23 @@
         </p:nvSpPr>
         <p:spPr>
           <a:xfrm>
-            <a:off x="6373368" y="2468880"/>
-            <a:ext cx="1920240" cy="438912"/>
-          </a:xfrm>
-          <a:prstGeom prst="rect">
-            <a:avLst/>
-          </a:prstGeom>
-          <a:noFill/>
-        </p:spPr>
-        <p:txBody>
-          <a:bodyPr wrap="square" lIns="18288" rIns="18288">
-            <a:spAutoFit/>
-          </a:bodyPr>
-          <a:lstStyle/>
-          <a:p>
-            <a:pPr algn="l"/>
-            <a:r>
-              <a:rPr sz="1250" b="0">
+            <a:off x="914400" y="3986783"/>
+            <a:ext cx="1965960" cy="365760"/>
+          </a:xfrm>
+          <a:prstGeom prst="rect">
+            <a:avLst/>
+          </a:prstGeom>
+          <a:noFill/>
+        </p:spPr>
+        <p:txBody>
+          <a:bodyPr wrap="square" lIns="18288" rIns="18288">
+            <a:spAutoFit/>
+          </a:bodyPr>
+          <a:lstStyle/>
+          <a:p>
+            <a:pPr algn="l"/>
+            <a:r>
+              <a:rPr sz="1120" b="0">
                 <a:solidFill>
                   <a:srgbClr val="1E293B"/>
                 </a:solidFill>
@@ -10582,8 +10477,8 @@
         </p:nvSpPr>
         <p:spPr>
           <a:xfrm>
-            <a:off x="685800" y="3886200"/>
-            <a:ext cx="2395728" cy="1243584"/>
+            <a:off x="3474720" y="3456432"/>
+            <a:ext cx="2487168" cy="1097280"/>
           </a:xfrm>
           <a:prstGeom prst="roundRect">
             <a:avLst/>
@@ -10627,7 +10522,7 @@
         </p:nvSpPr>
         <p:spPr>
           <a:xfrm>
-            <a:off x="886968" y="4050791"/>
+            <a:off x="3675887" y="3621024"/>
             <a:ext cx="1920240" cy="274320"/>
           </a:xfrm>
           <a:prstGeom prst="rect">
@@ -10662,23 +10557,23 @@
         </p:nvSpPr>
         <p:spPr>
           <a:xfrm>
-            <a:off x="886968" y="4434840"/>
-            <a:ext cx="1920240" cy="438912"/>
-          </a:xfrm>
-          <a:prstGeom prst="rect">
-            <a:avLst/>
-          </a:prstGeom>
-          <a:noFill/>
-        </p:spPr>
-        <p:txBody>
-          <a:bodyPr wrap="square" lIns="18288" rIns="18288">
-            <a:spAutoFit/>
-          </a:bodyPr>
-          <a:lstStyle/>
-          <a:p>
-            <a:pPr algn="l"/>
-            <a:r>
-              <a:rPr sz="1250" b="0">
+            <a:off x="3675887" y="3986783"/>
+            <a:ext cx="1965960" cy="365760"/>
+          </a:xfrm>
+          <a:prstGeom prst="rect">
+            <a:avLst/>
+          </a:prstGeom>
+          <a:noFill/>
+        </p:spPr>
+        <p:txBody>
+          <a:bodyPr wrap="square" lIns="18288" rIns="18288">
+            <a:spAutoFit/>
+          </a:bodyPr>
+          <a:lstStyle/>
+          <a:p>
+            <a:pPr algn="l"/>
+            <a:r>
+              <a:rPr sz="1120" b="0">
                 <a:solidFill>
                   <a:srgbClr val="1E293B"/>
                 </a:solidFill>
@@ -10697,8 +10592,8 @@
         </p:nvSpPr>
         <p:spPr>
           <a:xfrm>
-            <a:off x="3429000" y="3886200"/>
-            <a:ext cx="2395728" cy="1243584"/>
+            <a:off x="713232" y="5038344"/>
+            <a:ext cx="2487168" cy="1097280"/>
           </a:xfrm>
           <a:prstGeom prst="roundRect">
             <a:avLst/>
@@ -10742,7 +10637,7 @@
         </p:nvSpPr>
         <p:spPr>
           <a:xfrm>
-            <a:off x="3630168" y="4050791"/>
+            <a:off x="914400" y="5202936"/>
             <a:ext cx="1920240" cy="274320"/>
           </a:xfrm>
           <a:prstGeom prst="rect">
@@ -10777,23 +10672,23 @@
         </p:nvSpPr>
         <p:spPr>
           <a:xfrm>
-            <a:off x="3630168" y="4434840"/>
-            <a:ext cx="1920240" cy="438912"/>
-          </a:xfrm>
-          <a:prstGeom prst="rect">
-            <a:avLst/>
-          </a:prstGeom>
-          <a:noFill/>
-        </p:spPr>
-        <p:txBody>
-          <a:bodyPr wrap="square" lIns="18288" rIns="18288">
-            <a:spAutoFit/>
-          </a:bodyPr>
-          <a:lstStyle/>
-          <a:p>
-            <a:pPr algn="l"/>
-            <a:r>
-              <a:rPr sz="1250" b="0">
+            <a:off x="914400" y="5568696"/>
+            <a:ext cx="1965960" cy="365760"/>
+          </a:xfrm>
+          <a:prstGeom prst="rect">
+            <a:avLst/>
+          </a:prstGeom>
+          <a:noFill/>
+        </p:spPr>
+        <p:txBody>
+          <a:bodyPr wrap="square" lIns="18288" rIns="18288">
+            <a:spAutoFit/>
+          </a:bodyPr>
+          <a:lstStyle/>
+          <a:p>
+            <a:pPr algn="l"/>
+            <a:r>
+              <a:rPr sz="1120" b="0">
                 <a:solidFill>
                   <a:srgbClr val="1E293B"/>
                 </a:solidFill>
@@ -10812,8 +10707,8 @@
         </p:nvSpPr>
         <p:spPr>
           <a:xfrm>
-            <a:off x="6172200" y="3886200"/>
-            <a:ext cx="2395728" cy="1243584"/>
+            <a:off x="3474720" y="5038344"/>
+            <a:ext cx="2487168" cy="1097280"/>
           </a:xfrm>
           <a:prstGeom prst="roundRect">
             <a:avLst/>
@@ -10857,7 +10752,7 @@
         </p:nvSpPr>
         <p:spPr>
           <a:xfrm>
-            <a:off x="6373368" y="4050791"/>
+            <a:off x="3675887" y="5202936"/>
             <a:ext cx="1920240" cy="274320"/>
           </a:xfrm>
           <a:prstGeom prst="rect">
@@ -10892,23 +10787,23 @@
         </p:nvSpPr>
         <p:spPr>
           <a:xfrm>
-            <a:off x="6373368" y="4434840"/>
-            <a:ext cx="1920240" cy="438912"/>
-          </a:xfrm>
-          <a:prstGeom prst="rect">
-            <a:avLst/>
-          </a:prstGeom>
-          <a:noFill/>
-        </p:spPr>
-        <p:txBody>
-          <a:bodyPr wrap="square" lIns="18288" rIns="18288">
-            <a:spAutoFit/>
-          </a:bodyPr>
-          <a:lstStyle/>
-          <a:p>
-            <a:pPr algn="l"/>
-            <a:r>
-              <a:rPr sz="1250" b="0">
+            <a:off x="3675887" y="5568696"/>
+            <a:ext cx="1965960" cy="365760"/>
+          </a:xfrm>
+          <a:prstGeom prst="rect">
+            <a:avLst/>
+          </a:prstGeom>
+          <a:noFill/>
+        </p:spPr>
+        <p:txBody>
+          <a:bodyPr wrap="square" lIns="18288" rIns="18288">
+            <a:spAutoFit/>
+          </a:bodyPr>
+          <a:lstStyle/>
+          <a:p>
+            <a:pPr algn="l"/>
+            <a:r>
+              <a:rPr sz="1120" b="0">
                 <a:solidFill>
                   <a:srgbClr val="1E293B"/>
                 </a:solidFill>
@@ -10921,7 +10816,7 @@
       </p:sp>
       <p:pic>
         <p:nvPicPr>
-          <p:cNvPr id="27" name="Picture 26" descr="V1.0操作入口_20260512.png"/>
+          <p:cNvPr id="27" name="Picture 26" descr="entry_focus.png"/>
           <p:cNvPicPr>
             <a:picLocks noChangeAspect="1"/>
           </p:cNvPicPr>
@@ -10935,8 +10830,8 @@
         </p:blipFill>
         <p:spPr>
           <a:xfrm>
-            <a:off x="9002268" y="1828800"/>
-            <a:ext cx="1975103" cy="4389120"/>
+            <a:off x="8092440" y="1956417"/>
+            <a:ext cx="2880360" cy="4362486"/>
           </a:xfrm>
           <a:prstGeom prst="rect">
             <a:avLst/>
@@ -11222,8 +11117,8 @@
         </p:nvSpPr>
         <p:spPr>
           <a:xfrm>
-            <a:off x="731520" y="1874519"/>
-            <a:ext cx="2176272" cy="4160520"/>
+            <a:off x="1874519" y="1828800"/>
+            <a:ext cx="3703320" cy="4709160"/>
           </a:xfrm>
           <a:prstGeom prst="roundRect">
             <a:avLst/>
@@ -11261,7 +11156,7 @@
       </p:sp>
       <p:pic>
         <p:nvPicPr>
-          <p:cNvPr id="10" name="Picture 9" descr="V1.0首页_20260512.png"/>
+          <p:cNvPr id="10" name="Picture 9" descr="home_focus.png"/>
           <p:cNvPicPr>
             <a:picLocks noChangeAspect="1"/>
           </p:cNvPicPr>
@@ -11275,8 +11170,8 @@
         </p:blipFill>
         <p:spPr>
           <a:xfrm>
-            <a:off x="1054303" y="2039112"/>
-            <a:ext cx="1530705" cy="3401568"/>
+            <a:off x="2573416" y="1993392"/>
+            <a:ext cx="2305526" cy="4297680"/>
           </a:xfrm>
           <a:prstGeom prst="rect">
             <a:avLst/>
@@ -11291,8 +11186,8 @@
         </p:nvSpPr>
         <p:spPr>
           <a:xfrm>
-            <a:off x="932688" y="5577840"/>
-            <a:ext cx="1783080" cy="274320"/>
+            <a:off x="2148839" y="6236208"/>
+            <a:ext cx="3154680" cy="256032"/>
           </a:xfrm>
           <a:prstGeom prst="rect">
             <a:avLst/>
@@ -11326,8 +11221,8 @@
         </p:nvSpPr>
         <p:spPr>
           <a:xfrm>
-            <a:off x="3639312" y="1874519"/>
-            <a:ext cx="2176272" cy="4160520"/>
+            <a:off x="6537960" y="1828800"/>
+            <a:ext cx="3703320" cy="4709160"/>
           </a:xfrm>
           <a:prstGeom prst="roundRect">
             <a:avLst/>
@@ -11365,7 +11260,7 @@
       </p:sp>
       <p:pic>
         <p:nvPicPr>
-          <p:cNvPr id="13" name="Picture 12" descr="V1.0摘要结果_20260512.png"/>
+          <p:cNvPr id="13" name="Picture 12" descr="summary_focus.png"/>
           <p:cNvPicPr>
             <a:picLocks noChangeAspect="1"/>
           </p:cNvPicPr>
@@ -11379,8 +11274,8 @@
         </p:blipFill>
         <p:spPr>
           <a:xfrm>
-            <a:off x="3962095" y="2039112"/>
-            <a:ext cx="1530705" cy="3401568"/>
+            <a:off x="6914083" y="1993392"/>
+            <a:ext cx="2951073" cy="4297680"/>
           </a:xfrm>
           <a:prstGeom prst="rect">
             <a:avLst/>
@@ -11395,8 +11290,8 @@
         </p:nvSpPr>
         <p:spPr>
           <a:xfrm>
-            <a:off x="3840480" y="5577840"/>
-            <a:ext cx="1783080" cy="274320"/>
+            <a:off x="6812280" y="6236208"/>
+            <a:ext cx="3154680" cy="256032"/>
           </a:xfrm>
           <a:prstGeom prst="rect">
             <a:avLst/>
@@ -11418,214 +11313,6 @@
                 <a:latin typeface="Microsoft YaHei"/>
               </a:rPr>
               <a:t>摘要结果</a:t>
-            </a:r>
-          </a:p>
-        </p:txBody>
-      </p:sp>
-      <p:sp>
-        <p:nvSpPr>
-          <p:cNvPr id="15" name="Rounded Rectangle 14"/>
-          <p:cNvSpPr/>
-          <p:nvPr/>
-        </p:nvSpPr>
-        <p:spPr>
-          <a:xfrm>
-            <a:off x="6547104" y="1874519"/>
-            <a:ext cx="2176272" cy="4160520"/>
-          </a:xfrm>
-          <a:prstGeom prst="roundRect">
-            <a:avLst/>
-          </a:prstGeom>
-          <a:solidFill>
-            <a:srgbClr val="FFFFFF"/>
-          </a:solidFill>
-          <a:ln w="15240">
-            <a:solidFill>
-              <a:srgbClr val="CBD5E1"/>
-            </a:solidFill>
-          </a:ln>
-        </p:spPr>
-        <p:style>
-          <a:lnRef idx="1">
-            <a:schemeClr val="accent1"/>
-          </a:lnRef>
-          <a:fillRef idx="3">
-            <a:schemeClr val="accent1"/>
-          </a:fillRef>
-          <a:effectRef idx="2">
-            <a:schemeClr val="accent1"/>
-          </a:effectRef>
-          <a:fontRef idx="minor">
-            <a:schemeClr val="lt1"/>
-          </a:fontRef>
-        </p:style>
-        <p:txBody>
-          <a:bodyPr rtlCol="0" anchor="ctr"/>
-          <a:lstStyle/>
-          <a:p>
-            <a:pPr algn="ctr"/>
-          </a:p>
-        </p:txBody>
-      </p:sp>
-      <p:pic>
-        <p:nvPicPr>
-          <p:cNvPr id="16" name="Picture 15" descr="V1.0LiteRT端侧分析_20260512.png"/>
-          <p:cNvPicPr>
-            <a:picLocks noChangeAspect="1"/>
-          </p:cNvPicPr>
-          <p:nvPr/>
-        </p:nvPicPr>
-        <p:blipFill>
-          <a:blip r:embed="rId4"/>
-          <a:stretch>
-            <a:fillRect/>
-          </a:stretch>
-        </p:blipFill>
-        <p:spPr>
-          <a:xfrm>
-            <a:off x="6869887" y="2039112"/>
-            <a:ext cx="1530705" cy="3401568"/>
-          </a:xfrm>
-          <a:prstGeom prst="rect">
-            <a:avLst/>
-          </a:prstGeom>
-        </p:spPr>
-      </p:pic>
-      <p:sp>
-        <p:nvSpPr>
-          <p:cNvPr id="17" name="TextBox 16"/>
-          <p:cNvSpPr txBox="1"/>
-          <p:nvPr/>
-        </p:nvSpPr>
-        <p:spPr>
-          <a:xfrm>
-            <a:off x="6748272" y="5577840"/>
-            <a:ext cx="1783080" cy="274320"/>
-          </a:xfrm>
-          <a:prstGeom prst="rect">
-            <a:avLst/>
-          </a:prstGeom>
-          <a:noFill/>
-        </p:spPr>
-        <p:txBody>
-          <a:bodyPr wrap="square" lIns="18288" rIns="18288">
-            <a:spAutoFit/>
-          </a:bodyPr>
-          <a:lstStyle/>
-          <a:p>
-            <a:pPr algn="ctr"/>
-            <a:r>
-              <a:rPr sz="1300" b="1">
-                <a:solidFill>
-                  <a:srgbClr val="1E40AF"/>
-                </a:solidFill>
-                <a:latin typeface="Microsoft YaHei"/>
-              </a:rPr>
-              <a:t>LiteRT 分析</a:t>
-            </a:r>
-          </a:p>
-        </p:txBody>
-      </p:sp>
-      <p:sp>
-        <p:nvSpPr>
-          <p:cNvPr id="18" name="Rounded Rectangle 17"/>
-          <p:cNvSpPr/>
-          <p:nvPr/>
-        </p:nvSpPr>
-        <p:spPr>
-          <a:xfrm>
-            <a:off x="9454896" y="1874519"/>
-            <a:ext cx="2176272" cy="4160520"/>
-          </a:xfrm>
-          <a:prstGeom prst="roundRect">
-            <a:avLst/>
-          </a:prstGeom>
-          <a:solidFill>
-            <a:srgbClr val="FFFFFF"/>
-          </a:solidFill>
-          <a:ln w="15240">
-            <a:solidFill>
-              <a:srgbClr val="CBD5E1"/>
-            </a:solidFill>
-          </a:ln>
-        </p:spPr>
-        <p:style>
-          <a:lnRef idx="1">
-            <a:schemeClr val="accent1"/>
-          </a:lnRef>
-          <a:fillRef idx="3">
-            <a:schemeClr val="accent1"/>
-          </a:fillRef>
-          <a:effectRef idx="2">
-            <a:schemeClr val="accent1"/>
-          </a:effectRef>
-          <a:fontRef idx="minor">
-            <a:schemeClr val="lt1"/>
-          </a:fontRef>
-        </p:style>
-        <p:txBody>
-          <a:bodyPr rtlCol="0" anchor="ctr"/>
-          <a:lstStyle/>
-          <a:p>
-            <a:pPr algn="ctr"/>
-          </a:p>
-        </p:txBody>
-      </p:sp>
-      <p:pic>
-        <p:nvPicPr>
-          <p:cNvPr id="19" name="Picture 18" descr="V1.0Agent问答_20260512.png"/>
-          <p:cNvPicPr>
-            <a:picLocks noChangeAspect="1"/>
-          </p:cNvPicPr>
-          <p:nvPr/>
-        </p:nvPicPr>
-        <p:blipFill>
-          <a:blip r:embed="rId5"/>
-          <a:stretch>
-            <a:fillRect/>
-          </a:stretch>
-        </p:blipFill>
-        <p:spPr>
-          <a:xfrm>
-            <a:off x="9777679" y="2039112"/>
-            <a:ext cx="1530705" cy="3401568"/>
-          </a:xfrm>
-          <a:prstGeom prst="rect">
-            <a:avLst/>
-          </a:prstGeom>
-        </p:spPr>
-      </p:pic>
-      <p:sp>
-        <p:nvSpPr>
-          <p:cNvPr id="20" name="TextBox 19"/>
-          <p:cNvSpPr txBox="1"/>
-          <p:nvPr/>
-        </p:nvSpPr>
-        <p:spPr>
-          <a:xfrm>
-            <a:off x="9656064" y="5577840"/>
-            <a:ext cx="1783080" cy="274320"/>
-          </a:xfrm>
-          <a:prstGeom prst="rect">
-            <a:avLst/>
-          </a:prstGeom>
-          <a:noFill/>
-        </p:spPr>
-        <p:txBody>
-          <a:bodyPr wrap="square" lIns="18288" rIns="18288">
-            <a:spAutoFit/>
-          </a:bodyPr>
-          <a:lstStyle/>
-          <a:p>
-            <a:pPr algn="ctr"/>
-            <a:r>
-              <a:rPr sz="1300" b="1">
-                <a:solidFill>
-                  <a:srgbClr val="1E40AF"/>
-                </a:solidFill>
-                <a:latin typeface="Microsoft YaHei"/>
-              </a:rPr>
-              <a:t>Agent 问答</a:t>
             </a:r>
           </a:p>
         </p:txBody>
@@ -12604,8 +12291,8 @@
         </p:nvSpPr>
         <p:spPr>
           <a:xfrm>
-            <a:off x="5450967" y="3648456"/>
-            <a:ext cx="1076705" cy="2258568"/>
+            <a:off x="7946136" y="1962143"/>
+            <a:ext cx="3081528" cy="4351034"/>
           </a:xfrm>
           <a:prstGeom prst="roundRect">
             <a:avLst/>
@@ -12894,8 +12581,8 @@
         </p:nvSpPr>
         <p:spPr>
           <a:xfrm>
-            <a:off x="713232" y="2011680"/>
-            <a:ext cx="2240280" cy="1097280"/>
+            <a:off x="731520" y="1874519"/>
+            <a:ext cx="5989320" cy="713232"/>
           </a:xfrm>
           <a:prstGeom prst="roundRect">
             <a:avLst/>
@@ -12939,23 +12626,23 @@
         </p:nvSpPr>
         <p:spPr>
           <a:xfrm>
-            <a:off x="896112" y="2176272"/>
-            <a:ext cx="1828800" cy="274320"/>
-          </a:xfrm>
-          <a:prstGeom prst="rect">
-            <a:avLst/>
-          </a:prstGeom>
-          <a:noFill/>
-        </p:spPr>
-        <p:txBody>
-          <a:bodyPr wrap="square" lIns="18288" rIns="18288">
-            <a:spAutoFit/>
-          </a:bodyPr>
-          <a:lstStyle/>
-          <a:p>
-            <a:pPr algn="ctr"/>
-            <a:r>
-              <a:rPr sz="1500" b="1">
+            <a:off x="960120" y="2002535"/>
+            <a:ext cx="1234440" cy="256032"/>
+          </a:xfrm>
+          <a:prstGeom prst="rect">
+            <a:avLst/>
+          </a:prstGeom>
+          <a:noFill/>
+        </p:spPr>
+        <p:txBody>
+          <a:bodyPr wrap="square" lIns="18288" rIns="18288">
+            <a:spAutoFit/>
+          </a:bodyPr>
+          <a:lstStyle/>
+          <a:p>
+            <a:pPr algn="l"/>
+            <a:r>
+              <a:rPr sz="1400" b="1">
                 <a:solidFill>
                   <a:srgbClr val="1E40AF"/>
                 </a:solidFill>
@@ -12974,23 +12661,23 @@
         </p:nvSpPr>
         <p:spPr>
           <a:xfrm>
-            <a:off x="914400" y="2578608"/>
-            <a:ext cx="1783080" cy="256032"/>
-          </a:xfrm>
-          <a:prstGeom prst="rect">
-            <a:avLst/>
-          </a:prstGeom>
-          <a:noFill/>
-        </p:spPr>
-        <p:txBody>
-          <a:bodyPr wrap="square" lIns="18288" rIns="18288">
-            <a:spAutoFit/>
-          </a:bodyPr>
-          <a:lstStyle/>
-          <a:p>
-            <a:pPr algn="ctr"/>
-            <a:r>
-              <a:rPr sz="1050" b="0">
+            <a:off x="2267712" y="2002535"/>
+            <a:ext cx="3977639" cy="256032"/>
+          </a:xfrm>
+          <a:prstGeom prst="rect">
+            <a:avLst/>
+          </a:prstGeom>
+          <a:noFill/>
+        </p:spPr>
+        <p:txBody>
+          <a:bodyPr wrap="square" lIns="18288" rIns="18288">
+            <a:spAutoFit/>
+          </a:bodyPr>
+          <a:lstStyle/>
+          <a:p>
+            <a:pPr algn="l"/>
+            <a:r>
+              <a:rPr sz="1150" b="0">
                 <a:solidFill>
                   <a:srgbClr val="1E293B"/>
                 </a:solidFill>
@@ -13009,8 +12696,8 @@
         </p:nvSpPr>
         <p:spPr>
           <a:xfrm>
-            <a:off x="3200400" y="2011680"/>
-            <a:ext cx="2240280" cy="1097280"/>
+            <a:off x="731520" y="2724911"/>
+            <a:ext cx="5989320" cy="713232"/>
           </a:xfrm>
           <a:prstGeom prst="roundRect">
             <a:avLst/>
@@ -13054,23 +12741,23 @@
         </p:nvSpPr>
         <p:spPr>
           <a:xfrm>
-            <a:off x="3383280" y="2176272"/>
-            <a:ext cx="1828800" cy="274320"/>
-          </a:xfrm>
-          <a:prstGeom prst="rect">
-            <a:avLst/>
-          </a:prstGeom>
-          <a:noFill/>
-        </p:spPr>
-        <p:txBody>
-          <a:bodyPr wrap="square" lIns="18288" rIns="18288">
-            <a:spAutoFit/>
-          </a:bodyPr>
-          <a:lstStyle/>
-          <a:p>
-            <a:pPr algn="ctr"/>
-            <a:r>
-              <a:rPr sz="1500" b="1">
+            <a:off x="960120" y="2852927"/>
+            <a:ext cx="1234440" cy="256032"/>
+          </a:xfrm>
+          <a:prstGeom prst="rect">
+            <a:avLst/>
+          </a:prstGeom>
+          <a:noFill/>
+        </p:spPr>
+        <p:txBody>
+          <a:bodyPr wrap="square" lIns="18288" rIns="18288">
+            <a:spAutoFit/>
+          </a:bodyPr>
+          <a:lstStyle/>
+          <a:p>
+            <a:pPr algn="l"/>
+            <a:r>
+              <a:rPr sz="1400" b="1">
                 <a:solidFill>
                   <a:srgbClr val="1E40AF"/>
                 </a:solidFill>
@@ -13089,23 +12776,23 @@
         </p:nvSpPr>
         <p:spPr>
           <a:xfrm>
-            <a:off x="3401568" y="2578608"/>
-            <a:ext cx="1783080" cy="256032"/>
-          </a:xfrm>
-          <a:prstGeom prst="rect">
-            <a:avLst/>
-          </a:prstGeom>
-          <a:noFill/>
-        </p:spPr>
-        <p:txBody>
-          <a:bodyPr wrap="square" lIns="18288" rIns="18288">
-            <a:spAutoFit/>
-          </a:bodyPr>
-          <a:lstStyle/>
-          <a:p>
-            <a:pPr algn="ctr"/>
-            <a:r>
-              <a:rPr sz="1050" b="0">
+            <a:off x="2267712" y="2852927"/>
+            <a:ext cx="3977639" cy="256032"/>
+          </a:xfrm>
+          <a:prstGeom prst="rect">
+            <a:avLst/>
+          </a:prstGeom>
+          <a:noFill/>
+        </p:spPr>
+        <p:txBody>
+          <a:bodyPr wrap="square" lIns="18288" rIns="18288">
+            <a:spAutoFit/>
+          </a:bodyPr>
+          <a:lstStyle/>
+          <a:p>
+            <a:pPr algn="l"/>
+            <a:r>
+              <a:rPr sz="1150" b="0">
                 <a:solidFill>
                   <a:srgbClr val="1E293B"/>
                 </a:solidFill>
@@ -13124,8 +12811,8 @@
         </p:nvSpPr>
         <p:spPr>
           <a:xfrm>
-            <a:off x="5687568" y="2011680"/>
-            <a:ext cx="2240280" cy="1097280"/>
+            <a:off x="731520" y="3575303"/>
+            <a:ext cx="5989320" cy="713232"/>
           </a:xfrm>
           <a:prstGeom prst="roundRect">
             <a:avLst/>
@@ -13169,23 +12856,23 @@
         </p:nvSpPr>
         <p:spPr>
           <a:xfrm>
-            <a:off x="5870448" y="2176272"/>
-            <a:ext cx="1828800" cy="274320"/>
-          </a:xfrm>
-          <a:prstGeom prst="rect">
-            <a:avLst/>
-          </a:prstGeom>
-          <a:noFill/>
-        </p:spPr>
-        <p:txBody>
-          <a:bodyPr wrap="square" lIns="18288" rIns="18288">
-            <a:spAutoFit/>
-          </a:bodyPr>
-          <a:lstStyle/>
-          <a:p>
-            <a:pPr algn="ctr"/>
-            <a:r>
-              <a:rPr sz="1500" b="1">
+            <a:off x="960120" y="3703319"/>
+            <a:ext cx="1234440" cy="256032"/>
+          </a:xfrm>
+          <a:prstGeom prst="rect">
+            <a:avLst/>
+          </a:prstGeom>
+          <a:noFill/>
+        </p:spPr>
+        <p:txBody>
+          <a:bodyPr wrap="square" lIns="18288" rIns="18288">
+            <a:spAutoFit/>
+          </a:bodyPr>
+          <a:lstStyle/>
+          <a:p>
+            <a:pPr algn="l"/>
+            <a:r>
+              <a:rPr sz="1400" b="1">
                 <a:solidFill>
                   <a:srgbClr val="1E40AF"/>
                 </a:solidFill>
@@ -13204,23 +12891,23 @@
         </p:nvSpPr>
         <p:spPr>
           <a:xfrm>
-            <a:off x="5888736" y="2578608"/>
-            <a:ext cx="1783080" cy="256032"/>
-          </a:xfrm>
-          <a:prstGeom prst="rect">
-            <a:avLst/>
-          </a:prstGeom>
-          <a:noFill/>
-        </p:spPr>
-        <p:txBody>
-          <a:bodyPr wrap="square" lIns="18288" rIns="18288">
-            <a:spAutoFit/>
-          </a:bodyPr>
-          <a:lstStyle/>
-          <a:p>
-            <a:pPr algn="ctr"/>
-            <a:r>
-              <a:rPr sz="1050" b="0">
+            <a:off x="2267712" y="3703319"/>
+            <a:ext cx="3977639" cy="256032"/>
+          </a:xfrm>
+          <a:prstGeom prst="rect">
+            <a:avLst/>
+          </a:prstGeom>
+          <a:noFill/>
+        </p:spPr>
+        <p:txBody>
+          <a:bodyPr wrap="square" lIns="18288" rIns="18288">
+            <a:spAutoFit/>
+          </a:bodyPr>
+          <a:lstStyle/>
+          <a:p>
+            <a:pPr algn="l"/>
+            <a:r>
+              <a:rPr sz="1150" b="0">
                 <a:solidFill>
                   <a:srgbClr val="1E293B"/>
                 </a:solidFill>
@@ -13239,8 +12926,8 @@
         </p:nvSpPr>
         <p:spPr>
           <a:xfrm>
-            <a:off x="8174736" y="2011680"/>
-            <a:ext cx="2240280" cy="1097280"/>
+            <a:off x="731520" y="4425695"/>
+            <a:ext cx="5989320" cy="713232"/>
           </a:xfrm>
           <a:prstGeom prst="roundRect">
             <a:avLst/>
@@ -13284,8 +12971,78 @@
         </p:nvSpPr>
         <p:spPr>
           <a:xfrm>
-            <a:off x="8357616" y="2176272"/>
-            <a:ext cx="1828800" cy="274320"/>
+            <a:off x="960120" y="4553711"/>
+            <a:ext cx="1234440" cy="256032"/>
+          </a:xfrm>
+          <a:prstGeom prst="rect">
+            <a:avLst/>
+          </a:prstGeom>
+          <a:noFill/>
+        </p:spPr>
+        <p:txBody>
+          <a:bodyPr wrap="square" lIns="18288" rIns="18288">
+            <a:spAutoFit/>
+          </a:bodyPr>
+          <a:lstStyle/>
+          <a:p>
+            <a:pPr algn="l"/>
+            <a:r>
+              <a:rPr sz="1400" b="1">
+                <a:solidFill>
+                  <a:srgbClr val="1E40AF"/>
+                </a:solidFill>
+                <a:latin typeface="Microsoft YaHei"/>
+              </a:rPr>
+              <a:t>重要性等级</a:t>
+            </a:r>
+          </a:p>
+        </p:txBody>
+      </p:sp>
+      <p:sp>
+        <p:nvSpPr>
+          <p:cNvPr id="20" name="TextBox 19"/>
+          <p:cNvSpPr txBox="1"/>
+          <p:nvPr/>
+        </p:nvSpPr>
+        <p:spPr>
+          <a:xfrm>
+            <a:off x="2267712" y="4553711"/>
+            <a:ext cx="3977639" cy="256032"/>
+          </a:xfrm>
+          <a:prstGeom prst="rect">
+            <a:avLst/>
+          </a:prstGeom>
+          <a:noFill/>
+        </p:spPr>
+        <p:txBody>
+          <a:bodyPr wrap="square" lIns="18288" rIns="18288">
+            <a:spAutoFit/>
+          </a:bodyPr>
+          <a:lstStyle/>
+          <a:p>
+            <a:pPr algn="l"/>
+            <a:r>
+              <a:rPr sz="1150" b="0">
+                <a:solidFill>
+                  <a:srgbClr val="1E293B"/>
+                </a:solidFill>
+                <a:latin typeface="Microsoft YaHei"/>
+              </a:rPr>
+              <a:t>分数转为高/中/低展示</a:t>
+            </a:r>
+          </a:p>
+        </p:txBody>
+      </p:sp>
+      <p:sp>
+        <p:nvSpPr>
+          <p:cNvPr id="21" name="TextBox 20"/>
+          <p:cNvSpPr txBox="1"/>
+          <p:nvPr/>
+        </p:nvSpPr>
+        <p:spPr>
+          <a:xfrm>
+            <a:off x="868680" y="5376672"/>
+            <a:ext cx="5669280" cy="329184"/>
           </a:xfrm>
           <a:prstGeom prst="rect">
             <a:avLst/>
@@ -13301,76 +13058,6 @@
             <a:pPr algn="ctr"/>
             <a:r>
               <a:rPr sz="1500" b="1">
-                <a:solidFill>
-                  <a:srgbClr val="1E40AF"/>
-                </a:solidFill>
-                <a:latin typeface="Microsoft YaHei"/>
-              </a:rPr>
-              <a:t>重要性等级</a:t>
-            </a:r>
-          </a:p>
-        </p:txBody>
-      </p:sp>
-      <p:sp>
-        <p:nvSpPr>
-          <p:cNvPr id="20" name="TextBox 19"/>
-          <p:cNvSpPr txBox="1"/>
-          <p:nvPr/>
-        </p:nvSpPr>
-        <p:spPr>
-          <a:xfrm>
-            <a:off x="8375904" y="2578608"/>
-            <a:ext cx="1783080" cy="256032"/>
-          </a:xfrm>
-          <a:prstGeom prst="rect">
-            <a:avLst/>
-          </a:prstGeom>
-          <a:noFill/>
-        </p:spPr>
-        <p:txBody>
-          <a:bodyPr wrap="square" lIns="18288" rIns="18288">
-            <a:spAutoFit/>
-          </a:bodyPr>
-          <a:lstStyle/>
-          <a:p>
-            <a:pPr algn="ctr"/>
-            <a:r>
-              <a:rPr sz="1050" b="0">
-                <a:solidFill>
-                  <a:srgbClr val="1E293B"/>
-                </a:solidFill>
-                <a:latin typeface="Microsoft YaHei"/>
-              </a:rPr>
-              <a:t>分数转为高/中/低展示</a:t>
-            </a:r>
-          </a:p>
-        </p:txBody>
-      </p:sp>
-      <p:sp>
-        <p:nvSpPr>
-          <p:cNvPr id="21" name="TextBox 20"/>
-          <p:cNvSpPr txBox="1"/>
-          <p:nvPr/>
-        </p:nvSpPr>
-        <p:spPr>
-          <a:xfrm>
-            <a:off x="1508760" y="3246120"/>
-            <a:ext cx="8321040" cy="365760"/>
-          </a:xfrm>
-          <a:prstGeom prst="rect">
-            <a:avLst/>
-          </a:prstGeom>
-          <a:noFill/>
-        </p:spPr>
-        <p:txBody>
-          <a:bodyPr wrap="square" lIns="18288" rIns="18288">
-            <a:spAutoFit/>
-          </a:bodyPr>
-          <a:lstStyle/>
-          <a:p>
-            <a:pPr algn="ctr"/>
-            <a:r>
-              <a:rPr sz="1800" b="1">
                 <a:solidFill>
                   <a:srgbClr val="0F172A"/>
                 </a:solidFill>
@@ -13383,7 +13070,7 @@
       </p:sp>
       <p:pic>
         <p:nvPicPr>
-          <p:cNvPr id="22" name="Picture 21" descr="V1.0LiteRT端侧分析_20260512.png"/>
+          <p:cNvPr id="22" name="Picture 21" descr="litert_focus.png"/>
           <p:cNvPicPr>
             <a:picLocks noChangeAspect="1"/>
           </p:cNvPicPr>
@@ -13397,8 +13084,8 @@
         </p:blipFill>
         <p:spPr>
           <a:xfrm>
-            <a:off x="5505831" y="3703320"/>
-            <a:ext cx="966977" cy="2148840"/>
+            <a:off x="8001000" y="2017007"/>
+            <a:ext cx="2971800" cy="4241306"/>
           </a:xfrm>
           <a:prstGeom prst="rect">
             <a:avLst/>
@@ -13433,14 +13120,14 @@
       <p:grpSpPr/>
       <p:sp>
         <p:nvSpPr>
-          <p:cNvPr id="19" name="Rounded Rectangle 18"/>
+          <p:cNvPr id="21" name="Rounded Rectangle 20"/>
           <p:cNvSpPr/>
           <p:nvPr/>
         </p:nvSpPr>
         <p:spPr>
           <a:xfrm>
-            <a:off x="5567553" y="3602736"/>
-            <a:ext cx="1117854" cy="2350008"/>
+            <a:off x="7946136" y="1839520"/>
+            <a:ext cx="3081528" cy="4596280"/>
           </a:xfrm>
           <a:prstGeom prst="roundRect">
             <a:avLst/>
@@ -13729,8 +13416,8 @@
         </p:nvSpPr>
         <p:spPr>
           <a:xfrm>
-            <a:off x="777240" y="1920240"/>
-            <a:ext cx="2788920" cy="1325880"/>
+            <a:off x="749808" y="1901952"/>
+            <a:ext cx="5989320" cy="932688"/>
           </a:xfrm>
           <a:prstGeom prst="roundRect">
             <a:avLst/>
@@ -13774,23 +13461,23 @@
         </p:nvSpPr>
         <p:spPr>
           <a:xfrm>
-            <a:off x="960120" y="2103120"/>
-            <a:ext cx="2194560" cy="274320"/>
-          </a:xfrm>
-          <a:prstGeom prst="rect">
-            <a:avLst/>
-          </a:prstGeom>
-          <a:noFill/>
-        </p:spPr>
-        <p:txBody>
-          <a:bodyPr wrap="square" lIns="18288" rIns="18288">
-            <a:spAutoFit/>
-          </a:bodyPr>
-          <a:lstStyle/>
-          <a:p>
-            <a:pPr algn="l"/>
-            <a:r>
-              <a:rPr sz="1600" b="1">
+            <a:off x="987552" y="2057400"/>
+            <a:ext cx="1234440" cy="274320"/>
+          </a:xfrm>
+          <a:prstGeom prst="rect">
+            <a:avLst/>
+          </a:prstGeom>
+          <a:noFill/>
+        </p:spPr>
+        <p:txBody>
+          <a:bodyPr wrap="square" lIns="18288" rIns="18288">
+            <a:spAutoFit/>
+          </a:bodyPr>
+          <a:lstStyle/>
+          <a:p>
+            <a:pPr algn="l"/>
+            <a:r>
+              <a:rPr sz="1500" b="1">
                 <a:solidFill>
                   <a:srgbClr val="047857"/>
                 </a:solidFill>
@@ -13809,23 +13496,23 @@
         </p:nvSpPr>
         <p:spPr>
           <a:xfrm>
-            <a:off x="960120" y="2542032"/>
-            <a:ext cx="2331720" cy="438912"/>
-          </a:xfrm>
-          <a:prstGeom prst="rect">
-            <a:avLst/>
-          </a:prstGeom>
-          <a:noFill/>
-        </p:spPr>
-        <p:txBody>
-          <a:bodyPr wrap="square" lIns="18288" rIns="18288">
-            <a:spAutoFit/>
-          </a:bodyPr>
-          <a:lstStyle/>
-          <a:p>
-            <a:pPr algn="l"/>
-            <a:r>
-              <a:rPr sz="1200" b="0">
+            <a:off x="2267712" y="2057400"/>
+            <a:ext cx="3886200" cy="384048"/>
+          </a:xfrm>
+          <a:prstGeom prst="rect">
+            <a:avLst/>
+          </a:prstGeom>
+          <a:noFill/>
+        </p:spPr>
+        <p:txBody>
+          <a:bodyPr wrap="square" lIns="18288" rIns="18288">
+            <a:spAutoFit/>
+          </a:bodyPr>
+          <a:lstStyle/>
+          <a:p>
+            <a:pPr algn="l"/>
+            <a:r>
+              <a:rPr sz="1150" b="0">
                 <a:solidFill>
                   <a:srgbClr val="1E293B"/>
                 </a:solidFill>
@@ -13844,8 +13531,8 @@
         </p:nvSpPr>
         <p:spPr>
           <a:xfrm>
-            <a:off x="3840480" y="1920240"/>
-            <a:ext cx="2788920" cy="1325880"/>
+            <a:off x="749808" y="2999232"/>
+            <a:ext cx="5989320" cy="932688"/>
           </a:xfrm>
           <a:prstGeom prst="roundRect">
             <a:avLst/>
@@ -13889,23 +13576,23 @@
         </p:nvSpPr>
         <p:spPr>
           <a:xfrm>
-            <a:off x="4023360" y="2103120"/>
-            <a:ext cx="2194560" cy="274320"/>
-          </a:xfrm>
-          <a:prstGeom prst="rect">
-            <a:avLst/>
-          </a:prstGeom>
-          <a:noFill/>
-        </p:spPr>
-        <p:txBody>
-          <a:bodyPr wrap="square" lIns="18288" rIns="18288">
-            <a:spAutoFit/>
-          </a:bodyPr>
-          <a:lstStyle/>
-          <a:p>
-            <a:pPr algn="l"/>
-            <a:r>
-              <a:rPr sz="1600" b="1">
+            <a:off x="987552" y="3154680"/>
+            <a:ext cx="1234440" cy="274320"/>
+          </a:xfrm>
+          <a:prstGeom prst="rect">
+            <a:avLst/>
+          </a:prstGeom>
+          <a:noFill/>
+        </p:spPr>
+        <p:txBody>
+          <a:bodyPr wrap="square" lIns="18288" rIns="18288">
+            <a:spAutoFit/>
+          </a:bodyPr>
+          <a:lstStyle/>
+          <a:p>
+            <a:pPr algn="l"/>
+            <a:r>
+              <a:rPr sz="1500" b="1">
                 <a:solidFill>
                   <a:srgbClr val="047857"/>
                 </a:solidFill>
@@ -13924,23 +13611,23 @@
         </p:nvSpPr>
         <p:spPr>
           <a:xfrm>
-            <a:off x="4023360" y="2542032"/>
-            <a:ext cx="2331720" cy="438912"/>
-          </a:xfrm>
-          <a:prstGeom prst="rect">
-            <a:avLst/>
-          </a:prstGeom>
-          <a:noFill/>
-        </p:spPr>
-        <p:txBody>
-          <a:bodyPr wrap="square" lIns="18288" rIns="18288">
-            <a:spAutoFit/>
-          </a:bodyPr>
-          <a:lstStyle/>
-          <a:p>
-            <a:pPr algn="l"/>
-            <a:r>
-              <a:rPr sz="1200" b="0">
+            <a:off x="2267712" y="3154680"/>
+            <a:ext cx="3886200" cy="384048"/>
+          </a:xfrm>
+          <a:prstGeom prst="rect">
+            <a:avLst/>
+          </a:prstGeom>
+          <a:noFill/>
+        </p:spPr>
+        <p:txBody>
+          <a:bodyPr wrap="square" lIns="18288" rIns="18288">
+            <a:spAutoFit/>
+          </a:bodyPr>
+          <a:lstStyle/>
+          <a:p>
+            <a:pPr algn="l"/>
+            <a:r>
+              <a:rPr sz="1150" b="0">
                 <a:solidFill>
                   <a:srgbClr val="1E293B"/>
                 </a:solidFill>
@@ -13959,8 +13646,8 @@
         </p:nvSpPr>
         <p:spPr>
           <a:xfrm>
-            <a:off x="6903720" y="1920240"/>
-            <a:ext cx="2788920" cy="1325880"/>
+            <a:off x="749808" y="4096512"/>
+            <a:ext cx="5989320" cy="932688"/>
           </a:xfrm>
           <a:prstGeom prst="roundRect">
             <a:avLst/>
@@ -14004,23 +13691,23 @@
         </p:nvSpPr>
         <p:spPr>
           <a:xfrm>
-            <a:off x="7086600" y="2103120"/>
-            <a:ext cx="2194560" cy="274320"/>
-          </a:xfrm>
-          <a:prstGeom prst="rect">
-            <a:avLst/>
-          </a:prstGeom>
-          <a:noFill/>
-        </p:spPr>
-        <p:txBody>
-          <a:bodyPr wrap="square" lIns="18288" rIns="18288">
-            <a:spAutoFit/>
-          </a:bodyPr>
-          <a:lstStyle/>
-          <a:p>
-            <a:pPr algn="l"/>
-            <a:r>
-              <a:rPr sz="1600" b="1">
+            <a:off x="987552" y="4251960"/>
+            <a:ext cx="1234440" cy="274320"/>
+          </a:xfrm>
+          <a:prstGeom prst="rect">
+            <a:avLst/>
+          </a:prstGeom>
+          <a:noFill/>
+        </p:spPr>
+        <p:txBody>
+          <a:bodyPr wrap="square" lIns="18288" rIns="18288">
+            <a:spAutoFit/>
+          </a:bodyPr>
+          <a:lstStyle/>
+          <a:p>
+            <a:pPr algn="l"/>
+            <a:r>
+              <a:rPr sz="1500" b="1">
                 <a:solidFill>
                   <a:srgbClr val="047857"/>
                 </a:solidFill>
@@ -14039,8 +13726,88 @@
         </p:nvSpPr>
         <p:spPr>
           <a:xfrm>
-            <a:off x="7086600" y="2542032"/>
-            <a:ext cx="2331720" cy="438912"/>
+            <a:off x="2267712" y="4251960"/>
+            <a:ext cx="3886200" cy="384048"/>
+          </a:xfrm>
+          <a:prstGeom prst="rect">
+            <a:avLst/>
+          </a:prstGeom>
+          <a:noFill/>
+        </p:spPr>
+        <p:txBody>
+          <a:bodyPr wrap="square" lIns="18288" rIns="18288">
+            <a:spAutoFit/>
+          </a:bodyPr>
+          <a:lstStyle/>
+          <a:p>
+            <a:pPr algn="l"/>
+            <a:r>
+              <a:rPr sz="1150" b="0">
+                <a:solidFill>
+                  <a:srgbClr val="1E293B"/>
+                </a:solidFill>
+                <a:latin typeface="Microsoft YaHei"/>
+              </a:rPr>
+              <a:t>使用本地规则组织答案，不依赖外部大模型接口。</a:t>
+            </a:r>
+          </a:p>
+        </p:txBody>
+      </p:sp>
+      <p:sp>
+        <p:nvSpPr>
+          <p:cNvPr id="18" name="Rounded Rectangle 17"/>
+          <p:cNvSpPr/>
+          <p:nvPr/>
+        </p:nvSpPr>
+        <p:spPr>
+          <a:xfrm>
+            <a:off x="749808" y="5321808"/>
+            <a:ext cx="5989320" cy="566928"/>
+          </a:xfrm>
+          <a:prstGeom prst="roundRect">
+            <a:avLst/>
+          </a:prstGeom>
+          <a:solidFill>
+            <a:srgbClr val="F0FDFA"/>
+          </a:solidFill>
+          <a:ln w="15240">
+            <a:solidFill>
+              <a:srgbClr val="5EEAD4"/>
+            </a:solidFill>
+          </a:ln>
+        </p:spPr>
+        <p:style>
+          <a:lnRef idx="1">
+            <a:schemeClr val="accent1"/>
+          </a:lnRef>
+          <a:fillRef idx="3">
+            <a:schemeClr val="accent1"/>
+          </a:fillRef>
+          <a:effectRef idx="2">
+            <a:schemeClr val="accent1"/>
+          </a:effectRef>
+          <a:fontRef idx="minor">
+            <a:schemeClr val="lt1"/>
+          </a:fontRef>
+        </p:style>
+        <p:txBody>
+          <a:bodyPr rtlCol="0" anchor="ctr"/>
+          <a:lstStyle/>
+          <a:p>
+            <a:pPr algn="ctr"/>
+          </a:p>
+        </p:txBody>
+      </p:sp>
+      <p:sp>
+        <p:nvSpPr>
+          <p:cNvPr id="19" name="TextBox 18"/>
+          <p:cNvSpPr txBox="1"/>
+          <p:nvPr/>
+        </p:nvSpPr>
+        <p:spPr>
+          <a:xfrm>
+            <a:off x="987552" y="5468112"/>
+            <a:ext cx="5440680" cy="219456"/>
           </a:xfrm>
           <a:prstGeom prst="rect">
             <a:avLst/>
@@ -14057,18 +13824,18 @@
             <a:r>
               <a:rPr sz="1200" b="0">
                 <a:solidFill>
-                  <a:srgbClr val="1E293B"/>
-                </a:solidFill>
-                <a:latin typeface="Microsoft YaHei"/>
-              </a:rPr>
-              <a:t>使用本地规则组织答案，不依赖外部大模型接口。</a:t>
+                  <a:srgbClr val="047857"/>
+                </a:solidFill>
+                <a:latin typeface="Microsoft YaHei"/>
+              </a:rPr>
+              <a:t>课堂汇报口径：这是围绕文章内容的本地阅读 Agent，不做泛聊天。</a:t>
             </a:r>
           </a:p>
         </p:txBody>
       </p:sp>
       <p:pic>
         <p:nvPicPr>
-          <p:cNvPr id="18" name="Picture 17" descr="V1.0Agent快捷问题_20260512.png"/>
+          <p:cNvPr id="20" name="Picture 19" descr="agent_focus.png"/>
           <p:cNvPicPr>
             <a:picLocks noChangeAspect="1"/>
           </p:cNvPicPr>
@@ -14082,8 +13849,8 @@
         </p:blipFill>
         <p:spPr>
           <a:xfrm>
-            <a:off x="5622417" y="3657600"/>
-            <a:ext cx="1008126" cy="2240280"/>
+            <a:off x="8001000" y="1894384"/>
+            <a:ext cx="2971800" cy="4486552"/>
           </a:xfrm>
           <a:prstGeom prst="rect">
             <a:avLst/>
@@ -14369,8 +14136,8 @@
         </p:nvSpPr>
         <p:spPr>
           <a:xfrm>
-            <a:off x="731520" y="1874519"/>
-            <a:ext cx="2176272" cy="4160520"/>
+            <a:off x="1874519" y="1828800"/>
+            <a:ext cx="3703320" cy="4709160"/>
           </a:xfrm>
           <a:prstGeom prst="roundRect">
             <a:avLst/>
@@ -14408,7 +14175,7 @@
       </p:sp>
       <p:pic>
         <p:nvPicPr>
-          <p:cNvPr id="10" name="Picture 9" descr="V1.0知识卡片_20260512.png"/>
+          <p:cNvPr id="10" name="Picture 9" descr="knowledge_focus.png"/>
           <p:cNvPicPr>
             <a:picLocks noChangeAspect="1"/>
           </p:cNvPicPr>
@@ -14422,8 +14189,8 @@
         </p:blipFill>
         <p:spPr>
           <a:xfrm>
-            <a:off x="1054303" y="2039112"/>
-            <a:ext cx="1530705" cy="3401568"/>
+            <a:off x="2270057" y="1993392"/>
+            <a:ext cx="2912243" cy="4297680"/>
           </a:xfrm>
           <a:prstGeom prst="rect">
             <a:avLst/>
@@ -14438,8 +14205,8 @@
         </p:nvSpPr>
         <p:spPr>
           <a:xfrm>
-            <a:off x="932688" y="5577840"/>
-            <a:ext cx="1783080" cy="274320"/>
+            <a:off x="2148839" y="6236208"/>
+            <a:ext cx="3154680" cy="256032"/>
           </a:xfrm>
           <a:prstGeom prst="rect">
             <a:avLst/>
@@ -14473,8 +14240,8 @@
         </p:nvSpPr>
         <p:spPr>
           <a:xfrm>
-            <a:off x="3639312" y="1874519"/>
-            <a:ext cx="2176272" cy="4160520"/>
+            <a:off x="6537960" y="1828800"/>
+            <a:ext cx="3703320" cy="4709160"/>
           </a:xfrm>
           <a:prstGeom prst="roundRect">
             <a:avLst/>
@@ -14512,7 +14279,7 @@
       </p:sp>
       <p:pic>
         <p:nvPicPr>
-          <p:cNvPr id="13" name="Picture 12" descr="V1.0复习题_20260512.png"/>
+          <p:cNvPr id="13" name="Picture 12" descr="quiz_focus.png"/>
           <p:cNvPicPr>
             <a:picLocks noChangeAspect="1"/>
           </p:cNvPicPr>
@@ -14526,8 +14293,8 @@
         </p:blipFill>
         <p:spPr>
           <a:xfrm>
-            <a:off x="3962095" y="2039112"/>
-            <a:ext cx="1530705" cy="3401568"/>
+            <a:off x="6933498" y="1993392"/>
+            <a:ext cx="2912243" cy="4297680"/>
           </a:xfrm>
           <a:prstGeom prst="rect">
             <a:avLst/>
@@ -14542,8 +14309,8 @@
         </p:nvSpPr>
         <p:spPr>
           <a:xfrm>
-            <a:off x="3840480" y="5577840"/>
-            <a:ext cx="1783080" cy="274320"/>
+            <a:off x="6812280" y="6236208"/>
+            <a:ext cx="3154680" cy="256032"/>
           </a:xfrm>
           <a:prstGeom prst="rect">
             <a:avLst/>
@@ -14565,214 +14332,6 @@
                 <a:latin typeface="Microsoft YaHei"/>
               </a:rPr>
               <a:t>复习题</a:t>
-            </a:r>
-          </a:p>
-        </p:txBody>
-      </p:sp>
-      <p:sp>
-        <p:nvSpPr>
-          <p:cNvPr id="15" name="Rounded Rectangle 14"/>
-          <p:cNvSpPr/>
-          <p:nvPr/>
-        </p:nvSpPr>
-        <p:spPr>
-          <a:xfrm>
-            <a:off x="6547104" y="1874519"/>
-            <a:ext cx="2176272" cy="4160520"/>
-          </a:xfrm>
-          <a:prstGeom prst="roundRect">
-            <a:avLst/>
-          </a:prstGeom>
-          <a:solidFill>
-            <a:srgbClr val="FFFFFF"/>
-          </a:solidFill>
-          <a:ln w="15240">
-            <a:solidFill>
-              <a:srgbClr val="CBD5E1"/>
-            </a:solidFill>
-          </a:ln>
-        </p:spPr>
-        <p:style>
-          <a:lnRef idx="1">
-            <a:schemeClr val="accent1"/>
-          </a:lnRef>
-          <a:fillRef idx="3">
-            <a:schemeClr val="accent1"/>
-          </a:fillRef>
-          <a:effectRef idx="2">
-            <a:schemeClr val="accent1"/>
-          </a:effectRef>
-          <a:fontRef idx="minor">
-            <a:schemeClr val="lt1"/>
-          </a:fontRef>
-        </p:style>
-        <p:txBody>
-          <a:bodyPr rtlCol="0" anchor="ctr"/>
-          <a:lstStyle/>
-          <a:p>
-            <a:pPr algn="ctr"/>
-          </a:p>
-        </p:txBody>
-      </p:sp>
-      <p:pic>
-        <p:nvPicPr>
-          <p:cNvPr id="16" name="Picture 15" descr="V1.0Agent手动提问_20260512.png"/>
-          <p:cNvPicPr>
-            <a:picLocks noChangeAspect="1"/>
-          </p:cNvPicPr>
-          <p:nvPr/>
-        </p:nvPicPr>
-        <p:blipFill>
-          <a:blip r:embed="rId4"/>
-          <a:stretch>
-            <a:fillRect/>
-          </a:stretch>
-        </p:blipFill>
-        <p:spPr>
-          <a:xfrm>
-            <a:off x="6869887" y="2039112"/>
-            <a:ext cx="1530705" cy="3401568"/>
-          </a:xfrm>
-          <a:prstGeom prst="rect">
-            <a:avLst/>
-          </a:prstGeom>
-        </p:spPr>
-      </p:pic>
-      <p:sp>
-        <p:nvSpPr>
-          <p:cNvPr id="17" name="TextBox 16"/>
-          <p:cNvSpPr txBox="1"/>
-          <p:nvPr/>
-        </p:nvSpPr>
-        <p:spPr>
-          <a:xfrm>
-            <a:off x="6748272" y="5577840"/>
-            <a:ext cx="1783080" cy="274320"/>
-          </a:xfrm>
-          <a:prstGeom prst="rect">
-            <a:avLst/>
-          </a:prstGeom>
-          <a:noFill/>
-        </p:spPr>
-        <p:txBody>
-          <a:bodyPr wrap="square" lIns="18288" rIns="18288">
-            <a:spAutoFit/>
-          </a:bodyPr>
-          <a:lstStyle/>
-          <a:p>
-            <a:pPr algn="ctr"/>
-            <a:r>
-              <a:rPr sz="1300" b="1">
-                <a:solidFill>
-                  <a:srgbClr val="1E40AF"/>
-                </a:solidFill>
-                <a:latin typeface="Microsoft YaHei"/>
-              </a:rPr>
-              <a:t>手动提问</a:t>
-            </a:r>
-          </a:p>
-        </p:txBody>
-      </p:sp>
-      <p:sp>
-        <p:nvSpPr>
-          <p:cNvPr id="18" name="Rounded Rectangle 17"/>
-          <p:cNvSpPr/>
-          <p:nvPr/>
-        </p:nvSpPr>
-        <p:spPr>
-          <a:xfrm>
-            <a:off x="9454896" y="1874519"/>
-            <a:ext cx="2176272" cy="4160520"/>
-          </a:xfrm>
-          <a:prstGeom prst="roundRect">
-            <a:avLst/>
-          </a:prstGeom>
-          <a:solidFill>
-            <a:srgbClr val="FFFFFF"/>
-          </a:solidFill>
-          <a:ln w="15240">
-            <a:solidFill>
-              <a:srgbClr val="CBD5E1"/>
-            </a:solidFill>
-          </a:ln>
-        </p:spPr>
-        <p:style>
-          <a:lnRef idx="1">
-            <a:schemeClr val="accent1"/>
-          </a:lnRef>
-          <a:fillRef idx="3">
-            <a:schemeClr val="accent1"/>
-          </a:fillRef>
-          <a:effectRef idx="2">
-            <a:schemeClr val="accent1"/>
-          </a:effectRef>
-          <a:fontRef idx="minor">
-            <a:schemeClr val="lt1"/>
-          </a:fontRef>
-        </p:style>
-        <p:txBody>
-          <a:bodyPr rtlCol="0" anchor="ctr"/>
-          <a:lstStyle/>
-          <a:p>
-            <a:pPr algn="ctr"/>
-          </a:p>
-        </p:txBody>
-      </p:sp>
-      <p:pic>
-        <p:nvPicPr>
-          <p:cNvPr id="19" name="Picture 18" descr="V1.0首页_20260512.png"/>
-          <p:cNvPicPr>
-            <a:picLocks noChangeAspect="1"/>
-          </p:cNvPicPr>
-          <p:nvPr/>
-        </p:nvPicPr>
-        <p:blipFill>
-          <a:blip r:embed="rId5"/>
-          <a:stretch>
-            <a:fillRect/>
-          </a:stretch>
-        </p:blipFill>
-        <p:spPr>
-          <a:xfrm>
-            <a:off x="9777679" y="2039112"/>
-            <a:ext cx="1530705" cy="3401568"/>
-          </a:xfrm>
-          <a:prstGeom prst="rect">
-            <a:avLst/>
-          </a:prstGeom>
-        </p:spPr>
-      </p:pic>
-      <p:sp>
-        <p:nvSpPr>
-          <p:cNvPr id="20" name="TextBox 19"/>
-          <p:cNvSpPr txBox="1"/>
-          <p:nvPr/>
-        </p:nvSpPr>
-        <p:spPr>
-          <a:xfrm>
-            <a:off x="9656064" y="5577840"/>
-            <a:ext cx="1783080" cy="274320"/>
-          </a:xfrm>
-          <a:prstGeom prst="rect">
-            <a:avLst/>
-          </a:prstGeom>
-          <a:noFill/>
-        </p:spPr>
-        <p:txBody>
-          <a:bodyPr wrap="square" lIns="18288" rIns="18288">
-            <a:spAutoFit/>
-          </a:bodyPr>
-          <a:lstStyle/>
-          <a:p>
-            <a:pPr algn="ctr"/>
-            <a:r>
-              <a:rPr sz="1300" b="1">
-                <a:solidFill>
-                  <a:srgbClr val="1E40AF"/>
-                </a:solidFill>
-                <a:latin typeface="Microsoft YaHei"/>
-              </a:rPr>
-              <a:t>历史恢复</a:t>
             </a:r>
           </a:p>
         </p:txBody>

--- a/docs/SmartReadAgent_V1.0_期末演示PPT.pptx
+++ b/docs/SmartReadAgent_V1.0_期末演示PPT.pptx
@@ -4412,803 +4412,803 @@
 </file>
 
 <file path=ppt/slides/slide11.xml><?xml version="1.0" encoding="utf-8"?>
-<p:sld xmlns:a="http://schemas.openxmlformats.org/drawingml/2006/main" xmlns:p="http://schemas.openxmlformats.org/presentationml/2006/main" xmlns:r="http://schemas.openxmlformats.org/officeDocument/2006/relationships">
-  <p:cSld>
-    <p:bg>
-      <p:bgPr>
-        <a:solidFill>
-          <a:srgbClr val="F8FAFC"/>
-        </a:solidFill>
-        <a:effectLst/>
-      </p:bgPr>
-    </p:bg>
-    <p:spTree>
-      <p:nvGrpSpPr>
-        <p:cNvPr id="1" name=""/>
-        <p:cNvGrpSpPr/>
-        <p:nvPr/>
-      </p:nvGrpSpPr>
-      <p:grpSpPr/>
-      <p:sp>
-        <p:nvSpPr>
-          <p:cNvPr id="22" name="Rounded Rectangle 21"/>
-          <p:cNvSpPr/>
-          <p:nvPr/>
-        </p:nvSpPr>
-        <p:spPr>
-          <a:xfrm>
-            <a:off x="7351776" y="1942300"/>
-            <a:ext cx="2624328" cy="3942661"/>
-          </a:xfrm>
-          <a:prstGeom prst="roundRect">
-            <a:avLst/>
-          </a:prstGeom>
-          <a:solidFill>
-            <a:srgbClr val="FFFFFF"/>
-          </a:solidFill>
-          <a:ln w="15240">
-            <a:solidFill>
-              <a:srgbClr val="CBD5E1"/>
-            </a:solidFill>
-          </a:ln>
-        </p:spPr>
-        <p:style>
-          <a:lnRef idx="1">
-            <a:schemeClr val="accent1"/>
-          </a:lnRef>
-          <a:fillRef idx="3">
-            <a:schemeClr val="accent1"/>
-          </a:fillRef>
-          <a:effectRef idx="2">
-            <a:schemeClr val="accent1"/>
-          </a:effectRef>
-          <a:fontRef idx="minor">
-            <a:schemeClr val="lt1"/>
-          </a:fontRef>
-        </p:style>
-        <p:txBody>
-          <a:bodyPr rtlCol="0" anchor="ctr"/>
-          <a:lstStyle/>
-          <a:p>
-            <a:pPr algn="ctr"/>
-          </a:p>
-        </p:txBody>
-      </p:sp>
-      <p:sp>
-        <p:nvSpPr>
-          <p:cNvPr id="2" name="TextBox 1"/>
-          <p:cNvSpPr txBox="1"/>
-          <p:nvPr/>
-        </p:nvSpPr>
-        <p:spPr>
-          <a:xfrm>
-            <a:off x="502920" y="329184"/>
-            <a:ext cx="914400" cy="256032"/>
-          </a:xfrm>
-          <a:prstGeom prst="rect">
-            <a:avLst/>
-          </a:prstGeom>
-          <a:noFill/>
-        </p:spPr>
-        <p:txBody>
-          <a:bodyPr wrap="square" lIns="18288" rIns="18288">
-            <a:spAutoFit/>
-          </a:bodyPr>
-          <a:lstStyle/>
-          <a:p>
-            <a:pPr algn="l"/>
-            <a:r>
-              <a:rPr sz="1200" b="1">
-                <a:solidFill>
-                  <a:srgbClr val="1E40AF"/>
-                </a:solidFill>
-                <a:latin typeface="Microsoft YaHei"/>
-              </a:rPr>
-              <a:t>11</a:t>
-            </a:r>
-          </a:p>
-        </p:txBody>
-      </p:sp>
-      <p:sp>
-        <p:nvSpPr>
-          <p:cNvPr id="3" name="TextBox 2"/>
-          <p:cNvSpPr txBox="1"/>
-          <p:nvPr/>
-        </p:nvSpPr>
-        <p:spPr>
-          <a:xfrm>
-            <a:off x="1005840" y="283464"/>
-            <a:ext cx="2194560" cy="274320"/>
-          </a:xfrm>
-          <a:prstGeom prst="rect">
-            <a:avLst/>
-          </a:prstGeom>
-          <a:noFill/>
-        </p:spPr>
-        <p:txBody>
-          <a:bodyPr wrap="square" lIns="18288" rIns="18288">
-            <a:spAutoFit/>
-          </a:bodyPr>
-          <a:lstStyle/>
-          <a:p>
-            <a:pPr algn="l"/>
-            <a:r>
-              <a:rPr sz="1000" b="1">
-                <a:solidFill>
-                  <a:srgbClr val="64748B"/>
-                </a:solidFill>
-                <a:latin typeface="Microsoft YaHei"/>
-              </a:rPr>
-              <a:t>工程</a:t>
-            </a:r>
-          </a:p>
-        </p:txBody>
-      </p:sp>
-      <p:sp>
-        <p:nvSpPr>
-          <p:cNvPr id="4" name="TextBox 3"/>
-          <p:cNvSpPr txBox="1"/>
-          <p:nvPr/>
-        </p:nvSpPr>
-        <p:spPr>
-          <a:xfrm>
-            <a:off x="502920" y="685800"/>
-            <a:ext cx="7132320" cy="493776"/>
-          </a:xfrm>
-          <a:prstGeom prst="rect">
-            <a:avLst/>
-          </a:prstGeom>
-          <a:noFill/>
-        </p:spPr>
-        <p:txBody>
-          <a:bodyPr wrap="square" lIns="18288" rIns="18288">
-            <a:spAutoFit/>
-          </a:bodyPr>
-          <a:lstStyle/>
-          <a:p>
-            <a:pPr algn="l"/>
-            <a:r>
-              <a:rPr sz="2800" b="1">
-                <a:solidFill>
-                  <a:srgbClr val="0F172A"/>
-                </a:solidFill>
-                <a:latin typeface="Microsoft YaHei"/>
-              </a:rPr>
-              <a:t>工程实现与版本收口</a:t>
-            </a:r>
-          </a:p>
-        </p:txBody>
-      </p:sp>
-      <p:sp>
-        <p:nvSpPr>
-          <p:cNvPr id="5" name="TextBox 4"/>
-          <p:cNvSpPr txBox="1"/>
-          <p:nvPr/>
-        </p:nvSpPr>
-        <p:spPr>
-          <a:xfrm>
-            <a:off x="521207" y="1170432"/>
-            <a:ext cx="7863840" cy="329184"/>
-          </a:xfrm>
-          <a:prstGeom prst="rect">
-            <a:avLst/>
-          </a:prstGeom>
-          <a:noFill/>
-        </p:spPr>
-        <p:txBody>
-          <a:bodyPr wrap="square" lIns="18288" rIns="18288">
-            <a:spAutoFit/>
-          </a:bodyPr>
-          <a:lstStyle/>
-          <a:p>
-            <a:pPr algn="l"/>
-            <a:r>
-              <a:rPr sz="1300" b="0">
-                <a:solidFill>
-                  <a:srgbClr val="64748B"/>
-                </a:solidFill>
-                <a:latin typeface="Microsoft YaHei"/>
-              </a:rPr>
-              <a:t>从代码、模型、APK 到文档材料形成可复查交付</a:t>
-            </a:r>
-          </a:p>
-        </p:txBody>
-      </p:sp>
-      <p:cxnSp>
-        <p:nvCxnSpPr>
-          <p:cNvPr id="6" name="Connector 5"/>
-          <p:cNvCxnSpPr/>
-          <p:nvPr/>
-        </p:nvCxnSpPr>
-        <p:spPr>
-          <a:xfrm>
-            <a:off x="502920" y="1627632"/>
-            <a:ext cx="11183112" cy="0"/>
-          </a:xfrm>
-          <a:prstGeom prst="line">
-            <a:avLst/>
-          </a:prstGeom>
-          <a:ln>
-            <a:solidFill>
-              <a:srgbClr val="CBD5E1"/>
-            </a:solidFill>
-          </a:ln>
-        </p:spPr>
-        <p:style>
-          <a:lnRef idx="2">
-            <a:schemeClr val="accent1"/>
-          </a:lnRef>
-          <a:fillRef idx="0">
-            <a:schemeClr val="accent1"/>
-          </a:fillRef>
-          <a:effectRef idx="1">
-            <a:schemeClr val="accent1"/>
-          </a:effectRef>
-          <a:fontRef idx="minor">
-            <a:schemeClr val="tx1"/>
-          </a:fontRef>
-        </p:style>
-      </p:cxnSp>
-      <p:sp>
-        <p:nvSpPr>
-          <p:cNvPr id="7" name="TextBox 6"/>
-          <p:cNvSpPr txBox="1"/>
-          <p:nvPr/>
-        </p:nvSpPr>
-        <p:spPr>
-          <a:xfrm>
-            <a:off x="530352" y="6473952"/>
-            <a:ext cx="5486400" cy="228600"/>
-          </a:xfrm>
-          <a:prstGeom prst="rect">
-            <a:avLst/>
-          </a:prstGeom>
-          <a:noFill/>
-        </p:spPr>
-        <p:txBody>
-          <a:bodyPr wrap="square" lIns="18288" rIns="18288">
-            <a:spAutoFit/>
-          </a:bodyPr>
-          <a:lstStyle/>
-          <a:p>
-            <a:pPr algn="l"/>
-            <a:r>
-              <a:rPr sz="900" b="0">
-                <a:solidFill>
-                  <a:srgbClr val="64748B"/>
-                </a:solidFill>
-                <a:latin typeface="Microsoft YaHei"/>
-              </a:rPr>
-              <a:t>SmartRead Agent｜软件项目研发实践（3）</a:t>
-            </a:r>
-          </a:p>
-        </p:txBody>
-      </p:sp>
-      <p:sp>
-        <p:nvSpPr>
-          <p:cNvPr id="8" name="TextBox 7"/>
-          <p:cNvSpPr txBox="1"/>
-          <p:nvPr/>
-        </p:nvSpPr>
-        <p:spPr>
-          <a:xfrm>
-            <a:off x="9784080" y="6473952"/>
-            <a:ext cx="1920240" cy="228600"/>
-          </a:xfrm>
-          <a:prstGeom prst="rect">
-            <a:avLst/>
-          </a:prstGeom>
-          <a:noFill/>
-        </p:spPr>
-        <p:txBody>
-          <a:bodyPr wrap="square" lIns="18288" rIns="18288">
-            <a:spAutoFit/>
-          </a:bodyPr>
-          <a:lstStyle/>
-          <a:p>
-            <a:pPr algn="r"/>
-            <a:r>
-              <a:rPr sz="900" b="0">
-                <a:solidFill>
-                  <a:srgbClr val="64748B"/>
-                </a:solidFill>
-                <a:latin typeface="Microsoft YaHei"/>
-              </a:rPr>
-              <a:t>A03 组 林立洲 / 江轩宇</a:t>
-            </a:r>
-          </a:p>
-        </p:txBody>
-      </p:sp>
-      <p:sp>
-        <p:nvSpPr>
-          <p:cNvPr id="9" name="Rounded Rectangle 8"/>
-          <p:cNvSpPr/>
-          <p:nvPr/>
-        </p:nvSpPr>
-        <p:spPr>
-          <a:xfrm>
-            <a:off x="713232" y="1874519"/>
-            <a:ext cx="5120640" cy="749808"/>
-          </a:xfrm>
-          <a:prstGeom prst="roundRect">
-            <a:avLst/>
-          </a:prstGeom>
-          <a:solidFill>
-            <a:srgbClr val="FFFFFF"/>
-          </a:solidFill>
-          <a:ln w="15240">
-            <a:solidFill>
-              <a:srgbClr val="CBD5E1"/>
-            </a:solidFill>
-          </a:ln>
-        </p:spPr>
-        <p:style>
-          <a:lnRef idx="1">
-            <a:schemeClr val="accent1"/>
-          </a:lnRef>
-          <a:fillRef idx="3">
-            <a:schemeClr val="accent1"/>
-          </a:fillRef>
-          <a:effectRef idx="2">
-            <a:schemeClr val="accent1"/>
-          </a:effectRef>
-          <a:fontRef idx="minor">
-            <a:schemeClr val="lt1"/>
-          </a:fontRef>
-        </p:style>
-        <p:txBody>
-          <a:bodyPr rtlCol="0" anchor="ctr"/>
-          <a:lstStyle/>
-          <a:p>
-            <a:pPr algn="ctr"/>
-          </a:p>
-        </p:txBody>
-      </p:sp>
-      <p:sp>
-        <p:nvSpPr>
-          <p:cNvPr id="10" name="TextBox 9"/>
-          <p:cNvSpPr txBox="1"/>
-          <p:nvPr/>
-        </p:nvSpPr>
-        <p:spPr>
-          <a:xfrm>
-            <a:off x="941832" y="2029967"/>
-            <a:ext cx="1325880" cy="256032"/>
-          </a:xfrm>
-          <a:prstGeom prst="rect">
-            <a:avLst/>
-          </a:prstGeom>
-          <a:noFill/>
-        </p:spPr>
-        <p:txBody>
-          <a:bodyPr wrap="square" lIns="18288" rIns="18288">
-            <a:spAutoFit/>
-          </a:bodyPr>
-          <a:lstStyle/>
-          <a:p>
-            <a:pPr algn="l"/>
-            <a:r>
-              <a:rPr sz="1400" b="1">
-                <a:solidFill>
-                  <a:srgbClr val="1E40AF"/>
-                </a:solidFill>
-                <a:latin typeface="Microsoft YaHei"/>
-              </a:rPr>
-              <a:t>Android 工程</a:t>
-            </a:r>
-          </a:p>
-        </p:txBody>
-      </p:sp>
-      <p:sp>
-        <p:nvSpPr>
-          <p:cNvPr id="11" name="TextBox 10"/>
-          <p:cNvSpPr txBox="1"/>
-          <p:nvPr/>
-        </p:nvSpPr>
-        <p:spPr>
-          <a:xfrm>
-            <a:off x="2395728" y="2029967"/>
-            <a:ext cx="2926080" cy="256032"/>
-          </a:xfrm>
-          <a:prstGeom prst="rect">
-            <a:avLst/>
-          </a:prstGeom>
-          <a:noFill/>
-        </p:spPr>
-        <p:txBody>
-          <a:bodyPr wrap="square" lIns="18288" rIns="18288">
-            <a:spAutoFit/>
-          </a:bodyPr>
-          <a:lstStyle/>
-          <a:p>
-            <a:pPr algn="l"/>
-            <a:r>
-              <a:rPr sz="1200" b="0">
-                <a:solidFill>
-                  <a:srgbClr val="1E293B"/>
-                </a:solidFill>
-                <a:latin typeface="Microsoft YaHei"/>
-              </a:rPr>
-              <a:t>Kotlin + Compose，入口为 MainActivity</a:t>
-            </a:r>
-          </a:p>
-        </p:txBody>
-      </p:sp>
-      <p:sp>
-        <p:nvSpPr>
-          <p:cNvPr id="12" name="Rounded Rectangle 11"/>
-          <p:cNvSpPr/>
-          <p:nvPr/>
-        </p:nvSpPr>
-        <p:spPr>
-          <a:xfrm>
-            <a:off x="713232" y="2761487"/>
-            <a:ext cx="5120640" cy="749808"/>
-          </a:xfrm>
-          <a:prstGeom prst="roundRect">
-            <a:avLst/>
-          </a:prstGeom>
-          <a:solidFill>
-            <a:srgbClr val="FFFFFF"/>
-          </a:solidFill>
-          <a:ln w="15240">
-            <a:solidFill>
-              <a:srgbClr val="CBD5E1"/>
-            </a:solidFill>
-          </a:ln>
-        </p:spPr>
-        <p:style>
-          <a:lnRef idx="1">
-            <a:schemeClr val="accent1"/>
-          </a:lnRef>
-          <a:fillRef idx="3">
-            <a:schemeClr val="accent1"/>
-          </a:fillRef>
-          <a:effectRef idx="2">
-            <a:schemeClr val="accent1"/>
-          </a:effectRef>
-          <a:fontRef idx="minor">
-            <a:schemeClr val="lt1"/>
-          </a:fontRef>
-        </p:style>
-        <p:txBody>
-          <a:bodyPr rtlCol="0" anchor="ctr"/>
-          <a:lstStyle/>
-          <a:p>
-            <a:pPr algn="ctr"/>
-          </a:p>
-        </p:txBody>
-      </p:sp>
-      <p:sp>
-        <p:nvSpPr>
-          <p:cNvPr id="13" name="TextBox 12"/>
-          <p:cNvSpPr txBox="1"/>
-          <p:nvPr/>
-        </p:nvSpPr>
-        <p:spPr>
-          <a:xfrm>
-            <a:off x="941832" y="2916935"/>
-            <a:ext cx="1325880" cy="256032"/>
-          </a:xfrm>
-          <a:prstGeom prst="rect">
-            <a:avLst/>
-          </a:prstGeom>
-          <a:noFill/>
-        </p:spPr>
-        <p:txBody>
-          <a:bodyPr wrap="square" lIns="18288" rIns="18288">
-            <a:spAutoFit/>
-          </a:bodyPr>
-          <a:lstStyle/>
-          <a:p>
-            <a:pPr algn="l"/>
-            <a:r>
-              <a:rPr sz="1400" b="1">
-                <a:solidFill>
-                  <a:srgbClr val="1E40AF"/>
-                </a:solidFill>
-                <a:latin typeface="Microsoft YaHei"/>
-              </a:rPr>
-              <a:t>模型文件</a:t>
-            </a:r>
-          </a:p>
-        </p:txBody>
-      </p:sp>
-      <p:sp>
-        <p:nvSpPr>
-          <p:cNvPr id="14" name="TextBox 13"/>
-          <p:cNvSpPr txBox="1"/>
-          <p:nvPr/>
-        </p:nvSpPr>
-        <p:spPr>
-          <a:xfrm>
-            <a:off x="2395728" y="2916935"/>
-            <a:ext cx="2926080" cy="256032"/>
-          </a:xfrm>
-          <a:prstGeom prst="rect">
-            <a:avLst/>
-          </a:prstGeom>
-          <a:noFill/>
-        </p:spPr>
-        <p:txBody>
-          <a:bodyPr wrap="square" lIns="18288" rIns="18288">
-            <a:spAutoFit/>
-          </a:bodyPr>
-          <a:lstStyle/>
-          <a:p>
-            <a:pPr algn="l"/>
-            <a:r>
-              <a:rPr sz="1200" b="0">
-                <a:solidFill>
-                  <a:srgbClr val="1E293B"/>
-                </a:solidFill>
-                <a:latin typeface="Microsoft YaHei"/>
-              </a:rPr>
-              <a:t>sentence_importance_model.tflite 集成到 assets</a:t>
-            </a:r>
-          </a:p>
-        </p:txBody>
-      </p:sp>
-      <p:sp>
-        <p:nvSpPr>
-          <p:cNvPr id="15" name="Rounded Rectangle 14"/>
-          <p:cNvSpPr/>
-          <p:nvPr/>
-        </p:nvSpPr>
-        <p:spPr>
-          <a:xfrm>
-            <a:off x="713232" y="3648455"/>
-            <a:ext cx="5120640" cy="749808"/>
-          </a:xfrm>
-          <a:prstGeom prst="roundRect">
-            <a:avLst/>
-          </a:prstGeom>
-          <a:solidFill>
-            <a:srgbClr val="FFFFFF"/>
-          </a:solidFill>
-          <a:ln w="15240">
-            <a:solidFill>
-              <a:srgbClr val="CBD5E1"/>
-            </a:solidFill>
-          </a:ln>
-        </p:spPr>
-        <p:style>
-          <a:lnRef idx="1">
-            <a:schemeClr val="accent1"/>
-          </a:lnRef>
-          <a:fillRef idx="3">
-            <a:schemeClr val="accent1"/>
-          </a:fillRef>
-          <a:effectRef idx="2">
-            <a:schemeClr val="accent1"/>
-          </a:effectRef>
-          <a:fontRef idx="minor">
-            <a:schemeClr val="lt1"/>
-          </a:fontRef>
-        </p:style>
-        <p:txBody>
-          <a:bodyPr rtlCol="0" anchor="ctr"/>
-          <a:lstStyle/>
-          <a:p>
-            <a:pPr algn="ctr"/>
-          </a:p>
-        </p:txBody>
-      </p:sp>
-      <p:sp>
-        <p:nvSpPr>
-          <p:cNvPr id="16" name="TextBox 15"/>
-          <p:cNvSpPr txBox="1"/>
-          <p:nvPr/>
-        </p:nvSpPr>
-        <p:spPr>
-          <a:xfrm>
-            <a:off x="941832" y="3803903"/>
-            <a:ext cx="1325880" cy="256032"/>
-          </a:xfrm>
-          <a:prstGeom prst="rect">
-            <a:avLst/>
-          </a:prstGeom>
-          <a:noFill/>
-        </p:spPr>
-        <p:txBody>
-          <a:bodyPr wrap="square" lIns="18288" rIns="18288">
-            <a:spAutoFit/>
-          </a:bodyPr>
-          <a:lstStyle/>
-          <a:p>
-            <a:pPr algn="l"/>
-            <a:r>
-              <a:rPr sz="1400" b="1">
-                <a:solidFill>
-                  <a:srgbClr val="1E40AF"/>
-                </a:solidFill>
-                <a:latin typeface="Microsoft YaHei"/>
-              </a:rPr>
-              <a:t>APK 产物</a:t>
-            </a:r>
-          </a:p>
-        </p:txBody>
-      </p:sp>
-      <p:sp>
-        <p:nvSpPr>
-          <p:cNvPr id="17" name="TextBox 16"/>
-          <p:cNvSpPr txBox="1"/>
-          <p:nvPr/>
-        </p:nvSpPr>
-        <p:spPr>
-          <a:xfrm>
-            <a:off x="2395728" y="3803903"/>
-            <a:ext cx="2926080" cy="256032"/>
-          </a:xfrm>
-          <a:prstGeom prst="rect">
-            <a:avLst/>
-          </a:prstGeom>
-          <a:noFill/>
-        </p:spPr>
-        <p:txBody>
-          <a:bodyPr wrap="square" lIns="18288" rIns="18288">
-            <a:spAutoFit/>
-          </a:bodyPr>
-          <a:lstStyle/>
-          <a:p>
-            <a:pPr algn="l"/>
-            <a:r>
-              <a:rPr sz="1200" b="0">
-                <a:solidFill>
-                  <a:srgbClr val="1E293B"/>
-                </a:solidFill>
-                <a:latin typeface="Microsoft YaHei"/>
-              </a:rPr>
-              <a:t>SmartReadAgent-v1.0-debug.apk</a:t>
-            </a:r>
-          </a:p>
-        </p:txBody>
-      </p:sp>
-      <p:sp>
-        <p:nvSpPr>
-          <p:cNvPr id="18" name="Rounded Rectangle 17"/>
-          <p:cNvSpPr/>
-          <p:nvPr/>
-        </p:nvSpPr>
-        <p:spPr>
-          <a:xfrm>
-            <a:off x="713232" y="4535423"/>
-            <a:ext cx="5120640" cy="749808"/>
-          </a:xfrm>
-          <a:prstGeom prst="roundRect">
-            <a:avLst/>
-          </a:prstGeom>
-          <a:solidFill>
-            <a:srgbClr val="FFFFFF"/>
-          </a:solidFill>
-          <a:ln w="15240">
-            <a:solidFill>
-              <a:srgbClr val="CBD5E1"/>
-            </a:solidFill>
-          </a:ln>
-        </p:spPr>
-        <p:style>
-          <a:lnRef idx="1">
-            <a:schemeClr val="accent1"/>
-          </a:lnRef>
-          <a:fillRef idx="3">
-            <a:schemeClr val="accent1"/>
-          </a:fillRef>
-          <a:effectRef idx="2">
-            <a:schemeClr val="accent1"/>
-          </a:effectRef>
-          <a:fontRef idx="minor">
-            <a:schemeClr val="lt1"/>
-          </a:fontRef>
-        </p:style>
-        <p:txBody>
-          <a:bodyPr rtlCol="0" anchor="ctr"/>
-          <a:lstStyle/>
-          <a:p>
-            <a:pPr algn="ctr"/>
-          </a:p>
-        </p:txBody>
-      </p:sp>
-      <p:sp>
-        <p:nvSpPr>
-          <p:cNvPr id="19" name="TextBox 18"/>
-          <p:cNvSpPr txBox="1"/>
-          <p:nvPr/>
-        </p:nvSpPr>
-        <p:spPr>
-          <a:xfrm>
-            <a:off x="941832" y="4690871"/>
-            <a:ext cx="1325880" cy="256032"/>
-          </a:xfrm>
-          <a:prstGeom prst="rect">
-            <a:avLst/>
-          </a:prstGeom>
-          <a:noFill/>
-        </p:spPr>
-        <p:txBody>
-          <a:bodyPr wrap="square" lIns="18288" rIns="18288">
-            <a:spAutoFit/>
-          </a:bodyPr>
-          <a:lstStyle/>
-          <a:p>
-            <a:pPr algn="l"/>
-            <a:r>
-              <a:rPr sz="1400" b="1">
-                <a:solidFill>
-                  <a:srgbClr val="1E40AF"/>
-                </a:solidFill>
-                <a:latin typeface="Microsoft YaHei"/>
-              </a:rPr>
-              <a:t>文档材料</a:t>
-            </a:r>
-          </a:p>
-        </p:txBody>
-      </p:sp>
-      <p:sp>
-        <p:nvSpPr>
-          <p:cNvPr id="20" name="TextBox 19"/>
-          <p:cNvSpPr txBox="1"/>
-          <p:nvPr/>
-        </p:nvSpPr>
-        <p:spPr>
-          <a:xfrm>
-            <a:off x="2395728" y="4690871"/>
-            <a:ext cx="2926080" cy="256032"/>
-          </a:xfrm>
-          <a:prstGeom prst="rect">
-            <a:avLst/>
-          </a:prstGeom>
-          <a:noFill/>
-        </p:spPr>
-        <p:txBody>
-          <a:bodyPr wrap="square" lIns="18288" rIns="18288">
-            <a:spAutoFit/>
-          </a:bodyPr>
-          <a:lstStyle/>
-          <a:p>
-            <a:pPr algn="l"/>
-            <a:r>
-              <a:rPr sz="1200" b="0">
-                <a:solidFill>
-                  <a:srgbClr val="1E293B"/>
-                </a:solidFill>
-                <a:latin typeface="Microsoft YaHei"/>
-              </a:rPr>
-              <a:t>README、项目说明、详细设计说明书、演示脚本</a:t>
-            </a:r>
-          </a:p>
-        </p:txBody>
-      </p:sp>
-      <p:pic>
-        <p:nvPicPr>
-          <p:cNvPr id="21" name="Picture 20" descr="history_list_focus.png"/>
-          <p:cNvPicPr>
-            <a:picLocks noChangeAspect="1"/>
-          </p:cNvPicPr>
-          <p:nvPr/>
-        </p:nvPicPr>
-        <p:blipFill>
-          <a:blip r:embed="rId2"/>
-          <a:stretch>
-            <a:fillRect/>
-          </a:stretch>
-        </p:blipFill>
-        <p:spPr>
-          <a:xfrm>
-            <a:off x="7406640" y="1997164"/>
-            <a:ext cx="2514600" cy="3832933"/>
-          </a:xfrm>
-          <a:prstGeom prst="rect">
-            <a:avLst/>
-          </a:prstGeom>
-        </p:spPr>
-      </p:pic>
-    </p:spTree>
-  </p:cSld>
-  <p:clrMapOvr>
-    <a:masterClrMapping/>
-  </p:clrMapOvr>
-</p:sld>
+<ns0:sld xmlns:ns0="http://schemas.openxmlformats.org/presentationml/2006/main" xmlns:ns1="http://schemas.openxmlformats.org/drawingml/2006/main" xmlns:ns2="http://schemas.openxmlformats.org/officeDocument/2006/relationships">
+  <ns0:cSld>
+    <ns0:bg>
+      <ns0:bgPr>
+        <ns1:solidFill>
+          <ns1:srgbClr val="F8FAFC"/>
+        </ns1:solidFill>
+        <ns1:effectLst/>
+      </ns0:bgPr>
+    </ns0:bg>
+    <ns0:spTree>
+      <ns0:nvGrpSpPr>
+        <ns0:cNvPr id="1" name=""/>
+        <ns0:cNvGrpSpPr/>
+        <ns0:nvPr/>
+      </ns0:nvGrpSpPr>
+      <ns0:grpSpPr/>
+      <ns0:sp>
+        <ns0:nvSpPr>
+          <ns0:cNvPr id="22" name="Rounded Rectangle 21"/>
+          <ns0:cNvSpPr/>
+          <ns0:nvPr/>
+        </ns0:nvSpPr>
+        <ns0:spPr>
+          <ns1:xfrm>
+            <ns1:off x="7351776" y="1942300"/>
+            <ns1:ext cx="2624328" cy="3942661"/>
+          </ns1:xfrm>
+          <ns1:prstGeom prst="roundRect">
+            <ns1:avLst/>
+          </ns1:prstGeom>
+          <ns1:solidFill>
+            <ns1:srgbClr val="FFFFFF"/>
+          </ns1:solidFill>
+          <ns1:ln w="15240">
+            <ns1:solidFill>
+              <ns1:srgbClr val="CBD5E1"/>
+            </ns1:solidFill>
+          </ns1:ln>
+        </ns0:spPr>
+        <ns0:style>
+          <ns1:lnRef idx="1">
+            <ns1:schemeClr val="accent1"/>
+          </ns1:lnRef>
+          <ns1:fillRef idx="3">
+            <ns1:schemeClr val="accent1"/>
+          </ns1:fillRef>
+          <ns1:effectRef idx="2">
+            <ns1:schemeClr val="accent1"/>
+          </ns1:effectRef>
+          <ns1:fontRef idx="minor">
+            <ns1:schemeClr val="lt1"/>
+          </ns1:fontRef>
+        </ns0:style>
+        <ns0:txBody>
+          <ns1:bodyPr rtlCol="0" anchor="ctr"/>
+          <ns1:lstStyle/>
+          <ns1:p>
+            <ns1:pPr algn="ctr"/>
+          </ns1:p>
+        </ns0:txBody>
+      </ns0:sp>
+      <ns0:sp>
+        <ns0:nvSpPr>
+          <ns0:cNvPr id="2" name="TextBox 1"/>
+          <ns0:cNvSpPr txBox="1"/>
+          <ns0:nvPr/>
+        </ns0:nvSpPr>
+        <ns0:spPr>
+          <ns1:xfrm>
+            <ns1:off x="502920" y="329184"/>
+            <ns1:ext cx="914400" cy="256032"/>
+          </ns1:xfrm>
+          <ns1:prstGeom prst="rect">
+            <ns1:avLst/>
+          </ns1:prstGeom>
+          <ns1:noFill/>
+        </ns0:spPr>
+        <ns0:txBody>
+          <ns1:bodyPr wrap="square" lIns="18288" rIns="18288">
+            <ns1:spAutoFit/>
+          </ns1:bodyPr>
+          <ns1:lstStyle/>
+          <ns1:p>
+            <ns1:pPr algn="l"/>
+            <ns1:r>
+              <ns1:rPr sz="1200" b="1">
+                <ns1:solidFill>
+                  <ns1:srgbClr val="1E40AF"/>
+                </ns1:solidFill>
+                <ns1:latin typeface="Microsoft YaHei"/>
+              </ns1:rPr>
+              <ns1:t>11</ns1:t>
+            </ns1:r>
+          </ns1:p>
+        </ns0:txBody>
+      </ns0:sp>
+      <ns0:sp>
+        <ns0:nvSpPr>
+          <ns0:cNvPr id="3" name="TextBox 2"/>
+          <ns0:cNvSpPr txBox="1"/>
+          <ns0:nvPr/>
+        </ns0:nvSpPr>
+        <ns0:spPr>
+          <ns1:xfrm>
+            <ns1:off x="1005840" y="283464"/>
+            <ns1:ext cx="2194560" cy="274320"/>
+          </ns1:xfrm>
+          <ns1:prstGeom prst="rect">
+            <ns1:avLst/>
+          </ns1:prstGeom>
+          <ns1:noFill/>
+        </ns0:spPr>
+        <ns0:txBody>
+          <ns1:bodyPr wrap="square" lIns="18288" rIns="18288">
+            <ns1:spAutoFit/>
+          </ns1:bodyPr>
+          <ns1:lstStyle/>
+          <ns1:p>
+            <ns1:pPr algn="l"/>
+            <ns1:r>
+              <ns1:rPr sz="1000" b="1">
+                <ns1:solidFill>
+                  <ns1:srgbClr val="64748B"/>
+                </ns1:solidFill>
+                <ns1:latin typeface="Microsoft YaHei"/>
+              </ns1:rPr>
+              <ns1:t>工程</ns1:t>
+            </ns1:r>
+          </ns1:p>
+        </ns0:txBody>
+      </ns0:sp>
+      <ns0:sp>
+        <ns0:nvSpPr>
+          <ns0:cNvPr id="4" name="TextBox 3"/>
+          <ns0:cNvSpPr txBox="1"/>
+          <ns0:nvPr/>
+        </ns0:nvSpPr>
+        <ns0:spPr>
+          <ns1:xfrm>
+            <ns1:off x="502920" y="685800"/>
+            <ns1:ext cx="7132320" cy="493776"/>
+          </ns1:xfrm>
+          <ns1:prstGeom prst="rect">
+            <ns1:avLst/>
+          </ns1:prstGeom>
+          <ns1:noFill/>
+        </ns0:spPr>
+        <ns0:txBody>
+          <ns1:bodyPr wrap="square" lIns="18288" rIns="18288">
+            <ns1:spAutoFit/>
+          </ns1:bodyPr>
+          <ns1:lstStyle/>
+          <ns1:p>
+            <ns1:pPr algn="l"/>
+            <ns1:r>
+              <ns1:rPr sz="2800" b="1">
+                <ns1:solidFill>
+                  <ns1:srgbClr val="0F172A"/>
+                </ns1:solidFill>
+                <ns1:latin typeface="Microsoft YaHei"/>
+              </ns1:rPr>
+              <ns1:t>工程实现与版本收口</ns1:t>
+            </ns1:r>
+          </ns1:p>
+        </ns0:txBody>
+      </ns0:sp>
+      <ns0:sp>
+        <ns0:nvSpPr>
+          <ns0:cNvPr id="5" name="TextBox 4"/>
+          <ns0:cNvSpPr txBox="1"/>
+          <ns0:nvPr/>
+        </ns0:nvSpPr>
+        <ns0:spPr>
+          <ns1:xfrm>
+            <ns1:off x="521207" y="1170432"/>
+            <ns1:ext cx="7863840" cy="329184"/>
+          </ns1:xfrm>
+          <ns1:prstGeom prst="rect">
+            <ns1:avLst/>
+          </ns1:prstGeom>
+          <ns1:noFill/>
+        </ns0:spPr>
+        <ns0:txBody>
+          <ns1:bodyPr wrap="square" lIns="18288" rIns="18288">
+            <ns1:spAutoFit/>
+          </ns1:bodyPr>
+          <ns1:lstStyle/>
+          <ns1:p>
+            <ns1:pPr algn="l"/>
+            <ns1:r>
+              <ns1:rPr sz="1300" b="0">
+                <ns1:solidFill>
+                  <ns1:srgbClr val="64748B"/>
+                </ns1:solidFill>
+                <ns1:latin typeface="Microsoft YaHei"/>
+              </ns1:rPr>
+              <ns1:t>从代码、模型、APK 到文档材料形成可复查交付</ns1:t>
+            </ns1:r>
+          </ns1:p>
+        </ns0:txBody>
+      </ns0:sp>
+      <ns0:cxnSp>
+        <ns0:nvCxnSpPr>
+          <ns0:cNvPr id="6" name="Connector 5"/>
+          <ns0:cNvCxnSpPr/>
+          <ns0:nvPr/>
+        </ns0:nvCxnSpPr>
+        <ns0:spPr>
+          <ns1:xfrm>
+            <ns1:off x="502920" y="1627632"/>
+            <ns1:ext cx="11183112" cy="0"/>
+          </ns1:xfrm>
+          <ns1:prstGeom prst="line">
+            <ns1:avLst/>
+          </ns1:prstGeom>
+          <ns1:ln>
+            <ns1:solidFill>
+              <ns1:srgbClr val="CBD5E1"/>
+            </ns1:solidFill>
+          </ns1:ln>
+        </ns0:spPr>
+        <ns0:style>
+          <ns1:lnRef idx="2">
+            <ns1:schemeClr val="accent1"/>
+          </ns1:lnRef>
+          <ns1:fillRef idx="0">
+            <ns1:schemeClr val="accent1"/>
+          </ns1:fillRef>
+          <ns1:effectRef idx="1">
+            <ns1:schemeClr val="accent1"/>
+          </ns1:effectRef>
+          <ns1:fontRef idx="minor">
+            <ns1:schemeClr val="tx1"/>
+          </ns1:fontRef>
+        </ns0:style>
+      </ns0:cxnSp>
+      <ns0:sp>
+        <ns0:nvSpPr>
+          <ns0:cNvPr id="7" name="TextBox 6"/>
+          <ns0:cNvSpPr txBox="1"/>
+          <ns0:nvPr/>
+        </ns0:nvSpPr>
+        <ns0:spPr>
+          <ns1:xfrm>
+            <ns1:off x="530352" y="6473952"/>
+            <ns1:ext cx="5486400" cy="228600"/>
+          </ns1:xfrm>
+          <ns1:prstGeom prst="rect">
+            <ns1:avLst/>
+          </ns1:prstGeom>
+          <ns1:noFill/>
+        </ns0:spPr>
+        <ns0:txBody>
+          <ns1:bodyPr wrap="square" lIns="18288" rIns="18288">
+            <ns1:spAutoFit/>
+          </ns1:bodyPr>
+          <ns1:lstStyle/>
+          <ns1:p>
+            <ns1:pPr algn="l"/>
+            <ns1:r>
+              <ns1:rPr sz="900" b="0">
+                <ns1:solidFill>
+                  <ns1:srgbClr val="64748B"/>
+                </ns1:solidFill>
+                <ns1:latin typeface="Microsoft YaHei"/>
+              </ns1:rPr>
+              <ns1:t>SmartRead Agent｜软件项目研发实践（3）</ns1:t>
+            </ns1:r>
+          </ns1:p>
+        </ns0:txBody>
+      </ns0:sp>
+      <ns0:sp>
+        <ns0:nvSpPr>
+          <ns0:cNvPr id="8" name="TextBox 7"/>
+          <ns0:cNvSpPr txBox="1"/>
+          <ns0:nvPr/>
+        </ns0:nvSpPr>
+        <ns0:spPr>
+          <ns1:xfrm>
+            <ns1:off x="9784080" y="6473952"/>
+            <ns1:ext cx="1920240" cy="228600"/>
+          </ns1:xfrm>
+          <ns1:prstGeom prst="rect">
+            <ns1:avLst/>
+          </ns1:prstGeom>
+          <ns1:noFill/>
+        </ns0:spPr>
+        <ns0:txBody>
+          <ns1:bodyPr wrap="square" lIns="18288" rIns="18288">
+            <ns1:spAutoFit/>
+          </ns1:bodyPr>
+          <ns1:lstStyle/>
+          <ns1:p>
+            <ns1:pPr algn="r"/>
+            <ns1:r>
+              <ns1:rPr sz="900" b="0">
+                <ns1:solidFill>
+                  <ns1:srgbClr val="64748B"/>
+                </ns1:solidFill>
+                <ns1:latin typeface="Microsoft YaHei"/>
+              </ns1:rPr>
+              <ns1:t>A03 组 林立洲 / 江轩宇</ns1:t>
+            </ns1:r>
+          </ns1:p>
+        </ns0:txBody>
+      </ns0:sp>
+      <ns0:sp>
+        <ns0:nvSpPr>
+          <ns0:cNvPr id="9" name="Rounded Rectangle 8"/>
+          <ns0:cNvSpPr/>
+          <ns0:nvPr/>
+        </ns0:nvSpPr>
+        <ns0:spPr>
+          <ns1:xfrm>
+            <ns1:off x="713232" y="1874519"/>
+            <ns1:ext cx="5120640" cy="749808"/>
+          </ns1:xfrm>
+          <ns1:prstGeom prst="roundRect">
+            <ns1:avLst/>
+          </ns1:prstGeom>
+          <ns1:solidFill>
+            <ns1:srgbClr val="FFFFFF"/>
+          </ns1:solidFill>
+          <ns1:ln w="15240">
+            <ns1:solidFill>
+              <ns1:srgbClr val="CBD5E1"/>
+            </ns1:solidFill>
+          </ns1:ln>
+        </ns0:spPr>
+        <ns0:style>
+          <ns1:lnRef idx="1">
+            <ns1:schemeClr val="accent1"/>
+          </ns1:lnRef>
+          <ns1:fillRef idx="3">
+            <ns1:schemeClr val="accent1"/>
+          </ns1:fillRef>
+          <ns1:effectRef idx="2">
+            <ns1:schemeClr val="accent1"/>
+          </ns1:effectRef>
+          <ns1:fontRef idx="minor">
+            <ns1:schemeClr val="lt1"/>
+          </ns1:fontRef>
+        </ns0:style>
+        <ns0:txBody>
+          <ns1:bodyPr rtlCol="0" anchor="ctr"/>
+          <ns1:lstStyle/>
+          <ns1:p>
+            <ns1:pPr algn="ctr"/>
+          </ns1:p>
+        </ns0:txBody>
+      </ns0:sp>
+      <ns0:sp>
+        <ns0:nvSpPr>
+          <ns0:cNvPr id="10" name="TextBox 9"/>
+          <ns0:cNvSpPr txBox="1"/>
+          <ns0:nvPr/>
+        </ns0:nvSpPr>
+        <ns0:spPr>
+          <ns1:xfrm>
+            <ns1:off x="941832" y="2029967"/>
+            <ns1:ext cx="1325880" cy="256032"/>
+          </ns1:xfrm>
+          <ns1:prstGeom prst="rect">
+            <ns1:avLst/>
+          </ns1:prstGeom>
+          <ns1:noFill/>
+        </ns0:spPr>
+        <ns0:txBody>
+          <ns1:bodyPr wrap="square" lIns="18288" rIns="18288">
+            <ns1:spAutoFit/>
+          </ns1:bodyPr>
+          <ns1:lstStyle/>
+          <ns1:p>
+            <ns1:pPr algn="l"/>
+            <ns1:r>
+              <ns1:rPr sz="1400" b="1">
+                <ns1:solidFill>
+                  <ns1:srgbClr val="1E40AF"/>
+                </ns1:solidFill>
+                <ns1:latin typeface="Microsoft YaHei"/>
+              </ns1:rPr>
+              <ns1:t>Android 工程</ns1:t>
+            </ns1:r>
+          </ns1:p>
+        </ns0:txBody>
+      </ns0:sp>
+      <ns0:sp>
+        <ns0:nvSpPr>
+          <ns0:cNvPr id="11" name="TextBox 10"/>
+          <ns0:cNvSpPr txBox="1"/>
+          <ns0:nvPr/>
+        </ns0:nvSpPr>
+        <ns0:spPr>
+          <ns1:xfrm>
+            <ns1:off x="2395728" y="2029967"/>
+            <ns1:ext cx="2926080" cy="256032"/>
+          </ns1:xfrm>
+          <ns1:prstGeom prst="rect">
+            <ns1:avLst/>
+          </ns1:prstGeom>
+          <ns1:noFill/>
+        </ns0:spPr>
+        <ns0:txBody>
+          <ns1:bodyPr wrap="square" lIns="18288" rIns="18288">
+            <ns1:spAutoFit/>
+          </ns1:bodyPr>
+          <ns1:lstStyle/>
+          <ns1:p>
+            <ns1:pPr algn="l"/>
+            <ns1:r>
+              <ns1:rPr sz="1200" b="0">
+                <ns1:solidFill>
+                  <ns1:srgbClr val="1E293B"/>
+                </ns1:solidFill>
+                <ns1:latin typeface="Microsoft YaHei"/>
+              </ns1:rPr>
+              <ns1:t>Kotlin + Compose，入口为 MainActivity</ns1:t>
+            </ns1:r>
+          </ns1:p>
+        </ns0:txBody>
+      </ns0:sp>
+      <ns0:sp>
+        <ns0:nvSpPr>
+          <ns0:cNvPr id="12" name="Rounded Rectangle 11"/>
+          <ns0:cNvSpPr/>
+          <ns0:nvPr/>
+        </ns0:nvSpPr>
+        <ns0:spPr>
+          <ns1:xfrm>
+            <ns1:off x="713232" y="2761487"/>
+            <ns1:ext cx="5120640" cy="749808"/>
+          </ns1:xfrm>
+          <ns1:prstGeom prst="roundRect">
+            <ns1:avLst/>
+          </ns1:prstGeom>
+          <ns1:solidFill>
+            <ns1:srgbClr val="FFFFFF"/>
+          </ns1:solidFill>
+          <ns1:ln w="15240">
+            <ns1:solidFill>
+              <ns1:srgbClr val="CBD5E1"/>
+            </ns1:solidFill>
+          </ns1:ln>
+        </ns0:spPr>
+        <ns0:style>
+          <ns1:lnRef idx="1">
+            <ns1:schemeClr val="accent1"/>
+          </ns1:lnRef>
+          <ns1:fillRef idx="3">
+            <ns1:schemeClr val="accent1"/>
+          </ns1:fillRef>
+          <ns1:effectRef idx="2">
+            <ns1:schemeClr val="accent1"/>
+          </ns1:effectRef>
+          <ns1:fontRef idx="minor">
+            <ns1:schemeClr val="lt1"/>
+          </ns1:fontRef>
+        </ns0:style>
+        <ns0:txBody>
+          <ns1:bodyPr rtlCol="0" anchor="ctr"/>
+          <ns1:lstStyle/>
+          <ns1:p>
+            <ns1:pPr algn="ctr"/>
+          </ns1:p>
+        </ns0:txBody>
+      </ns0:sp>
+      <ns0:sp>
+        <ns0:nvSpPr>
+          <ns0:cNvPr id="13" name="TextBox 12"/>
+          <ns0:cNvSpPr txBox="1"/>
+          <ns0:nvPr/>
+        </ns0:nvSpPr>
+        <ns0:spPr>
+          <ns1:xfrm>
+            <ns1:off x="941832" y="2916935"/>
+            <ns1:ext cx="1325880" cy="256032"/>
+          </ns1:xfrm>
+          <ns1:prstGeom prst="rect">
+            <ns1:avLst/>
+          </ns1:prstGeom>
+          <ns1:noFill/>
+        </ns0:spPr>
+        <ns0:txBody>
+          <ns1:bodyPr wrap="square" lIns="18288" rIns="18288">
+            <ns1:spAutoFit/>
+          </ns1:bodyPr>
+          <ns1:lstStyle/>
+          <ns1:p>
+            <ns1:pPr algn="l"/>
+            <ns1:r>
+              <ns1:rPr sz="1400" b="1">
+                <ns1:solidFill>
+                  <ns1:srgbClr val="1E40AF"/>
+                </ns1:solidFill>
+                <ns1:latin typeface="Microsoft YaHei"/>
+              </ns1:rPr>
+              <ns1:t>模型文件</ns1:t>
+            </ns1:r>
+          </ns1:p>
+        </ns0:txBody>
+      </ns0:sp>
+      <ns0:sp>
+        <ns0:nvSpPr>
+          <ns0:cNvPr id="14" name="TextBox 13"/>
+          <ns0:cNvSpPr txBox="1"/>
+          <ns0:nvPr/>
+        </ns0:nvSpPr>
+        <ns0:spPr>
+          <ns1:xfrm>
+            <ns1:off x="2395728" y="2916935"/>
+            <ns1:ext cx="2926080" cy="256032"/>
+          </ns1:xfrm>
+          <ns1:prstGeom prst="rect">
+            <ns1:avLst/>
+          </ns1:prstGeom>
+          <ns1:noFill/>
+        </ns0:spPr>
+        <ns0:txBody>
+          <ns1:bodyPr wrap="square" lIns="18288" rIns="18288">
+            <ns1:spAutoFit/>
+          </ns1:bodyPr>
+          <ns1:lstStyle/>
+          <ns1:p>
+            <ns1:pPr algn="l"/>
+            <ns1:r>
+              <ns1:rPr sz="1200" b="0">
+                <ns1:solidFill>
+                  <ns1:srgbClr val="1E293B"/>
+                </ns1:solidFill>
+                <ns1:latin typeface="Microsoft YaHei"/>
+              </ns1:rPr>
+              <ns1:t>sentence_importance_model.tflite 集成到 assets</ns1:t>
+            </ns1:r>
+          </ns1:p>
+        </ns0:txBody>
+      </ns0:sp>
+      <ns0:sp>
+        <ns0:nvSpPr>
+          <ns0:cNvPr id="15" name="Rounded Rectangle 14"/>
+          <ns0:cNvSpPr/>
+          <ns0:nvPr/>
+        </ns0:nvSpPr>
+        <ns0:spPr>
+          <ns1:xfrm>
+            <ns1:off x="713232" y="3648455"/>
+            <ns1:ext cx="5120640" cy="749808"/>
+          </ns1:xfrm>
+          <ns1:prstGeom prst="roundRect">
+            <ns1:avLst/>
+          </ns1:prstGeom>
+          <ns1:solidFill>
+            <ns1:srgbClr val="FFFFFF"/>
+          </ns1:solidFill>
+          <ns1:ln w="15240">
+            <ns1:solidFill>
+              <ns1:srgbClr val="CBD5E1"/>
+            </ns1:solidFill>
+          </ns1:ln>
+        </ns0:spPr>
+        <ns0:style>
+          <ns1:lnRef idx="1">
+            <ns1:schemeClr val="accent1"/>
+          </ns1:lnRef>
+          <ns1:fillRef idx="3">
+            <ns1:schemeClr val="accent1"/>
+          </ns1:fillRef>
+          <ns1:effectRef idx="2">
+            <ns1:schemeClr val="accent1"/>
+          </ns1:effectRef>
+          <ns1:fontRef idx="minor">
+            <ns1:schemeClr val="lt1"/>
+          </ns1:fontRef>
+        </ns0:style>
+        <ns0:txBody>
+          <ns1:bodyPr rtlCol="0" anchor="ctr"/>
+          <ns1:lstStyle/>
+          <ns1:p>
+            <ns1:pPr algn="ctr"/>
+          </ns1:p>
+        </ns0:txBody>
+      </ns0:sp>
+      <ns0:sp>
+        <ns0:nvSpPr>
+          <ns0:cNvPr id="16" name="TextBox 15"/>
+          <ns0:cNvSpPr txBox="1"/>
+          <ns0:nvPr/>
+        </ns0:nvSpPr>
+        <ns0:spPr>
+          <ns1:xfrm>
+            <ns1:off x="941832" y="3803903"/>
+            <ns1:ext cx="1325880" cy="256032"/>
+          </ns1:xfrm>
+          <ns1:prstGeom prst="rect">
+            <ns1:avLst/>
+          </ns1:prstGeom>
+          <ns1:noFill/>
+        </ns0:spPr>
+        <ns0:txBody>
+          <ns1:bodyPr wrap="square" lIns="18288" rIns="18288">
+            <ns1:spAutoFit/>
+          </ns1:bodyPr>
+          <ns1:lstStyle/>
+          <ns1:p>
+            <ns1:pPr algn="l"/>
+            <ns1:r>
+              <ns1:rPr sz="1400" b="1">
+                <ns1:solidFill>
+                  <ns1:srgbClr val="1E40AF"/>
+                </ns1:solidFill>
+                <ns1:latin typeface="Microsoft YaHei"/>
+              </ns1:rPr>
+              <ns1:t>APK 产物</ns1:t>
+            </ns1:r>
+          </ns1:p>
+        </ns0:txBody>
+      </ns0:sp>
+      <ns0:sp>
+        <ns0:nvSpPr>
+          <ns0:cNvPr id="17" name="TextBox 16"/>
+          <ns0:cNvSpPr txBox="1"/>
+          <ns0:nvPr/>
+        </ns0:nvSpPr>
+        <ns0:spPr>
+          <ns1:xfrm>
+            <ns1:off x="2395728" y="3803903"/>
+            <ns1:ext cx="2926080" cy="256032"/>
+          </ns1:xfrm>
+          <ns1:prstGeom prst="rect">
+            <ns1:avLst/>
+          </ns1:prstGeom>
+          <ns1:noFill/>
+        </ns0:spPr>
+        <ns0:txBody>
+          <ns1:bodyPr wrap="square" lIns="18288" rIns="18288">
+            <ns1:spAutoFit/>
+          </ns1:bodyPr>
+          <ns1:lstStyle/>
+          <ns1:p>
+            <ns1:pPr algn="l"/>
+            <ns1:r>
+              <ns1:rPr sz="1200" b="0">
+                <ns1:solidFill>
+                  <ns1:srgbClr val="1E293B"/>
+                </ns1:solidFill>
+                <ns1:latin typeface="Microsoft YaHei"/>
+              </ns1:rPr>
+              <ns1:t>SmartReadAgent-v1.0-debug.apk</ns1:t>
+            </ns1:r>
+          </ns1:p>
+        </ns0:txBody>
+      </ns0:sp>
+      <ns0:sp>
+        <ns0:nvSpPr>
+          <ns0:cNvPr id="18" name="Rounded Rectangle 17"/>
+          <ns0:cNvSpPr/>
+          <ns0:nvPr/>
+        </ns0:nvSpPr>
+        <ns0:spPr>
+          <ns1:xfrm>
+            <ns1:off x="713232" y="4535423"/>
+            <ns1:ext cx="5120640" cy="749808"/>
+          </ns1:xfrm>
+          <ns1:prstGeom prst="roundRect">
+            <ns1:avLst/>
+          </ns1:prstGeom>
+          <ns1:solidFill>
+            <ns1:srgbClr val="FFFFFF"/>
+          </ns1:solidFill>
+          <ns1:ln w="15240">
+            <ns1:solidFill>
+              <ns1:srgbClr val="CBD5E1"/>
+            </ns1:solidFill>
+          </ns1:ln>
+        </ns0:spPr>
+        <ns0:style>
+          <ns1:lnRef idx="1">
+            <ns1:schemeClr val="accent1"/>
+          </ns1:lnRef>
+          <ns1:fillRef idx="3">
+            <ns1:schemeClr val="accent1"/>
+          </ns1:fillRef>
+          <ns1:effectRef idx="2">
+            <ns1:schemeClr val="accent1"/>
+          </ns1:effectRef>
+          <ns1:fontRef idx="minor">
+            <ns1:schemeClr val="lt1"/>
+          </ns1:fontRef>
+        </ns0:style>
+        <ns0:txBody>
+          <ns1:bodyPr rtlCol="0" anchor="ctr"/>
+          <ns1:lstStyle/>
+          <ns1:p>
+            <ns1:pPr algn="ctr"/>
+          </ns1:p>
+        </ns0:txBody>
+      </ns0:sp>
+      <ns0:sp>
+        <ns0:nvSpPr>
+          <ns0:cNvPr id="19" name="TextBox 18"/>
+          <ns0:cNvSpPr txBox="1"/>
+          <ns0:nvPr/>
+        </ns0:nvSpPr>
+        <ns0:spPr>
+          <ns1:xfrm>
+            <ns1:off x="941832" y="4690871"/>
+            <ns1:ext cx="1325880" cy="256032"/>
+          </ns1:xfrm>
+          <ns1:prstGeom prst="rect">
+            <ns1:avLst/>
+          </ns1:prstGeom>
+          <ns1:noFill/>
+        </ns0:spPr>
+        <ns0:txBody>
+          <ns1:bodyPr wrap="square" lIns="18288" rIns="18288">
+            <ns1:spAutoFit/>
+          </ns1:bodyPr>
+          <ns1:lstStyle/>
+          <ns1:p>
+            <ns1:pPr algn="l"/>
+            <ns1:r>
+              <ns1:rPr sz="1400" b="1">
+                <ns1:solidFill>
+                  <ns1:srgbClr val="1E40AF"/>
+                </ns1:solidFill>
+                <ns1:latin typeface="Microsoft YaHei"/>
+              </ns1:rPr>
+              <ns1:t>文档材料</ns1:t>
+            </ns1:r>
+          </ns1:p>
+        </ns0:txBody>
+      </ns0:sp>
+      <ns0:sp>
+        <ns0:nvSpPr>
+          <ns0:cNvPr id="20" name="TextBox 19"/>
+          <ns0:cNvSpPr txBox="1"/>
+          <ns0:nvPr/>
+        </ns0:nvSpPr>
+        <ns0:spPr>
+          <ns1:xfrm>
+            <ns1:off x="2395728" y="4690871"/>
+            <ns1:ext cx="2926080" cy="256032"/>
+          </ns1:xfrm>
+          <ns1:prstGeom prst="rect">
+            <ns1:avLst/>
+          </ns1:prstGeom>
+          <ns1:noFill/>
+        </ns0:spPr>
+        <ns0:txBody>
+          <ns1:bodyPr wrap="square" lIns="18288" rIns="18288">
+            <ns1:spAutoFit/>
+          </ns1:bodyPr>
+          <ns1:lstStyle/>
+          <ns1:p>
+            <ns1:pPr algn="l"/>
+            <ns1:r>
+              <ns1:rPr sz="1200" b="0">
+                <ns1:solidFill>
+                  <ns1:srgbClr val="1E293B"/>
+                </ns1:solidFill>
+                <ns1:latin typeface="Microsoft YaHei"/>
+              </ns1:rPr>
+              <ns1:t>README、项目说明、详细设计说明书、功能说明</ns1:t>
+            </ns1:r>
+          </ns1:p>
+        </ns0:txBody>
+      </ns0:sp>
+      <ns0:pic>
+        <ns0:nvPicPr>
+          <ns0:cNvPr id="21" name="Picture 20" descr="history_list_focus.png"/>
+          <ns0:cNvPicPr>
+            <ns1:picLocks noChangeAspect="1"/>
+          </ns0:cNvPicPr>
+          <ns0:nvPr/>
+        </ns0:nvPicPr>
+        <ns0:blipFill>
+          <ns1:blip ns2:embed="rId2"/>
+          <ns1:stretch>
+            <ns1:fillRect/>
+          </ns1:stretch>
+        </ns0:blipFill>
+        <ns0:spPr>
+          <ns1:xfrm>
+            <ns1:off x="7406640" y="1997164"/>
+            <ns1:ext cx="2514600" cy="3832933"/>
+          </ns1:xfrm>
+          <ns1:prstGeom prst="rect">
+            <ns1:avLst/>
+          </ns1:prstGeom>
+        </ns0:spPr>
+      </ns0:pic>
+    </ns0:spTree>
+  </ns0:cSld>
+  <ns0:clrMapOvr>
+    <ns1:masterClrMapping/>
+  </ns0:clrMapOvr>
+</ns0:sld>
 </file>
 
 <file path=ppt/slides/slide12.xml><?xml version="1.0" encoding="utf-8"?>
@@ -7510,611 +7510,611 @@
 </file>
 
 <file path=ppt/slides/slide15.xml><?xml version="1.0" encoding="utf-8"?>
-<p:sld xmlns:a="http://schemas.openxmlformats.org/drawingml/2006/main" xmlns:p="http://schemas.openxmlformats.org/presentationml/2006/main" xmlns:r="http://schemas.openxmlformats.org/officeDocument/2006/relationships">
-  <p:cSld>
-    <p:bg>
-      <p:bgPr>
-        <a:solidFill>
-          <a:srgbClr val="F8FAFC"/>
-        </a:solidFill>
-        <a:effectLst/>
-      </p:bgPr>
-    </p:bg>
-    <p:spTree>
-      <p:nvGrpSpPr>
-        <p:cNvPr id="1" name=""/>
-        <p:cNvGrpSpPr/>
-        <p:nvPr/>
-      </p:nvGrpSpPr>
-      <p:grpSpPr/>
-      <p:sp>
-        <p:nvSpPr>
-          <p:cNvPr id="2" name="TextBox 1"/>
-          <p:cNvSpPr txBox="1"/>
-          <p:nvPr/>
-        </p:nvSpPr>
-        <p:spPr>
-          <a:xfrm>
-            <a:off x="502920" y="329184"/>
-            <a:ext cx="914400" cy="256032"/>
-          </a:xfrm>
-          <a:prstGeom prst="rect">
-            <a:avLst/>
-          </a:prstGeom>
-          <a:noFill/>
-        </p:spPr>
-        <p:txBody>
-          <a:bodyPr wrap="square" lIns="18288" rIns="18288">
-            <a:spAutoFit/>
-          </a:bodyPr>
-          <a:lstStyle/>
-          <a:p>
-            <a:pPr algn="l"/>
-            <a:r>
-              <a:rPr sz="1200" b="1">
-                <a:solidFill>
-                  <a:srgbClr val="1E40AF"/>
-                </a:solidFill>
-                <a:latin typeface="Microsoft YaHei"/>
-              </a:rPr>
-              <a:t>15</a:t>
-            </a:r>
-          </a:p>
-        </p:txBody>
-      </p:sp>
-      <p:sp>
-        <p:nvSpPr>
-          <p:cNvPr id="3" name="TextBox 2"/>
-          <p:cNvSpPr txBox="1"/>
-          <p:nvPr/>
-        </p:nvSpPr>
-        <p:spPr>
-          <a:xfrm>
-            <a:off x="1005840" y="283464"/>
-            <a:ext cx="2194560" cy="274320"/>
-          </a:xfrm>
-          <a:prstGeom prst="rect">
-            <a:avLst/>
-          </a:prstGeom>
-          <a:noFill/>
-        </p:spPr>
-        <p:txBody>
-          <a:bodyPr wrap="square" lIns="18288" rIns="18288">
-            <a:spAutoFit/>
-          </a:bodyPr>
-          <a:lstStyle/>
-          <a:p>
-            <a:pPr algn="l"/>
-            <a:r>
-              <a:rPr sz="1000" b="1">
-                <a:solidFill>
-                  <a:srgbClr val="64748B"/>
-                </a:solidFill>
-                <a:latin typeface="Microsoft YaHei"/>
-              </a:rPr>
-              <a:t>总结</a:t>
-            </a:r>
-          </a:p>
-        </p:txBody>
-      </p:sp>
-      <p:sp>
-        <p:nvSpPr>
-          <p:cNvPr id="4" name="TextBox 3"/>
-          <p:cNvSpPr txBox="1"/>
-          <p:nvPr/>
-        </p:nvSpPr>
-        <p:spPr>
-          <a:xfrm>
-            <a:off x="502920" y="685800"/>
-            <a:ext cx="7132320" cy="493776"/>
-          </a:xfrm>
-          <a:prstGeom prst="rect">
-            <a:avLst/>
-          </a:prstGeom>
-          <a:noFill/>
-        </p:spPr>
-        <p:txBody>
-          <a:bodyPr wrap="square" lIns="18288" rIns="18288">
-            <a:spAutoFit/>
-          </a:bodyPr>
-          <a:lstStyle/>
-          <a:p>
-            <a:pPr algn="l"/>
-            <a:r>
-              <a:rPr sz="2800" b="1">
-                <a:solidFill>
-                  <a:srgbClr val="0F172A"/>
-                </a:solidFill>
-                <a:latin typeface="Microsoft YaHei"/>
-              </a:rPr>
-              <a:t>总结与后续优化</a:t>
-            </a:r>
-          </a:p>
-        </p:txBody>
-      </p:sp>
-      <p:sp>
-        <p:nvSpPr>
-          <p:cNvPr id="5" name="TextBox 4"/>
-          <p:cNvSpPr txBox="1"/>
-          <p:nvPr/>
-        </p:nvSpPr>
-        <p:spPr>
-          <a:xfrm>
-            <a:off x="521207" y="1170432"/>
-            <a:ext cx="7863840" cy="329184"/>
-          </a:xfrm>
-          <a:prstGeom prst="rect">
-            <a:avLst/>
-          </a:prstGeom>
-          <a:noFill/>
-        </p:spPr>
-        <p:txBody>
-          <a:bodyPr wrap="square" lIns="18288" rIns="18288">
-            <a:spAutoFit/>
-          </a:bodyPr>
-          <a:lstStyle/>
-          <a:p>
-            <a:pPr algn="l"/>
-            <a:r>
-              <a:rPr sz="1300" b="0">
-                <a:solidFill>
-                  <a:srgbClr val="64748B"/>
-                </a:solidFill>
-                <a:latin typeface="Microsoft YaHei"/>
-              </a:rPr>
-              <a:t>已完成课程项目闭环，同时保留可继续扩展的方向</a:t>
-            </a:r>
-          </a:p>
-        </p:txBody>
-      </p:sp>
-      <p:cxnSp>
-        <p:nvCxnSpPr>
-          <p:cNvPr id="6" name="Connector 5"/>
-          <p:cNvCxnSpPr/>
-          <p:nvPr/>
-        </p:nvCxnSpPr>
-        <p:spPr>
-          <a:xfrm>
-            <a:off x="502920" y="1627632"/>
-            <a:ext cx="11183112" cy="0"/>
-          </a:xfrm>
-          <a:prstGeom prst="line">
-            <a:avLst/>
-          </a:prstGeom>
-          <a:ln>
-            <a:solidFill>
-              <a:srgbClr val="CBD5E1"/>
-            </a:solidFill>
-          </a:ln>
-        </p:spPr>
-        <p:style>
-          <a:lnRef idx="2">
-            <a:schemeClr val="accent1"/>
-          </a:lnRef>
-          <a:fillRef idx="0">
-            <a:schemeClr val="accent1"/>
-          </a:fillRef>
-          <a:effectRef idx="1">
-            <a:schemeClr val="accent1"/>
-          </a:effectRef>
-          <a:fontRef idx="minor">
-            <a:schemeClr val="tx1"/>
-          </a:fontRef>
-        </p:style>
-      </p:cxnSp>
-      <p:sp>
-        <p:nvSpPr>
-          <p:cNvPr id="7" name="TextBox 6"/>
-          <p:cNvSpPr txBox="1"/>
-          <p:nvPr/>
-        </p:nvSpPr>
-        <p:spPr>
-          <a:xfrm>
-            <a:off x="530352" y="6473952"/>
-            <a:ext cx="5486400" cy="228600"/>
-          </a:xfrm>
-          <a:prstGeom prst="rect">
-            <a:avLst/>
-          </a:prstGeom>
-          <a:noFill/>
-        </p:spPr>
-        <p:txBody>
-          <a:bodyPr wrap="square" lIns="18288" rIns="18288">
-            <a:spAutoFit/>
-          </a:bodyPr>
-          <a:lstStyle/>
-          <a:p>
-            <a:pPr algn="l"/>
-            <a:r>
-              <a:rPr sz="900" b="0">
-                <a:solidFill>
-                  <a:srgbClr val="64748B"/>
-                </a:solidFill>
-                <a:latin typeface="Microsoft YaHei"/>
-              </a:rPr>
-              <a:t>SmartRead Agent｜软件项目研发实践（3）</a:t>
-            </a:r>
-          </a:p>
-        </p:txBody>
-      </p:sp>
-      <p:sp>
-        <p:nvSpPr>
-          <p:cNvPr id="8" name="TextBox 7"/>
-          <p:cNvSpPr txBox="1"/>
-          <p:nvPr/>
-        </p:nvSpPr>
-        <p:spPr>
-          <a:xfrm>
-            <a:off x="9784080" y="6473952"/>
-            <a:ext cx="1920240" cy="228600"/>
-          </a:xfrm>
-          <a:prstGeom prst="rect">
-            <a:avLst/>
-          </a:prstGeom>
-          <a:noFill/>
-        </p:spPr>
-        <p:txBody>
-          <a:bodyPr wrap="square" lIns="18288" rIns="18288">
-            <a:spAutoFit/>
-          </a:bodyPr>
-          <a:lstStyle/>
-          <a:p>
-            <a:pPr algn="r"/>
-            <a:r>
-              <a:rPr sz="900" b="0">
-                <a:solidFill>
-                  <a:srgbClr val="64748B"/>
-                </a:solidFill>
-                <a:latin typeface="Microsoft YaHei"/>
-              </a:rPr>
-              <a:t>A03 组 林立洲 / 江轩宇</a:t>
-            </a:r>
-          </a:p>
-        </p:txBody>
-      </p:sp>
-      <p:sp>
-        <p:nvSpPr>
-          <p:cNvPr id="9" name="Rounded Rectangle 8"/>
-          <p:cNvSpPr/>
-          <p:nvPr/>
-        </p:nvSpPr>
-        <p:spPr>
-          <a:xfrm>
-            <a:off x="749808" y="1920240"/>
-            <a:ext cx="5257800" cy="2834640"/>
-          </a:xfrm>
-          <a:prstGeom prst="roundRect">
-            <a:avLst/>
-          </a:prstGeom>
-          <a:solidFill>
-            <a:srgbClr val="F0FDFA"/>
-          </a:solidFill>
-          <a:ln w="15240">
-            <a:solidFill>
-              <a:srgbClr val="5EEAD4"/>
-            </a:solidFill>
-          </a:ln>
-        </p:spPr>
-        <p:style>
-          <a:lnRef idx="1">
-            <a:schemeClr val="accent1"/>
-          </a:lnRef>
-          <a:fillRef idx="3">
-            <a:schemeClr val="accent1"/>
-          </a:fillRef>
-          <a:effectRef idx="2">
-            <a:schemeClr val="accent1"/>
-          </a:effectRef>
-          <a:fontRef idx="minor">
-            <a:schemeClr val="lt1"/>
-          </a:fontRef>
-        </p:style>
-        <p:txBody>
-          <a:bodyPr rtlCol="0" anchor="ctr"/>
-          <a:lstStyle/>
-          <a:p>
-            <a:pPr algn="ctr"/>
-          </a:p>
-        </p:txBody>
-      </p:sp>
-      <p:sp>
-        <p:nvSpPr>
-          <p:cNvPr id="10" name="TextBox 9"/>
-          <p:cNvSpPr txBox="1"/>
-          <p:nvPr/>
-        </p:nvSpPr>
-        <p:spPr>
-          <a:xfrm>
-            <a:off x="1024128" y="2194560"/>
-            <a:ext cx="4297680" cy="320040"/>
-          </a:xfrm>
-          <a:prstGeom prst="rect">
-            <a:avLst/>
-          </a:prstGeom>
-          <a:noFill/>
-        </p:spPr>
-        <p:txBody>
-          <a:bodyPr wrap="square" lIns="18288" rIns="18288">
-            <a:spAutoFit/>
-          </a:bodyPr>
-          <a:lstStyle/>
-          <a:p>
-            <a:pPr algn="l"/>
-            <a:r>
-              <a:rPr sz="2000" b="1">
-                <a:solidFill>
-                  <a:srgbClr val="047857"/>
-                </a:solidFill>
-                <a:latin typeface="Microsoft YaHei"/>
-              </a:rPr>
-              <a:t>已经完成</a:t>
-            </a:r>
-          </a:p>
-        </p:txBody>
-      </p:sp>
-      <p:sp>
-        <p:nvSpPr>
-          <p:cNvPr id="11" name="TextBox 10"/>
-          <p:cNvSpPr txBox="1"/>
-          <p:nvPr/>
-        </p:nvSpPr>
-        <p:spPr>
-          <a:xfrm>
-            <a:off x="1024128" y="2697480"/>
-            <a:ext cx="4434840" cy="1508760"/>
-          </a:xfrm>
-          <a:prstGeom prst="rect">
-            <a:avLst/>
-          </a:prstGeom>
-          <a:noFill/>
-        </p:spPr>
-        <p:txBody>
-          <a:bodyPr wrap="square" lIns="18288" rIns="18288" anchor="t">
-            <a:spAutoFit/>
-          </a:bodyPr>
-          <a:lstStyle/>
-          <a:p>
-            <a:pPr algn="l">
-              <a:spcAft>
-                <a:spcPts val="700"/>
-              </a:spcAft>
-              <a:defRPr sz="1400">
-                <a:solidFill>
-                  <a:srgbClr val="1E293B"/>
-                </a:solidFill>
-                <a:latin typeface="Microsoft YaHei"/>
-              </a:defRPr>
-            </a:pPr>
-            <a:r>
-              <a:t>• 完成 Android 端可运行 App</a:t>
-            </a:r>
-          </a:p>
-          <a:p>
-            <a:pPr>
-              <a:spcAft>
-                <a:spcPts val="700"/>
-              </a:spcAft>
-              <a:defRPr sz="1400">
-                <a:solidFill>
-                  <a:srgbClr val="1E293B"/>
-                </a:solidFill>
-                <a:latin typeface="Microsoft YaHei"/>
-              </a:defRPr>
-            </a:pPr>
-            <a:r>
-              <a:t>• 形成阅读分析、端侧 AI、问答复习、历史回看的闭环</a:t>
-            </a:r>
-          </a:p>
-          <a:p>
-            <a:pPr>
-              <a:spcAft>
-                <a:spcPts val="700"/>
-              </a:spcAft>
-              <a:defRPr sz="1400">
-                <a:solidFill>
-                  <a:srgbClr val="1E293B"/>
-                </a:solidFill>
-                <a:latin typeface="Microsoft YaHei"/>
-              </a:defRPr>
-            </a:pPr>
-            <a:r>
-              <a:t>• 完成 LiteRT 模型集成、APK 构建和材料归档</a:t>
-            </a:r>
-          </a:p>
-        </p:txBody>
-      </p:sp>
-      <p:sp>
-        <p:nvSpPr>
-          <p:cNvPr id="12" name="Rounded Rectangle 11"/>
-          <p:cNvSpPr/>
-          <p:nvPr/>
-        </p:nvSpPr>
-        <p:spPr>
-          <a:xfrm>
-            <a:off x="6400800" y="1920240"/>
-            <a:ext cx="4800600" cy="2834640"/>
-          </a:xfrm>
-          <a:prstGeom prst="roundRect">
-            <a:avLst/>
-          </a:prstGeom>
-          <a:solidFill>
-            <a:srgbClr val="FFFBEB"/>
-          </a:solidFill>
-          <a:ln w="15240">
-            <a:solidFill>
-              <a:srgbClr val="FCD34D"/>
-            </a:solidFill>
-          </a:ln>
-        </p:spPr>
-        <p:style>
-          <a:lnRef idx="1">
-            <a:schemeClr val="accent1"/>
-          </a:lnRef>
-          <a:fillRef idx="3">
-            <a:schemeClr val="accent1"/>
-          </a:fillRef>
-          <a:effectRef idx="2">
-            <a:schemeClr val="accent1"/>
-          </a:effectRef>
-          <a:fontRef idx="minor">
-            <a:schemeClr val="lt1"/>
-          </a:fontRef>
-        </p:style>
-        <p:txBody>
-          <a:bodyPr rtlCol="0" anchor="ctr"/>
-          <a:lstStyle/>
-          <a:p>
-            <a:pPr algn="ctr"/>
-          </a:p>
-        </p:txBody>
-      </p:sp>
-      <p:sp>
-        <p:nvSpPr>
-          <p:cNvPr id="13" name="TextBox 12"/>
-          <p:cNvSpPr txBox="1"/>
-          <p:nvPr/>
-        </p:nvSpPr>
-        <p:spPr>
-          <a:xfrm>
-            <a:off x="6675120" y="2194560"/>
-            <a:ext cx="3931920" cy="320040"/>
-          </a:xfrm>
-          <a:prstGeom prst="rect">
-            <a:avLst/>
-          </a:prstGeom>
-          <a:noFill/>
-        </p:spPr>
-        <p:txBody>
-          <a:bodyPr wrap="square" lIns="18288" rIns="18288">
-            <a:spAutoFit/>
-          </a:bodyPr>
-          <a:lstStyle/>
-          <a:p>
-            <a:pPr algn="l"/>
-            <a:r>
-              <a:rPr sz="2000" b="1">
-                <a:solidFill>
-                  <a:srgbClr val="D97706"/>
-                </a:solidFill>
-                <a:latin typeface="Microsoft YaHei"/>
-              </a:rPr>
-              <a:t>后续方向</a:t>
-            </a:r>
-          </a:p>
-        </p:txBody>
-      </p:sp>
-      <p:sp>
-        <p:nvSpPr>
-          <p:cNvPr id="14" name="TextBox 13"/>
-          <p:cNvSpPr txBox="1"/>
-          <p:nvPr/>
-        </p:nvSpPr>
-        <p:spPr>
-          <a:xfrm>
-            <a:off x="6675120" y="2697480"/>
-            <a:ext cx="3977639" cy="1508760"/>
-          </a:xfrm>
-          <a:prstGeom prst="rect">
-            <a:avLst/>
-          </a:prstGeom>
-          <a:noFill/>
-        </p:spPr>
-        <p:txBody>
-          <a:bodyPr wrap="square" lIns="18288" rIns="18288" anchor="t">
-            <a:spAutoFit/>
-          </a:bodyPr>
-          <a:lstStyle/>
-          <a:p>
-            <a:pPr algn="l">
-              <a:spcAft>
-                <a:spcPts val="700"/>
-              </a:spcAft>
-              <a:defRPr sz="1400">
-                <a:solidFill>
-                  <a:srgbClr val="1E293B"/>
-                </a:solidFill>
-                <a:latin typeface="Microsoft YaHei"/>
-              </a:defRPr>
-            </a:pPr>
-            <a:r>
-              <a:t>• 扩大训练数据并改进句子重要性模型</a:t>
-            </a:r>
-          </a:p>
-          <a:p>
-            <a:pPr>
-              <a:spcAft>
-                <a:spcPts val="700"/>
-              </a:spcAft>
-              <a:defRPr sz="1400">
-                <a:solidFill>
-                  <a:srgbClr val="1E293B"/>
-                </a:solidFill>
-                <a:latin typeface="Microsoft YaHei"/>
-              </a:defRPr>
-            </a:pPr>
-            <a:r>
-              <a:t>• 历史记录迁移到 Room 数据库</a:t>
-            </a:r>
-          </a:p>
-          <a:p>
-            <a:pPr>
-              <a:spcAft>
-                <a:spcPts val="700"/>
-              </a:spcAft>
-              <a:defRPr sz="1400">
-                <a:solidFill>
-                  <a:srgbClr val="1E293B"/>
-                </a:solidFill>
-                <a:latin typeface="Microsoft YaHei"/>
-              </a:defRPr>
-            </a:pPr>
-            <a:r>
-              <a:t>• 增加 OCR 导入和可选云端增强能力</a:t>
-            </a:r>
-          </a:p>
-        </p:txBody>
-      </p:sp>
-      <p:sp>
-        <p:nvSpPr>
-          <p:cNvPr id="15" name="TextBox 14"/>
-          <p:cNvSpPr txBox="1"/>
-          <p:nvPr/>
-        </p:nvSpPr>
-        <p:spPr>
-          <a:xfrm>
-            <a:off x="1828800" y="5349240"/>
-            <a:ext cx="8595360" cy="457200"/>
-          </a:xfrm>
-          <a:prstGeom prst="rect">
-            <a:avLst/>
-          </a:prstGeom>
-          <a:noFill/>
-        </p:spPr>
-        <p:txBody>
-          <a:bodyPr wrap="square" lIns="18288" rIns="18288">
-            <a:spAutoFit/>
-          </a:bodyPr>
-          <a:lstStyle/>
-          <a:p>
-            <a:pPr algn="ctr"/>
-            <a:r>
-              <a:rPr sz="2000" b="1">
-                <a:solidFill>
-                  <a:srgbClr val="0F172A"/>
-                </a:solidFill>
-                <a:latin typeface="Microsoft YaHei"/>
-              </a:rPr>
-              <a:t>SmartRead Agent V1.0 已形成可运行、可演示、可复查的课程项目交付。</a:t>
-            </a:r>
-          </a:p>
-        </p:txBody>
-      </p:sp>
-    </p:spTree>
-  </p:cSld>
-  <p:clrMapOvr>
-    <a:masterClrMapping/>
-  </p:clrMapOvr>
-</p:sld>
+<ns0:sld xmlns:ns0="http://schemas.openxmlformats.org/presentationml/2006/main" xmlns:ns1="http://schemas.openxmlformats.org/drawingml/2006/main">
+  <ns0:cSld>
+    <ns0:bg>
+      <ns0:bgPr>
+        <ns1:solidFill>
+          <ns1:srgbClr val="F8FAFC"/>
+        </ns1:solidFill>
+        <ns1:effectLst/>
+      </ns0:bgPr>
+    </ns0:bg>
+    <ns0:spTree>
+      <ns0:nvGrpSpPr>
+        <ns0:cNvPr id="1" name=""/>
+        <ns0:cNvGrpSpPr/>
+        <ns0:nvPr/>
+      </ns0:nvGrpSpPr>
+      <ns0:grpSpPr/>
+      <ns0:sp>
+        <ns0:nvSpPr>
+          <ns0:cNvPr id="2" name="TextBox 1"/>
+          <ns0:cNvSpPr txBox="1"/>
+          <ns0:nvPr/>
+        </ns0:nvSpPr>
+        <ns0:spPr>
+          <ns1:xfrm>
+            <ns1:off x="502920" y="329184"/>
+            <ns1:ext cx="914400" cy="256032"/>
+          </ns1:xfrm>
+          <ns1:prstGeom prst="rect">
+            <ns1:avLst/>
+          </ns1:prstGeom>
+          <ns1:noFill/>
+        </ns0:spPr>
+        <ns0:txBody>
+          <ns1:bodyPr wrap="square" lIns="18288" rIns="18288">
+            <ns1:spAutoFit/>
+          </ns1:bodyPr>
+          <ns1:lstStyle/>
+          <ns1:p>
+            <ns1:pPr algn="l"/>
+            <ns1:r>
+              <ns1:rPr sz="1200" b="1">
+                <ns1:solidFill>
+                  <ns1:srgbClr val="1E40AF"/>
+                </ns1:solidFill>
+                <ns1:latin typeface="Microsoft YaHei"/>
+              </ns1:rPr>
+              <ns1:t>15</ns1:t>
+            </ns1:r>
+          </ns1:p>
+        </ns0:txBody>
+      </ns0:sp>
+      <ns0:sp>
+        <ns0:nvSpPr>
+          <ns0:cNvPr id="3" name="TextBox 2"/>
+          <ns0:cNvSpPr txBox="1"/>
+          <ns0:nvPr/>
+        </ns0:nvSpPr>
+        <ns0:spPr>
+          <ns1:xfrm>
+            <ns1:off x="1005840" y="283464"/>
+            <ns1:ext cx="2194560" cy="274320"/>
+          </ns1:xfrm>
+          <ns1:prstGeom prst="rect">
+            <ns1:avLst/>
+          </ns1:prstGeom>
+          <ns1:noFill/>
+        </ns0:spPr>
+        <ns0:txBody>
+          <ns1:bodyPr wrap="square" lIns="18288" rIns="18288">
+            <ns1:spAutoFit/>
+          </ns1:bodyPr>
+          <ns1:lstStyle/>
+          <ns1:p>
+            <ns1:pPr algn="l"/>
+            <ns1:r>
+              <ns1:rPr sz="1000" b="1">
+                <ns1:solidFill>
+                  <ns1:srgbClr val="64748B"/>
+                </ns1:solidFill>
+                <ns1:latin typeface="Microsoft YaHei"/>
+              </ns1:rPr>
+              <ns1:t>总结</ns1:t>
+            </ns1:r>
+          </ns1:p>
+        </ns0:txBody>
+      </ns0:sp>
+      <ns0:sp>
+        <ns0:nvSpPr>
+          <ns0:cNvPr id="4" name="TextBox 3"/>
+          <ns0:cNvSpPr txBox="1"/>
+          <ns0:nvPr/>
+        </ns0:nvSpPr>
+        <ns0:spPr>
+          <ns1:xfrm>
+            <ns1:off x="502920" y="685800"/>
+            <ns1:ext cx="7132320" cy="493776"/>
+          </ns1:xfrm>
+          <ns1:prstGeom prst="rect">
+            <ns1:avLst/>
+          </ns1:prstGeom>
+          <ns1:noFill/>
+        </ns0:spPr>
+        <ns0:txBody>
+          <ns1:bodyPr wrap="square" lIns="18288" rIns="18288">
+            <ns1:spAutoFit/>
+          </ns1:bodyPr>
+          <ns1:lstStyle/>
+          <ns1:p>
+            <ns1:pPr algn="l"/>
+            <ns1:r>
+              <ns1:rPr sz="2800" b="1">
+                <ns1:solidFill>
+                  <ns1:srgbClr val="0F172A"/>
+                </ns1:solidFill>
+                <ns1:latin typeface="Microsoft YaHei"/>
+              </ns1:rPr>
+              <ns1:t>总结与后续优化</ns1:t>
+            </ns1:r>
+          </ns1:p>
+        </ns0:txBody>
+      </ns0:sp>
+      <ns0:sp>
+        <ns0:nvSpPr>
+          <ns0:cNvPr id="5" name="TextBox 4"/>
+          <ns0:cNvSpPr txBox="1"/>
+          <ns0:nvPr/>
+        </ns0:nvSpPr>
+        <ns0:spPr>
+          <ns1:xfrm>
+            <ns1:off x="521207" y="1170432"/>
+            <ns1:ext cx="7863840" cy="329184"/>
+          </ns1:xfrm>
+          <ns1:prstGeom prst="rect">
+            <ns1:avLst/>
+          </ns1:prstGeom>
+          <ns1:noFill/>
+        </ns0:spPr>
+        <ns0:txBody>
+          <ns1:bodyPr wrap="square" lIns="18288" rIns="18288">
+            <ns1:spAutoFit/>
+          </ns1:bodyPr>
+          <ns1:lstStyle/>
+          <ns1:p>
+            <ns1:pPr algn="l"/>
+            <ns1:r>
+              <ns1:rPr sz="1300" b="0">
+                <ns1:solidFill>
+                  <ns1:srgbClr val="64748B"/>
+                </ns1:solidFill>
+                <ns1:latin typeface="Microsoft YaHei"/>
+              </ns1:rPr>
+              <ns1:t>已完成课程项目闭环，同时保留可继续扩展的方向</ns1:t>
+            </ns1:r>
+          </ns1:p>
+        </ns0:txBody>
+      </ns0:sp>
+      <ns0:cxnSp>
+        <ns0:nvCxnSpPr>
+          <ns0:cNvPr id="6" name="Connector 5"/>
+          <ns0:cNvCxnSpPr/>
+          <ns0:nvPr/>
+        </ns0:nvCxnSpPr>
+        <ns0:spPr>
+          <ns1:xfrm>
+            <ns1:off x="502920" y="1627632"/>
+            <ns1:ext cx="11183112" cy="0"/>
+          </ns1:xfrm>
+          <ns1:prstGeom prst="line">
+            <ns1:avLst/>
+          </ns1:prstGeom>
+          <ns1:ln>
+            <ns1:solidFill>
+              <ns1:srgbClr val="CBD5E1"/>
+            </ns1:solidFill>
+          </ns1:ln>
+        </ns0:spPr>
+        <ns0:style>
+          <ns1:lnRef idx="2">
+            <ns1:schemeClr val="accent1"/>
+          </ns1:lnRef>
+          <ns1:fillRef idx="0">
+            <ns1:schemeClr val="accent1"/>
+          </ns1:fillRef>
+          <ns1:effectRef idx="1">
+            <ns1:schemeClr val="accent1"/>
+          </ns1:effectRef>
+          <ns1:fontRef idx="minor">
+            <ns1:schemeClr val="tx1"/>
+          </ns1:fontRef>
+        </ns0:style>
+      </ns0:cxnSp>
+      <ns0:sp>
+        <ns0:nvSpPr>
+          <ns0:cNvPr id="7" name="TextBox 6"/>
+          <ns0:cNvSpPr txBox="1"/>
+          <ns0:nvPr/>
+        </ns0:nvSpPr>
+        <ns0:spPr>
+          <ns1:xfrm>
+            <ns1:off x="530352" y="6473952"/>
+            <ns1:ext cx="5486400" cy="228600"/>
+          </ns1:xfrm>
+          <ns1:prstGeom prst="rect">
+            <ns1:avLst/>
+          </ns1:prstGeom>
+          <ns1:noFill/>
+        </ns0:spPr>
+        <ns0:txBody>
+          <ns1:bodyPr wrap="square" lIns="18288" rIns="18288">
+            <ns1:spAutoFit/>
+          </ns1:bodyPr>
+          <ns1:lstStyle/>
+          <ns1:p>
+            <ns1:pPr algn="l"/>
+            <ns1:r>
+              <ns1:rPr sz="900" b="0">
+                <ns1:solidFill>
+                  <ns1:srgbClr val="64748B"/>
+                </ns1:solidFill>
+                <ns1:latin typeface="Microsoft YaHei"/>
+              </ns1:rPr>
+              <ns1:t>SmartRead Agent｜软件项目研发实践（3）</ns1:t>
+            </ns1:r>
+          </ns1:p>
+        </ns0:txBody>
+      </ns0:sp>
+      <ns0:sp>
+        <ns0:nvSpPr>
+          <ns0:cNvPr id="8" name="TextBox 7"/>
+          <ns0:cNvSpPr txBox="1"/>
+          <ns0:nvPr/>
+        </ns0:nvSpPr>
+        <ns0:spPr>
+          <ns1:xfrm>
+            <ns1:off x="9784080" y="6473952"/>
+            <ns1:ext cx="1920240" cy="228600"/>
+          </ns1:xfrm>
+          <ns1:prstGeom prst="rect">
+            <ns1:avLst/>
+          </ns1:prstGeom>
+          <ns1:noFill/>
+        </ns0:spPr>
+        <ns0:txBody>
+          <ns1:bodyPr wrap="square" lIns="18288" rIns="18288">
+            <ns1:spAutoFit/>
+          </ns1:bodyPr>
+          <ns1:lstStyle/>
+          <ns1:p>
+            <ns1:pPr algn="r"/>
+            <ns1:r>
+              <ns1:rPr sz="900" b="0">
+                <ns1:solidFill>
+                  <ns1:srgbClr val="64748B"/>
+                </ns1:solidFill>
+                <ns1:latin typeface="Microsoft YaHei"/>
+              </ns1:rPr>
+              <ns1:t>A03 组 林立洲 / 江轩宇</ns1:t>
+            </ns1:r>
+          </ns1:p>
+        </ns0:txBody>
+      </ns0:sp>
+      <ns0:sp>
+        <ns0:nvSpPr>
+          <ns0:cNvPr id="9" name="Rounded Rectangle 8"/>
+          <ns0:cNvSpPr/>
+          <ns0:nvPr/>
+        </ns0:nvSpPr>
+        <ns0:spPr>
+          <ns1:xfrm>
+            <ns1:off x="749808" y="1920240"/>
+            <ns1:ext cx="5257800" cy="2834640"/>
+          </ns1:xfrm>
+          <ns1:prstGeom prst="roundRect">
+            <ns1:avLst/>
+          </ns1:prstGeom>
+          <ns1:solidFill>
+            <ns1:srgbClr val="F0FDFA"/>
+          </ns1:solidFill>
+          <ns1:ln w="15240">
+            <ns1:solidFill>
+              <ns1:srgbClr val="5EEAD4"/>
+            </ns1:solidFill>
+          </ns1:ln>
+        </ns0:spPr>
+        <ns0:style>
+          <ns1:lnRef idx="1">
+            <ns1:schemeClr val="accent1"/>
+          </ns1:lnRef>
+          <ns1:fillRef idx="3">
+            <ns1:schemeClr val="accent1"/>
+          </ns1:fillRef>
+          <ns1:effectRef idx="2">
+            <ns1:schemeClr val="accent1"/>
+          </ns1:effectRef>
+          <ns1:fontRef idx="minor">
+            <ns1:schemeClr val="lt1"/>
+          </ns1:fontRef>
+        </ns0:style>
+        <ns0:txBody>
+          <ns1:bodyPr rtlCol="0" anchor="ctr"/>
+          <ns1:lstStyle/>
+          <ns1:p>
+            <ns1:pPr algn="ctr"/>
+          </ns1:p>
+        </ns0:txBody>
+      </ns0:sp>
+      <ns0:sp>
+        <ns0:nvSpPr>
+          <ns0:cNvPr id="10" name="TextBox 9"/>
+          <ns0:cNvSpPr txBox="1"/>
+          <ns0:nvPr/>
+        </ns0:nvSpPr>
+        <ns0:spPr>
+          <ns1:xfrm>
+            <ns1:off x="1024128" y="2194560"/>
+            <ns1:ext cx="4297680" cy="320040"/>
+          </ns1:xfrm>
+          <ns1:prstGeom prst="rect">
+            <ns1:avLst/>
+          </ns1:prstGeom>
+          <ns1:noFill/>
+        </ns0:spPr>
+        <ns0:txBody>
+          <ns1:bodyPr wrap="square" lIns="18288" rIns="18288">
+            <ns1:spAutoFit/>
+          </ns1:bodyPr>
+          <ns1:lstStyle/>
+          <ns1:p>
+            <ns1:pPr algn="l"/>
+            <ns1:r>
+              <ns1:rPr sz="2000" b="1">
+                <ns1:solidFill>
+                  <ns1:srgbClr val="047857"/>
+                </ns1:solidFill>
+                <ns1:latin typeface="Microsoft YaHei"/>
+              </ns1:rPr>
+              <ns1:t>已经完成</ns1:t>
+            </ns1:r>
+          </ns1:p>
+        </ns0:txBody>
+      </ns0:sp>
+      <ns0:sp>
+        <ns0:nvSpPr>
+          <ns0:cNvPr id="11" name="TextBox 10"/>
+          <ns0:cNvSpPr txBox="1"/>
+          <ns0:nvPr/>
+        </ns0:nvSpPr>
+        <ns0:spPr>
+          <ns1:xfrm>
+            <ns1:off x="1024128" y="2697480"/>
+            <ns1:ext cx="4434840" cy="1508760"/>
+          </ns1:xfrm>
+          <ns1:prstGeom prst="rect">
+            <ns1:avLst/>
+          </ns1:prstGeom>
+          <ns1:noFill/>
+        </ns0:spPr>
+        <ns0:txBody>
+          <ns1:bodyPr wrap="square" lIns="18288" rIns="18288" anchor="t">
+            <ns1:spAutoFit/>
+          </ns1:bodyPr>
+          <ns1:lstStyle/>
+          <ns1:p>
+            <ns1:pPr algn="l">
+              <ns1:spcAft>
+                <ns1:spcPts val="700"/>
+              </ns1:spcAft>
+              <ns1:defRPr sz="1400">
+                <ns1:solidFill>
+                  <ns1:srgbClr val="1E293B"/>
+                </ns1:solidFill>
+                <ns1:latin typeface="Microsoft YaHei"/>
+              </ns1:defRPr>
+            </ns1:pPr>
+            <ns1:r>
+              <ns1:t>• 完成 Android 端可运行 App</ns1:t>
+            </ns1:r>
+          </ns1:p>
+          <ns1:p>
+            <ns1:pPr>
+              <ns1:spcAft>
+                <ns1:spcPts val="700"/>
+              </ns1:spcAft>
+              <ns1:defRPr sz="1400">
+                <ns1:solidFill>
+                  <ns1:srgbClr val="1E293B"/>
+                </ns1:solidFill>
+                <ns1:latin typeface="Microsoft YaHei"/>
+              </ns1:defRPr>
+            </ns1:pPr>
+            <ns1:r>
+              <ns1:t>• 形成阅读分析、端侧 AI、问答复习、历史回看的闭环</ns1:t>
+            </ns1:r>
+          </ns1:p>
+          <ns1:p>
+            <ns1:pPr>
+              <ns1:spcAft>
+                <ns1:spcPts val="700"/>
+              </ns1:spcAft>
+              <ns1:defRPr sz="1400">
+                <ns1:solidFill>
+                  <ns1:srgbClr val="1E293B"/>
+                </ns1:solidFill>
+                <ns1:latin typeface="Microsoft YaHei"/>
+              </ns1:defRPr>
+            </ns1:pPr>
+            <ns1:r>
+              <ns1:t>• 完成 LiteRT 模型集成、APK 构建和材料归档</ns1:t>
+            </ns1:r>
+          </ns1:p>
+        </ns0:txBody>
+      </ns0:sp>
+      <ns0:sp>
+        <ns0:nvSpPr>
+          <ns0:cNvPr id="12" name="Rounded Rectangle 11"/>
+          <ns0:cNvSpPr/>
+          <ns0:nvPr/>
+        </ns0:nvSpPr>
+        <ns0:spPr>
+          <ns1:xfrm>
+            <ns1:off x="6400800" y="1920240"/>
+            <ns1:ext cx="4800600" cy="2834640"/>
+          </ns1:xfrm>
+          <ns1:prstGeom prst="roundRect">
+            <ns1:avLst/>
+          </ns1:prstGeom>
+          <ns1:solidFill>
+            <ns1:srgbClr val="FFFBEB"/>
+          </ns1:solidFill>
+          <ns1:ln w="15240">
+            <ns1:solidFill>
+              <ns1:srgbClr val="FCD34D"/>
+            </ns1:solidFill>
+          </ns1:ln>
+        </ns0:spPr>
+        <ns0:style>
+          <ns1:lnRef idx="1">
+            <ns1:schemeClr val="accent1"/>
+          </ns1:lnRef>
+          <ns1:fillRef idx="3">
+            <ns1:schemeClr val="accent1"/>
+          </ns1:fillRef>
+          <ns1:effectRef idx="2">
+            <ns1:schemeClr val="accent1"/>
+          </ns1:effectRef>
+          <ns1:fontRef idx="minor">
+            <ns1:schemeClr val="lt1"/>
+          </ns1:fontRef>
+        </ns0:style>
+        <ns0:txBody>
+          <ns1:bodyPr rtlCol="0" anchor="ctr"/>
+          <ns1:lstStyle/>
+          <ns1:p>
+            <ns1:pPr algn="ctr"/>
+          </ns1:p>
+        </ns0:txBody>
+      </ns0:sp>
+      <ns0:sp>
+        <ns0:nvSpPr>
+          <ns0:cNvPr id="13" name="TextBox 12"/>
+          <ns0:cNvSpPr txBox="1"/>
+          <ns0:nvPr/>
+        </ns0:nvSpPr>
+        <ns0:spPr>
+          <ns1:xfrm>
+            <ns1:off x="6675120" y="2194560"/>
+            <ns1:ext cx="3931920" cy="320040"/>
+          </ns1:xfrm>
+          <ns1:prstGeom prst="rect">
+            <ns1:avLst/>
+          </ns1:prstGeom>
+          <ns1:noFill/>
+        </ns0:spPr>
+        <ns0:txBody>
+          <ns1:bodyPr wrap="square" lIns="18288" rIns="18288">
+            <ns1:spAutoFit/>
+          </ns1:bodyPr>
+          <ns1:lstStyle/>
+          <ns1:p>
+            <ns1:pPr algn="l"/>
+            <ns1:r>
+              <ns1:rPr sz="2000" b="1">
+                <ns1:solidFill>
+                  <ns1:srgbClr val="D97706"/>
+                </ns1:solidFill>
+                <ns1:latin typeface="Microsoft YaHei"/>
+              </ns1:rPr>
+              <ns1:t>后续方向</ns1:t>
+            </ns1:r>
+          </ns1:p>
+        </ns0:txBody>
+      </ns0:sp>
+      <ns0:sp>
+        <ns0:nvSpPr>
+          <ns0:cNvPr id="14" name="TextBox 13"/>
+          <ns0:cNvSpPr txBox="1"/>
+          <ns0:nvPr/>
+        </ns0:nvSpPr>
+        <ns0:spPr>
+          <ns1:xfrm>
+            <ns1:off x="6675120" y="2697480"/>
+            <ns1:ext cx="3977639" cy="1508760"/>
+          </ns1:xfrm>
+          <ns1:prstGeom prst="rect">
+            <ns1:avLst/>
+          </ns1:prstGeom>
+          <ns1:noFill/>
+        </ns0:spPr>
+        <ns0:txBody>
+          <ns1:bodyPr wrap="square" lIns="18288" rIns="18288" anchor="t">
+            <ns1:spAutoFit/>
+          </ns1:bodyPr>
+          <ns1:lstStyle/>
+          <ns1:p>
+            <ns1:pPr algn="l">
+              <ns1:spcAft>
+                <ns1:spcPts val="700"/>
+              </ns1:spcAft>
+              <ns1:defRPr sz="1400">
+                <ns1:solidFill>
+                  <ns1:srgbClr val="1E293B"/>
+                </ns1:solidFill>
+                <ns1:latin typeface="Microsoft YaHei"/>
+              </ns1:defRPr>
+            </ns1:pPr>
+            <ns1:r>
+              <ns1:t>• 扩大训练数据并改进句子重要性模型</ns1:t>
+            </ns1:r>
+          </ns1:p>
+          <ns1:p>
+            <ns1:pPr>
+              <ns1:spcAft>
+                <ns1:spcPts val="700"/>
+              </ns1:spcAft>
+              <ns1:defRPr sz="1400">
+                <ns1:solidFill>
+                  <ns1:srgbClr val="1E293B"/>
+                </ns1:solidFill>
+                <ns1:latin typeface="Microsoft YaHei"/>
+              </ns1:defRPr>
+            </ns1:pPr>
+            <ns1:r>
+              <ns1:t>• 历史记录迁移到 Room 数据库</ns1:t>
+            </ns1:r>
+          </ns1:p>
+          <ns1:p>
+            <ns1:pPr>
+              <ns1:spcAft>
+                <ns1:spcPts val="700"/>
+              </ns1:spcAft>
+              <ns1:defRPr sz="1400">
+                <ns1:solidFill>
+                  <ns1:srgbClr val="1E293B"/>
+                </ns1:solidFill>
+                <ns1:latin typeface="Microsoft YaHei"/>
+              </ns1:defRPr>
+            </ns1:pPr>
+            <ns1:r>
+              <ns1:t>• 增加 OCR 导入和可选云端增强能力</ns1:t>
+            </ns1:r>
+          </ns1:p>
+        </ns0:txBody>
+      </ns0:sp>
+      <ns0:sp>
+        <ns0:nvSpPr>
+          <ns0:cNvPr id="15" name="TextBox 14"/>
+          <ns0:cNvSpPr txBox="1"/>
+          <ns0:nvPr/>
+        </ns0:nvSpPr>
+        <ns0:spPr>
+          <ns1:xfrm>
+            <ns1:off x="1828800" y="5349240"/>
+            <ns1:ext cx="8595360" cy="457200"/>
+          </ns1:xfrm>
+          <ns1:prstGeom prst="rect">
+            <ns1:avLst/>
+          </ns1:prstGeom>
+          <ns1:noFill/>
+        </ns0:spPr>
+        <ns0:txBody>
+          <ns1:bodyPr wrap="square" lIns="18288" rIns="18288">
+            <ns1:spAutoFit/>
+          </ns1:bodyPr>
+          <ns1:lstStyle/>
+          <ns1:p>
+            <ns1:pPr algn="ctr"/>
+            <ns1:r>
+              <ns1:rPr sz="2000" b="1">
+                <ns1:solidFill>
+                  <ns1:srgbClr val="0F172A"/>
+                </ns1:solidFill>
+                <ns1:latin typeface="Microsoft YaHei"/>
+              </ns1:rPr>
+              <ns1:t>SmartRead Agent V1.0 已形成可安装、可运行、可复查的课程项目交付。</ns1:t>
+            </ns1:r>
+          </ns1:p>
+        </ns0:txBody>
+      </ns0:sp>
+    </ns0:spTree>
+  </ns0:cSld>
+  <ns0:clrMapOvr>
+    <ns1:masterClrMapping/>
+  </ns0:clrMapOvr>
+</ns0:sld>
 </file>
 
 <file path=ppt/slides/slide2.xml><?xml version="1.0" encoding="utf-8"?>
@@ -13101,768 +13101,768 @@
 </file>
 
 <file path=ppt/slides/slide8.xml><?xml version="1.0" encoding="utf-8"?>
-<p:sld xmlns:a="http://schemas.openxmlformats.org/drawingml/2006/main" xmlns:p="http://schemas.openxmlformats.org/presentationml/2006/main" xmlns:r="http://schemas.openxmlformats.org/officeDocument/2006/relationships">
-  <p:cSld>
-    <p:bg>
-      <p:bgPr>
-        <a:solidFill>
-          <a:srgbClr val="F8FAFC"/>
-        </a:solidFill>
-        <a:effectLst/>
-      </p:bgPr>
-    </p:bg>
-    <p:spTree>
-      <p:nvGrpSpPr>
-        <p:cNvPr id="1" name=""/>
-        <p:cNvGrpSpPr/>
-        <p:nvPr/>
-      </p:nvGrpSpPr>
-      <p:grpSpPr/>
-      <p:sp>
-        <p:nvSpPr>
-          <p:cNvPr id="21" name="Rounded Rectangle 20"/>
-          <p:cNvSpPr/>
-          <p:nvPr/>
-        </p:nvSpPr>
-        <p:spPr>
-          <a:xfrm>
-            <a:off x="7946136" y="1839520"/>
-            <a:ext cx="3081528" cy="4596280"/>
-          </a:xfrm>
-          <a:prstGeom prst="roundRect">
-            <a:avLst/>
-          </a:prstGeom>
-          <a:solidFill>
-            <a:srgbClr val="FFFFFF"/>
-          </a:solidFill>
-          <a:ln w="15240">
-            <a:solidFill>
-              <a:srgbClr val="CBD5E1"/>
-            </a:solidFill>
-          </a:ln>
-        </p:spPr>
-        <p:style>
-          <a:lnRef idx="1">
-            <a:schemeClr val="accent1"/>
-          </a:lnRef>
-          <a:fillRef idx="3">
-            <a:schemeClr val="accent1"/>
-          </a:fillRef>
-          <a:effectRef idx="2">
-            <a:schemeClr val="accent1"/>
-          </a:effectRef>
-          <a:fontRef idx="minor">
-            <a:schemeClr val="lt1"/>
-          </a:fontRef>
-        </p:style>
-        <p:txBody>
-          <a:bodyPr rtlCol="0" anchor="ctr"/>
-          <a:lstStyle/>
-          <a:p>
-            <a:pPr algn="ctr"/>
-          </a:p>
-        </p:txBody>
-      </p:sp>
-      <p:sp>
-        <p:nvSpPr>
-          <p:cNvPr id="2" name="TextBox 1"/>
-          <p:cNvSpPr txBox="1"/>
-          <p:nvPr/>
-        </p:nvSpPr>
-        <p:spPr>
-          <a:xfrm>
-            <a:off x="502920" y="329184"/>
-            <a:ext cx="914400" cy="256032"/>
-          </a:xfrm>
-          <a:prstGeom prst="rect">
-            <a:avLst/>
-          </a:prstGeom>
-          <a:noFill/>
-        </p:spPr>
-        <p:txBody>
-          <a:bodyPr wrap="square" lIns="18288" rIns="18288">
-            <a:spAutoFit/>
-          </a:bodyPr>
-          <a:lstStyle/>
-          <a:p>
-            <a:pPr algn="l"/>
-            <a:r>
-              <a:rPr sz="1200" b="1">
-                <a:solidFill>
-                  <a:srgbClr val="1E40AF"/>
-                </a:solidFill>
-                <a:latin typeface="Microsoft YaHei"/>
-              </a:rPr>
-              <a:t>08</a:t>
-            </a:r>
-          </a:p>
-        </p:txBody>
-      </p:sp>
-      <p:sp>
-        <p:nvSpPr>
-          <p:cNvPr id="3" name="TextBox 2"/>
-          <p:cNvSpPr txBox="1"/>
-          <p:nvPr/>
-        </p:nvSpPr>
-        <p:spPr>
-          <a:xfrm>
-            <a:off x="1005840" y="283464"/>
-            <a:ext cx="2194560" cy="274320"/>
-          </a:xfrm>
-          <a:prstGeom prst="rect">
-            <a:avLst/>
-          </a:prstGeom>
-          <a:noFill/>
-        </p:spPr>
-        <p:txBody>
-          <a:bodyPr wrap="square" lIns="18288" rIns="18288">
-            <a:spAutoFit/>
-          </a:bodyPr>
-          <a:lstStyle/>
-          <a:p>
-            <a:pPr algn="l"/>
-            <a:r>
-              <a:rPr sz="1000" b="1">
-                <a:solidFill>
-                  <a:srgbClr val="64748B"/>
-                </a:solidFill>
-                <a:latin typeface="Microsoft YaHei"/>
-              </a:rPr>
-              <a:t>问答</a:t>
-            </a:r>
-          </a:p>
-        </p:txBody>
-      </p:sp>
-      <p:sp>
-        <p:nvSpPr>
-          <p:cNvPr id="4" name="TextBox 3"/>
-          <p:cNvSpPr txBox="1"/>
-          <p:nvPr/>
-        </p:nvSpPr>
-        <p:spPr>
-          <a:xfrm>
-            <a:off x="502920" y="685800"/>
-            <a:ext cx="7132320" cy="493776"/>
-          </a:xfrm>
-          <a:prstGeom prst="rect">
-            <a:avLst/>
-          </a:prstGeom>
-          <a:noFill/>
-        </p:spPr>
-        <p:txBody>
-          <a:bodyPr wrap="square" lIns="18288" rIns="18288">
-            <a:spAutoFit/>
-          </a:bodyPr>
-          <a:lstStyle/>
-          <a:p>
-            <a:pPr algn="l"/>
-            <a:r>
-              <a:rPr sz="2800" b="1">
-                <a:solidFill>
-                  <a:srgbClr val="0F172A"/>
-                </a:solidFill>
-                <a:latin typeface="Microsoft YaHei"/>
-              </a:rPr>
-              <a:t>Agent 问答设计</a:t>
-            </a:r>
-          </a:p>
-        </p:txBody>
-      </p:sp>
-      <p:sp>
-        <p:nvSpPr>
-          <p:cNvPr id="5" name="TextBox 4"/>
-          <p:cNvSpPr txBox="1"/>
-          <p:nvPr/>
-        </p:nvSpPr>
-        <p:spPr>
-          <a:xfrm>
-            <a:off x="521207" y="1170432"/>
-            <a:ext cx="7863840" cy="329184"/>
-          </a:xfrm>
-          <a:prstGeom prst="rect">
-            <a:avLst/>
-          </a:prstGeom>
-          <a:noFill/>
-        </p:spPr>
-        <p:txBody>
-          <a:bodyPr wrap="square" lIns="18288" rIns="18288">
-            <a:spAutoFit/>
-          </a:bodyPr>
-          <a:lstStyle/>
-          <a:p>
-            <a:pPr algn="l"/>
-            <a:r>
-              <a:rPr sz="1300" b="0">
-                <a:solidFill>
-                  <a:srgbClr val="64748B"/>
-                </a:solidFill>
-                <a:latin typeface="Microsoft YaHei"/>
-              </a:rPr>
-              <a:t>围绕当前文章分析结果回答，强调稳定、可解释、可复现</a:t>
-            </a:r>
-          </a:p>
-        </p:txBody>
-      </p:sp>
-      <p:cxnSp>
-        <p:nvCxnSpPr>
-          <p:cNvPr id="6" name="Connector 5"/>
-          <p:cNvCxnSpPr/>
-          <p:nvPr/>
-        </p:nvCxnSpPr>
-        <p:spPr>
-          <a:xfrm>
-            <a:off x="502920" y="1627632"/>
-            <a:ext cx="11183112" cy="0"/>
-          </a:xfrm>
-          <a:prstGeom prst="line">
-            <a:avLst/>
-          </a:prstGeom>
-          <a:ln>
-            <a:solidFill>
-              <a:srgbClr val="CBD5E1"/>
-            </a:solidFill>
-          </a:ln>
-        </p:spPr>
-        <p:style>
-          <a:lnRef idx="2">
-            <a:schemeClr val="accent1"/>
-          </a:lnRef>
-          <a:fillRef idx="0">
-            <a:schemeClr val="accent1"/>
-          </a:fillRef>
-          <a:effectRef idx="1">
-            <a:schemeClr val="accent1"/>
-          </a:effectRef>
-          <a:fontRef idx="minor">
-            <a:schemeClr val="tx1"/>
-          </a:fontRef>
-        </p:style>
-      </p:cxnSp>
-      <p:sp>
-        <p:nvSpPr>
-          <p:cNvPr id="7" name="TextBox 6"/>
-          <p:cNvSpPr txBox="1"/>
-          <p:nvPr/>
-        </p:nvSpPr>
-        <p:spPr>
-          <a:xfrm>
-            <a:off x="530352" y="6473952"/>
-            <a:ext cx="5486400" cy="228600"/>
-          </a:xfrm>
-          <a:prstGeom prst="rect">
-            <a:avLst/>
-          </a:prstGeom>
-          <a:noFill/>
-        </p:spPr>
-        <p:txBody>
-          <a:bodyPr wrap="square" lIns="18288" rIns="18288">
-            <a:spAutoFit/>
-          </a:bodyPr>
-          <a:lstStyle/>
-          <a:p>
-            <a:pPr algn="l"/>
-            <a:r>
-              <a:rPr sz="900" b="0">
-                <a:solidFill>
-                  <a:srgbClr val="64748B"/>
-                </a:solidFill>
-                <a:latin typeface="Microsoft YaHei"/>
-              </a:rPr>
-              <a:t>SmartRead Agent｜软件项目研发实践（3）</a:t>
-            </a:r>
-          </a:p>
-        </p:txBody>
-      </p:sp>
-      <p:sp>
-        <p:nvSpPr>
-          <p:cNvPr id="8" name="TextBox 7"/>
-          <p:cNvSpPr txBox="1"/>
-          <p:nvPr/>
-        </p:nvSpPr>
-        <p:spPr>
-          <a:xfrm>
-            <a:off x="9784080" y="6473952"/>
-            <a:ext cx="1920240" cy="228600"/>
-          </a:xfrm>
-          <a:prstGeom prst="rect">
-            <a:avLst/>
-          </a:prstGeom>
-          <a:noFill/>
-        </p:spPr>
-        <p:txBody>
-          <a:bodyPr wrap="square" lIns="18288" rIns="18288">
-            <a:spAutoFit/>
-          </a:bodyPr>
-          <a:lstStyle/>
-          <a:p>
-            <a:pPr algn="r"/>
-            <a:r>
-              <a:rPr sz="900" b="0">
-                <a:solidFill>
-                  <a:srgbClr val="64748B"/>
-                </a:solidFill>
-                <a:latin typeface="Microsoft YaHei"/>
-              </a:rPr>
-              <a:t>A03 组 林立洲 / 江轩宇</a:t>
-            </a:r>
-          </a:p>
-        </p:txBody>
-      </p:sp>
-      <p:sp>
-        <p:nvSpPr>
-          <p:cNvPr id="9" name="Rounded Rectangle 8"/>
-          <p:cNvSpPr/>
-          <p:nvPr/>
-        </p:nvSpPr>
-        <p:spPr>
-          <a:xfrm>
-            <a:off x="749808" y="1901952"/>
-            <a:ext cx="5989320" cy="932688"/>
-          </a:xfrm>
-          <a:prstGeom prst="roundRect">
-            <a:avLst/>
-          </a:prstGeom>
-          <a:solidFill>
-            <a:srgbClr val="FFFFFF"/>
-          </a:solidFill>
-          <a:ln w="15240">
-            <a:solidFill>
-              <a:srgbClr val="CBD5E1"/>
-            </a:solidFill>
-          </a:ln>
-        </p:spPr>
-        <p:style>
-          <a:lnRef idx="1">
-            <a:schemeClr val="accent1"/>
-          </a:lnRef>
-          <a:fillRef idx="3">
-            <a:schemeClr val="accent1"/>
-          </a:fillRef>
-          <a:effectRef idx="2">
-            <a:schemeClr val="accent1"/>
-          </a:effectRef>
-          <a:fontRef idx="minor">
-            <a:schemeClr val="lt1"/>
-          </a:fontRef>
-        </p:style>
-        <p:txBody>
-          <a:bodyPr rtlCol="0" anchor="ctr"/>
-          <a:lstStyle/>
-          <a:p>
-            <a:pPr algn="ctr"/>
-          </a:p>
-        </p:txBody>
-      </p:sp>
-      <p:sp>
-        <p:nvSpPr>
-          <p:cNvPr id="10" name="TextBox 9"/>
-          <p:cNvSpPr txBox="1"/>
-          <p:nvPr/>
-        </p:nvSpPr>
-        <p:spPr>
-          <a:xfrm>
-            <a:off x="987552" y="2057400"/>
-            <a:ext cx="1234440" cy="274320"/>
-          </a:xfrm>
-          <a:prstGeom prst="rect">
-            <a:avLst/>
-          </a:prstGeom>
-          <a:noFill/>
-        </p:spPr>
-        <p:txBody>
-          <a:bodyPr wrap="square" lIns="18288" rIns="18288">
-            <a:spAutoFit/>
-          </a:bodyPr>
-          <a:lstStyle/>
-          <a:p>
-            <a:pPr algn="l"/>
-            <a:r>
-              <a:rPr sz="1500" b="1">
-                <a:solidFill>
-                  <a:srgbClr val="047857"/>
-                </a:solidFill>
-                <a:latin typeface="Microsoft YaHei"/>
-              </a:rPr>
-              <a:t>输入来源</a:t>
-            </a:r>
-          </a:p>
-        </p:txBody>
-      </p:sp>
-      <p:sp>
-        <p:nvSpPr>
-          <p:cNvPr id="11" name="TextBox 10"/>
-          <p:cNvSpPr txBox="1"/>
-          <p:nvPr/>
-        </p:nvSpPr>
-        <p:spPr>
-          <a:xfrm>
-            <a:off x="2267712" y="2057400"/>
-            <a:ext cx="3886200" cy="384048"/>
-          </a:xfrm>
-          <a:prstGeom prst="rect">
-            <a:avLst/>
-          </a:prstGeom>
-          <a:noFill/>
-        </p:spPr>
-        <p:txBody>
-          <a:bodyPr wrap="square" lIns="18288" rIns="18288">
-            <a:spAutoFit/>
-          </a:bodyPr>
-          <a:lstStyle/>
-          <a:p>
-            <a:pPr algn="l"/>
-            <a:r>
-              <a:rPr sz="1150" b="0">
-                <a:solidFill>
-                  <a:srgbClr val="1E293B"/>
-                </a:solidFill>
-                <a:latin typeface="Microsoft YaHei"/>
-              </a:rPr>
-              <a:t>当前文章摘要、关键词、分点摘要、复习题和知识卡片。</a:t>
-            </a:r>
-          </a:p>
-        </p:txBody>
-      </p:sp>
-      <p:sp>
-        <p:nvSpPr>
-          <p:cNvPr id="12" name="Rounded Rectangle 11"/>
-          <p:cNvSpPr/>
-          <p:nvPr/>
-        </p:nvSpPr>
-        <p:spPr>
-          <a:xfrm>
-            <a:off x="749808" y="2999232"/>
-            <a:ext cx="5989320" cy="932688"/>
-          </a:xfrm>
-          <a:prstGeom prst="roundRect">
-            <a:avLst/>
-          </a:prstGeom>
-          <a:solidFill>
-            <a:srgbClr val="FFFFFF"/>
-          </a:solidFill>
-          <a:ln w="15240">
-            <a:solidFill>
-              <a:srgbClr val="CBD5E1"/>
-            </a:solidFill>
-          </a:ln>
-        </p:spPr>
-        <p:style>
-          <a:lnRef idx="1">
-            <a:schemeClr val="accent1"/>
-          </a:lnRef>
-          <a:fillRef idx="3">
-            <a:schemeClr val="accent1"/>
-          </a:fillRef>
-          <a:effectRef idx="2">
-            <a:schemeClr val="accent1"/>
-          </a:effectRef>
-          <a:fontRef idx="minor">
-            <a:schemeClr val="lt1"/>
-          </a:fontRef>
-        </p:style>
-        <p:txBody>
-          <a:bodyPr rtlCol="0" anchor="ctr"/>
-          <a:lstStyle/>
-          <a:p>
-            <a:pPr algn="ctr"/>
-          </a:p>
-        </p:txBody>
-      </p:sp>
-      <p:sp>
-        <p:nvSpPr>
-          <p:cNvPr id="13" name="TextBox 12"/>
-          <p:cNvSpPr txBox="1"/>
-          <p:nvPr/>
-        </p:nvSpPr>
-        <p:spPr>
-          <a:xfrm>
-            <a:off x="987552" y="3154680"/>
-            <a:ext cx="1234440" cy="274320"/>
-          </a:xfrm>
-          <a:prstGeom prst="rect">
-            <a:avLst/>
-          </a:prstGeom>
-          <a:noFill/>
-        </p:spPr>
-        <p:txBody>
-          <a:bodyPr wrap="square" lIns="18288" rIns="18288">
-            <a:spAutoFit/>
-          </a:bodyPr>
-          <a:lstStyle/>
-          <a:p>
-            <a:pPr algn="l"/>
-            <a:r>
-              <a:rPr sz="1500" b="1">
-                <a:solidFill>
-                  <a:srgbClr val="047857"/>
-                </a:solidFill>
-                <a:latin typeface="Microsoft YaHei"/>
-              </a:rPr>
-              <a:t>意图识别</a:t>
-            </a:r>
-          </a:p>
-        </p:txBody>
-      </p:sp>
-      <p:sp>
-        <p:nvSpPr>
-          <p:cNvPr id="14" name="TextBox 13"/>
-          <p:cNvSpPr txBox="1"/>
-          <p:nvPr/>
-        </p:nvSpPr>
-        <p:spPr>
-          <a:xfrm>
-            <a:off x="2267712" y="3154680"/>
-            <a:ext cx="3886200" cy="384048"/>
-          </a:xfrm>
-          <a:prstGeom prst="rect">
-            <a:avLst/>
-          </a:prstGeom>
-          <a:noFill/>
-        </p:spPr>
-        <p:txBody>
-          <a:bodyPr wrap="square" lIns="18288" rIns="18288">
-            <a:spAutoFit/>
-          </a:bodyPr>
-          <a:lstStyle/>
-          <a:p>
-            <a:pPr algn="l"/>
-            <a:r>
-              <a:rPr sz="1150" b="0">
-                <a:solidFill>
-                  <a:srgbClr val="1E293B"/>
-                </a:solidFill>
-                <a:latin typeface="Microsoft YaHei"/>
-              </a:rPr>
-              <a:t>区分概括、关键词、复习重点、复习题、卡片提示等问题类型。</a:t>
-            </a:r>
-          </a:p>
-        </p:txBody>
-      </p:sp>
-      <p:sp>
-        <p:nvSpPr>
-          <p:cNvPr id="15" name="Rounded Rectangle 14"/>
-          <p:cNvSpPr/>
-          <p:nvPr/>
-        </p:nvSpPr>
-        <p:spPr>
-          <a:xfrm>
-            <a:off x="749808" y="4096512"/>
-            <a:ext cx="5989320" cy="932688"/>
-          </a:xfrm>
-          <a:prstGeom prst="roundRect">
-            <a:avLst/>
-          </a:prstGeom>
-          <a:solidFill>
-            <a:srgbClr val="FFFFFF"/>
-          </a:solidFill>
-          <a:ln w="15240">
-            <a:solidFill>
-              <a:srgbClr val="CBD5E1"/>
-            </a:solidFill>
-          </a:ln>
-        </p:spPr>
-        <p:style>
-          <a:lnRef idx="1">
-            <a:schemeClr val="accent1"/>
-          </a:lnRef>
-          <a:fillRef idx="3">
-            <a:schemeClr val="accent1"/>
-          </a:fillRef>
-          <a:effectRef idx="2">
-            <a:schemeClr val="accent1"/>
-          </a:effectRef>
-          <a:fontRef idx="minor">
-            <a:schemeClr val="lt1"/>
-          </a:fontRef>
-        </p:style>
-        <p:txBody>
-          <a:bodyPr rtlCol="0" anchor="ctr"/>
-          <a:lstStyle/>
-          <a:p>
-            <a:pPr algn="ctr"/>
-          </a:p>
-        </p:txBody>
-      </p:sp>
-      <p:sp>
-        <p:nvSpPr>
-          <p:cNvPr id="16" name="TextBox 15"/>
-          <p:cNvSpPr txBox="1"/>
-          <p:nvPr/>
-        </p:nvSpPr>
-        <p:spPr>
-          <a:xfrm>
-            <a:off x="987552" y="4251960"/>
-            <a:ext cx="1234440" cy="274320"/>
-          </a:xfrm>
-          <a:prstGeom prst="rect">
-            <a:avLst/>
-          </a:prstGeom>
-          <a:noFill/>
-        </p:spPr>
-        <p:txBody>
-          <a:bodyPr wrap="square" lIns="18288" rIns="18288">
-            <a:spAutoFit/>
-          </a:bodyPr>
-          <a:lstStyle/>
-          <a:p>
-            <a:pPr algn="l"/>
-            <a:r>
-              <a:rPr sz="1500" b="1">
-                <a:solidFill>
-                  <a:srgbClr val="047857"/>
-                </a:solidFill>
-                <a:latin typeface="Microsoft YaHei"/>
-              </a:rPr>
-              <a:t>回答方式</a:t>
-            </a:r>
-          </a:p>
-        </p:txBody>
-      </p:sp>
-      <p:sp>
-        <p:nvSpPr>
-          <p:cNvPr id="17" name="TextBox 16"/>
-          <p:cNvSpPr txBox="1"/>
-          <p:nvPr/>
-        </p:nvSpPr>
-        <p:spPr>
-          <a:xfrm>
-            <a:off x="2267712" y="4251960"/>
-            <a:ext cx="3886200" cy="384048"/>
-          </a:xfrm>
-          <a:prstGeom prst="rect">
-            <a:avLst/>
-          </a:prstGeom>
-          <a:noFill/>
-        </p:spPr>
-        <p:txBody>
-          <a:bodyPr wrap="square" lIns="18288" rIns="18288">
-            <a:spAutoFit/>
-          </a:bodyPr>
-          <a:lstStyle/>
-          <a:p>
-            <a:pPr algn="l"/>
-            <a:r>
-              <a:rPr sz="1150" b="0">
-                <a:solidFill>
-                  <a:srgbClr val="1E293B"/>
-                </a:solidFill>
-                <a:latin typeface="Microsoft YaHei"/>
-              </a:rPr>
-              <a:t>使用本地规则组织答案，不依赖外部大模型接口。</a:t>
-            </a:r>
-          </a:p>
-        </p:txBody>
-      </p:sp>
-      <p:sp>
-        <p:nvSpPr>
-          <p:cNvPr id="18" name="Rounded Rectangle 17"/>
-          <p:cNvSpPr/>
-          <p:nvPr/>
-        </p:nvSpPr>
-        <p:spPr>
-          <a:xfrm>
-            <a:off x="749808" y="5321808"/>
-            <a:ext cx="5989320" cy="566928"/>
-          </a:xfrm>
-          <a:prstGeom prst="roundRect">
-            <a:avLst/>
-          </a:prstGeom>
-          <a:solidFill>
-            <a:srgbClr val="F0FDFA"/>
-          </a:solidFill>
-          <a:ln w="15240">
-            <a:solidFill>
-              <a:srgbClr val="5EEAD4"/>
-            </a:solidFill>
-          </a:ln>
-        </p:spPr>
-        <p:style>
-          <a:lnRef idx="1">
-            <a:schemeClr val="accent1"/>
-          </a:lnRef>
-          <a:fillRef idx="3">
-            <a:schemeClr val="accent1"/>
-          </a:fillRef>
-          <a:effectRef idx="2">
-            <a:schemeClr val="accent1"/>
-          </a:effectRef>
-          <a:fontRef idx="minor">
-            <a:schemeClr val="lt1"/>
-          </a:fontRef>
-        </p:style>
-        <p:txBody>
-          <a:bodyPr rtlCol="0" anchor="ctr"/>
-          <a:lstStyle/>
-          <a:p>
-            <a:pPr algn="ctr"/>
-          </a:p>
-        </p:txBody>
-      </p:sp>
-      <p:sp>
-        <p:nvSpPr>
-          <p:cNvPr id="19" name="TextBox 18"/>
-          <p:cNvSpPr txBox="1"/>
-          <p:nvPr/>
-        </p:nvSpPr>
-        <p:spPr>
-          <a:xfrm>
-            <a:off x="987552" y="5468112"/>
-            <a:ext cx="5440680" cy="219456"/>
-          </a:xfrm>
-          <a:prstGeom prst="rect">
-            <a:avLst/>
-          </a:prstGeom>
-          <a:noFill/>
-        </p:spPr>
-        <p:txBody>
-          <a:bodyPr wrap="square" lIns="18288" rIns="18288">
-            <a:spAutoFit/>
-          </a:bodyPr>
-          <a:lstStyle/>
-          <a:p>
-            <a:pPr algn="l"/>
-            <a:r>
-              <a:rPr sz="1200" b="0">
-                <a:solidFill>
-                  <a:srgbClr val="047857"/>
-                </a:solidFill>
-                <a:latin typeface="Microsoft YaHei"/>
-              </a:rPr>
-              <a:t>课堂汇报口径：这是围绕文章内容的本地阅读 Agent，不做泛聊天。</a:t>
-            </a:r>
-          </a:p>
-        </p:txBody>
-      </p:sp>
-      <p:pic>
-        <p:nvPicPr>
-          <p:cNvPr id="20" name="Picture 19" descr="agent_focus.png"/>
-          <p:cNvPicPr>
-            <a:picLocks noChangeAspect="1"/>
-          </p:cNvPicPr>
-          <p:nvPr/>
-        </p:nvPicPr>
-        <p:blipFill>
-          <a:blip r:embed="rId2"/>
-          <a:stretch>
-            <a:fillRect/>
-          </a:stretch>
-        </p:blipFill>
-        <p:spPr>
-          <a:xfrm>
-            <a:off x="8001000" y="1894384"/>
-            <a:ext cx="2971800" cy="4486552"/>
-          </a:xfrm>
-          <a:prstGeom prst="rect">
-            <a:avLst/>
-          </a:prstGeom>
-        </p:spPr>
-      </p:pic>
-    </p:spTree>
-  </p:cSld>
-  <p:clrMapOvr>
-    <a:masterClrMapping/>
-  </p:clrMapOvr>
-</p:sld>
+<ns0:sld xmlns:ns0="http://schemas.openxmlformats.org/presentationml/2006/main" xmlns:ns1="http://schemas.openxmlformats.org/drawingml/2006/main" xmlns:ns2="http://schemas.openxmlformats.org/officeDocument/2006/relationships">
+  <ns0:cSld>
+    <ns0:bg>
+      <ns0:bgPr>
+        <ns1:solidFill>
+          <ns1:srgbClr val="F8FAFC"/>
+        </ns1:solidFill>
+        <ns1:effectLst/>
+      </ns0:bgPr>
+    </ns0:bg>
+    <ns0:spTree>
+      <ns0:nvGrpSpPr>
+        <ns0:cNvPr id="1" name=""/>
+        <ns0:cNvGrpSpPr/>
+        <ns0:nvPr/>
+      </ns0:nvGrpSpPr>
+      <ns0:grpSpPr/>
+      <ns0:sp>
+        <ns0:nvSpPr>
+          <ns0:cNvPr id="21" name="Rounded Rectangle 20"/>
+          <ns0:cNvSpPr/>
+          <ns0:nvPr/>
+        </ns0:nvSpPr>
+        <ns0:spPr>
+          <ns1:xfrm>
+            <ns1:off x="7946136" y="1839520"/>
+            <ns1:ext cx="3081528" cy="4596280"/>
+          </ns1:xfrm>
+          <ns1:prstGeom prst="roundRect">
+            <ns1:avLst/>
+          </ns1:prstGeom>
+          <ns1:solidFill>
+            <ns1:srgbClr val="FFFFFF"/>
+          </ns1:solidFill>
+          <ns1:ln w="15240">
+            <ns1:solidFill>
+              <ns1:srgbClr val="CBD5E1"/>
+            </ns1:solidFill>
+          </ns1:ln>
+        </ns0:spPr>
+        <ns0:style>
+          <ns1:lnRef idx="1">
+            <ns1:schemeClr val="accent1"/>
+          </ns1:lnRef>
+          <ns1:fillRef idx="3">
+            <ns1:schemeClr val="accent1"/>
+          </ns1:fillRef>
+          <ns1:effectRef idx="2">
+            <ns1:schemeClr val="accent1"/>
+          </ns1:effectRef>
+          <ns1:fontRef idx="minor">
+            <ns1:schemeClr val="lt1"/>
+          </ns1:fontRef>
+        </ns0:style>
+        <ns0:txBody>
+          <ns1:bodyPr rtlCol="0" anchor="ctr"/>
+          <ns1:lstStyle/>
+          <ns1:p>
+            <ns1:pPr algn="ctr"/>
+          </ns1:p>
+        </ns0:txBody>
+      </ns0:sp>
+      <ns0:sp>
+        <ns0:nvSpPr>
+          <ns0:cNvPr id="2" name="TextBox 1"/>
+          <ns0:cNvSpPr txBox="1"/>
+          <ns0:nvPr/>
+        </ns0:nvSpPr>
+        <ns0:spPr>
+          <ns1:xfrm>
+            <ns1:off x="502920" y="329184"/>
+            <ns1:ext cx="914400" cy="256032"/>
+          </ns1:xfrm>
+          <ns1:prstGeom prst="rect">
+            <ns1:avLst/>
+          </ns1:prstGeom>
+          <ns1:noFill/>
+        </ns0:spPr>
+        <ns0:txBody>
+          <ns1:bodyPr wrap="square" lIns="18288" rIns="18288">
+            <ns1:spAutoFit/>
+          </ns1:bodyPr>
+          <ns1:lstStyle/>
+          <ns1:p>
+            <ns1:pPr algn="l"/>
+            <ns1:r>
+              <ns1:rPr sz="1200" b="1">
+                <ns1:solidFill>
+                  <ns1:srgbClr val="1E40AF"/>
+                </ns1:solidFill>
+                <ns1:latin typeface="Microsoft YaHei"/>
+              </ns1:rPr>
+              <ns1:t>08</ns1:t>
+            </ns1:r>
+          </ns1:p>
+        </ns0:txBody>
+      </ns0:sp>
+      <ns0:sp>
+        <ns0:nvSpPr>
+          <ns0:cNvPr id="3" name="TextBox 2"/>
+          <ns0:cNvSpPr txBox="1"/>
+          <ns0:nvPr/>
+        </ns0:nvSpPr>
+        <ns0:spPr>
+          <ns1:xfrm>
+            <ns1:off x="1005840" y="283464"/>
+            <ns1:ext cx="2194560" cy="274320"/>
+          </ns1:xfrm>
+          <ns1:prstGeom prst="rect">
+            <ns1:avLst/>
+          </ns1:prstGeom>
+          <ns1:noFill/>
+        </ns0:spPr>
+        <ns0:txBody>
+          <ns1:bodyPr wrap="square" lIns="18288" rIns="18288">
+            <ns1:spAutoFit/>
+          </ns1:bodyPr>
+          <ns1:lstStyle/>
+          <ns1:p>
+            <ns1:pPr algn="l"/>
+            <ns1:r>
+              <ns1:rPr sz="1000" b="1">
+                <ns1:solidFill>
+                  <ns1:srgbClr val="64748B"/>
+                </ns1:solidFill>
+                <ns1:latin typeface="Microsoft YaHei"/>
+              </ns1:rPr>
+              <ns1:t>问答</ns1:t>
+            </ns1:r>
+          </ns1:p>
+        </ns0:txBody>
+      </ns0:sp>
+      <ns0:sp>
+        <ns0:nvSpPr>
+          <ns0:cNvPr id="4" name="TextBox 3"/>
+          <ns0:cNvSpPr txBox="1"/>
+          <ns0:nvPr/>
+        </ns0:nvSpPr>
+        <ns0:spPr>
+          <ns1:xfrm>
+            <ns1:off x="502920" y="685800"/>
+            <ns1:ext cx="7132320" cy="493776"/>
+          </ns1:xfrm>
+          <ns1:prstGeom prst="rect">
+            <ns1:avLst/>
+          </ns1:prstGeom>
+          <ns1:noFill/>
+        </ns0:spPr>
+        <ns0:txBody>
+          <ns1:bodyPr wrap="square" lIns="18288" rIns="18288">
+            <ns1:spAutoFit/>
+          </ns1:bodyPr>
+          <ns1:lstStyle/>
+          <ns1:p>
+            <ns1:pPr algn="l"/>
+            <ns1:r>
+              <ns1:rPr sz="2800" b="1">
+                <ns1:solidFill>
+                  <ns1:srgbClr val="0F172A"/>
+                </ns1:solidFill>
+                <ns1:latin typeface="Microsoft YaHei"/>
+              </ns1:rPr>
+              <ns1:t>Agent 问答设计</ns1:t>
+            </ns1:r>
+          </ns1:p>
+        </ns0:txBody>
+      </ns0:sp>
+      <ns0:sp>
+        <ns0:nvSpPr>
+          <ns0:cNvPr id="5" name="TextBox 4"/>
+          <ns0:cNvSpPr txBox="1"/>
+          <ns0:nvPr/>
+        </ns0:nvSpPr>
+        <ns0:spPr>
+          <ns1:xfrm>
+            <ns1:off x="521207" y="1170432"/>
+            <ns1:ext cx="7863840" cy="329184"/>
+          </ns1:xfrm>
+          <ns1:prstGeom prst="rect">
+            <ns1:avLst/>
+          </ns1:prstGeom>
+          <ns1:noFill/>
+        </ns0:spPr>
+        <ns0:txBody>
+          <ns1:bodyPr wrap="square" lIns="18288" rIns="18288">
+            <ns1:spAutoFit/>
+          </ns1:bodyPr>
+          <ns1:lstStyle/>
+          <ns1:p>
+            <ns1:pPr algn="l"/>
+            <ns1:r>
+              <ns1:rPr sz="1300" b="0">
+                <ns1:solidFill>
+                  <ns1:srgbClr val="64748B"/>
+                </ns1:solidFill>
+                <ns1:latin typeface="Microsoft YaHei"/>
+              </ns1:rPr>
+              <ns1:t>围绕当前文章分析结果回答，强调稳定、可解释、可复现</ns1:t>
+            </ns1:r>
+          </ns1:p>
+        </ns0:txBody>
+      </ns0:sp>
+      <ns0:cxnSp>
+        <ns0:nvCxnSpPr>
+          <ns0:cNvPr id="6" name="Connector 5"/>
+          <ns0:cNvCxnSpPr/>
+          <ns0:nvPr/>
+        </ns0:nvCxnSpPr>
+        <ns0:spPr>
+          <ns1:xfrm>
+            <ns1:off x="502920" y="1627632"/>
+            <ns1:ext cx="11183112" cy="0"/>
+          </ns1:xfrm>
+          <ns1:prstGeom prst="line">
+            <ns1:avLst/>
+          </ns1:prstGeom>
+          <ns1:ln>
+            <ns1:solidFill>
+              <ns1:srgbClr val="CBD5E1"/>
+            </ns1:solidFill>
+          </ns1:ln>
+        </ns0:spPr>
+        <ns0:style>
+          <ns1:lnRef idx="2">
+            <ns1:schemeClr val="accent1"/>
+          </ns1:lnRef>
+          <ns1:fillRef idx="0">
+            <ns1:schemeClr val="accent1"/>
+          </ns1:fillRef>
+          <ns1:effectRef idx="1">
+            <ns1:schemeClr val="accent1"/>
+          </ns1:effectRef>
+          <ns1:fontRef idx="minor">
+            <ns1:schemeClr val="tx1"/>
+          </ns1:fontRef>
+        </ns0:style>
+      </ns0:cxnSp>
+      <ns0:sp>
+        <ns0:nvSpPr>
+          <ns0:cNvPr id="7" name="TextBox 6"/>
+          <ns0:cNvSpPr txBox="1"/>
+          <ns0:nvPr/>
+        </ns0:nvSpPr>
+        <ns0:spPr>
+          <ns1:xfrm>
+            <ns1:off x="530352" y="6473952"/>
+            <ns1:ext cx="5486400" cy="228600"/>
+          </ns1:xfrm>
+          <ns1:prstGeom prst="rect">
+            <ns1:avLst/>
+          </ns1:prstGeom>
+          <ns1:noFill/>
+        </ns0:spPr>
+        <ns0:txBody>
+          <ns1:bodyPr wrap="square" lIns="18288" rIns="18288">
+            <ns1:spAutoFit/>
+          </ns1:bodyPr>
+          <ns1:lstStyle/>
+          <ns1:p>
+            <ns1:pPr algn="l"/>
+            <ns1:r>
+              <ns1:rPr sz="900" b="0">
+                <ns1:solidFill>
+                  <ns1:srgbClr val="64748B"/>
+                </ns1:solidFill>
+                <ns1:latin typeface="Microsoft YaHei"/>
+              </ns1:rPr>
+              <ns1:t>SmartRead Agent｜软件项目研发实践（3）</ns1:t>
+            </ns1:r>
+          </ns1:p>
+        </ns0:txBody>
+      </ns0:sp>
+      <ns0:sp>
+        <ns0:nvSpPr>
+          <ns0:cNvPr id="8" name="TextBox 7"/>
+          <ns0:cNvSpPr txBox="1"/>
+          <ns0:nvPr/>
+        </ns0:nvSpPr>
+        <ns0:spPr>
+          <ns1:xfrm>
+            <ns1:off x="9784080" y="6473952"/>
+            <ns1:ext cx="1920240" cy="228600"/>
+          </ns1:xfrm>
+          <ns1:prstGeom prst="rect">
+            <ns1:avLst/>
+          </ns1:prstGeom>
+          <ns1:noFill/>
+        </ns0:spPr>
+        <ns0:txBody>
+          <ns1:bodyPr wrap="square" lIns="18288" rIns="18288">
+            <ns1:spAutoFit/>
+          </ns1:bodyPr>
+          <ns1:lstStyle/>
+          <ns1:p>
+            <ns1:pPr algn="r"/>
+            <ns1:r>
+              <ns1:rPr sz="900" b="0">
+                <ns1:solidFill>
+                  <ns1:srgbClr val="64748B"/>
+                </ns1:solidFill>
+                <ns1:latin typeface="Microsoft YaHei"/>
+              </ns1:rPr>
+              <ns1:t>A03 组 林立洲 / 江轩宇</ns1:t>
+            </ns1:r>
+          </ns1:p>
+        </ns0:txBody>
+      </ns0:sp>
+      <ns0:sp>
+        <ns0:nvSpPr>
+          <ns0:cNvPr id="9" name="Rounded Rectangle 8"/>
+          <ns0:cNvSpPr/>
+          <ns0:nvPr/>
+        </ns0:nvSpPr>
+        <ns0:spPr>
+          <ns1:xfrm>
+            <ns1:off x="749808" y="1901952"/>
+            <ns1:ext cx="5989320" cy="932688"/>
+          </ns1:xfrm>
+          <ns1:prstGeom prst="roundRect">
+            <ns1:avLst/>
+          </ns1:prstGeom>
+          <ns1:solidFill>
+            <ns1:srgbClr val="FFFFFF"/>
+          </ns1:solidFill>
+          <ns1:ln w="15240">
+            <ns1:solidFill>
+              <ns1:srgbClr val="CBD5E1"/>
+            </ns1:solidFill>
+          </ns1:ln>
+        </ns0:spPr>
+        <ns0:style>
+          <ns1:lnRef idx="1">
+            <ns1:schemeClr val="accent1"/>
+          </ns1:lnRef>
+          <ns1:fillRef idx="3">
+            <ns1:schemeClr val="accent1"/>
+          </ns1:fillRef>
+          <ns1:effectRef idx="2">
+            <ns1:schemeClr val="accent1"/>
+          </ns1:effectRef>
+          <ns1:fontRef idx="minor">
+            <ns1:schemeClr val="lt1"/>
+          </ns1:fontRef>
+        </ns0:style>
+        <ns0:txBody>
+          <ns1:bodyPr rtlCol="0" anchor="ctr"/>
+          <ns1:lstStyle/>
+          <ns1:p>
+            <ns1:pPr algn="ctr"/>
+          </ns1:p>
+        </ns0:txBody>
+      </ns0:sp>
+      <ns0:sp>
+        <ns0:nvSpPr>
+          <ns0:cNvPr id="10" name="TextBox 9"/>
+          <ns0:cNvSpPr txBox="1"/>
+          <ns0:nvPr/>
+        </ns0:nvSpPr>
+        <ns0:spPr>
+          <ns1:xfrm>
+            <ns1:off x="987552" y="2057400"/>
+            <ns1:ext cx="1234440" cy="274320"/>
+          </ns1:xfrm>
+          <ns1:prstGeom prst="rect">
+            <ns1:avLst/>
+          </ns1:prstGeom>
+          <ns1:noFill/>
+        </ns0:spPr>
+        <ns0:txBody>
+          <ns1:bodyPr wrap="square" lIns="18288" rIns="18288">
+            <ns1:spAutoFit/>
+          </ns1:bodyPr>
+          <ns1:lstStyle/>
+          <ns1:p>
+            <ns1:pPr algn="l"/>
+            <ns1:r>
+              <ns1:rPr sz="1500" b="1">
+                <ns1:solidFill>
+                  <ns1:srgbClr val="047857"/>
+                </ns1:solidFill>
+                <ns1:latin typeface="Microsoft YaHei"/>
+              </ns1:rPr>
+              <ns1:t>输入来源</ns1:t>
+            </ns1:r>
+          </ns1:p>
+        </ns0:txBody>
+      </ns0:sp>
+      <ns0:sp>
+        <ns0:nvSpPr>
+          <ns0:cNvPr id="11" name="TextBox 10"/>
+          <ns0:cNvSpPr txBox="1"/>
+          <ns0:nvPr/>
+        </ns0:nvSpPr>
+        <ns0:spPr>
+          <ns1:xfrm>
+            <ns1:off x="2267712" y="2057400"/>
+            <ns1:ext cx="3886200" cy="384048"/>
+          </ns1:xfrm>
+          <ns1:prstGeom prst="rect">
+            <ns1:avLst/>
+          </ns1:prstGeom>
+          <ns1:noFill/>
+        </ns0:spPr>
+        <ns0:txBody>
+          <ns1:bodyPr wrap="square" lIns="18288" rIns="18288">
+            <ns1:spAutoFit/>
+          </ns1:bodyPr>
+          <ns1:lstStyle/>
+          <ns1:p>
+            <ns1:pPr algn="l"/>
+            <ns1:r>
+              <ns1:rPr sz="1150" b="0">
+                <ns1:solidFill>
+                  <ns1:srgbClr val="1E293B"/>
+                </ns1:solidFill>
+                <ns1:latin typeface="Microsoft YaHei"/>
+              </ns1:rPr>
+              <ns1:t>当前文章摘要、关键词、分点摘要、复习题和知识卡片。</ns1:t>
+            </ns1:r>
+          </ns1:p>
+        </ns0:txBody>
+      </ns0:sp>
+      <ns0:sp>
+        <ns0:nvSpPr>
+          <ns0:cNvPr id="12" name="Rounded Rectangle 11"/>
+          <ns0:cNvSpPr/>
+          <ns0:nvPr/>
+        </ns0:nvSpPr>
+        <ns0:spPr>
+          <ns1:xfrm>
+            <ns1:off x="749808" y="2999232"/>
+            <ns1:ext cx="5989320" cy="932688"/>
+          </ns1:xfrm>
+          <ns1:prstGeom prst="roundRect">
+            <ns1:avLst/>
+          </ns1:prstGeom>
+          <ns1:solidFill>
+            <ns1:srgbClr val="FFFFFF"/>
+          </ns1:solidFill>
+          <ns1:ln w="15240">
+            <ns1:solidFill>
+              <ns1:srgbClr val="CBD5E1"/>
+            </ns1:solidFill>
+          </ns1:ln>
+        </ns0:spPr>
+        <ns0:style>
+          <ns1:lnRef idx="1">
+            <ns1:schemeClr val="accent1"/>
+          </ns1:lnRef>
+          <ns1:fillRef idx="3">
+            <ns1:schemeClr val="accent1"/>
+          </ns1:fillRef>
+          <ns1:effectRef idx="2">
+            <ns1:schemeClr val="accent1"/>
+          </ns1:effectRef>
+          <ns1:fontRef idx="minor">
+            <ns1:schemeClr val="lt1"/>
+          </ns1:fontRef>
+        </ns0:style>
+        <ns0:txBody>
+          <ns1:bodyPr rtlCol="0" anchor="ctr"/>
+          <ns1:lstStyle/>
+          <ns1:p>
+            <ns1:pPr algn="ctr"/>
+          </ns1:p>
+        </ns0:txBody>
+      </ns0:sp>
+      <ns0:sp>
+        <ns0:nvSpPr>
+          <ns0:cNvPr id="13" name="TextBox 12"/>
+          <ns0:cNvSpPr txBox="1"/>
+          <ns0:nvPr/>
+        </ns0:nvSpPr>
+        <ns0:spPr>
+          <ns1:xfrm>
+            <ns1:off x="987552" y="3154680"/>
+            <ns1:ext cx="1234440" cy="274320"/>
+          </ns1:xfrm>
+          <ns1:prstGeom prst="rect">
+            <ns1:avLst/>
+          </ns1:prstGeom>
+          <ns1:noFill/>
+        </ns0:spPr>
+        <ns0:txBody>
+          <ns1:bodyPr wrap="square" lIns="18288" rIns="18288">
+            <ns1:spAutoFit/>
+          </ns1:bodyPr>
+          <ns1:lstStyle/>
+          <ns1:p>
+            <ns1:pPr algn="l"/>
+            <ns1:r>
+              <ns1:rPr sz="1500" b="1">
+                <ns1:solidFill>
+                  <ns1:srgbClr val="047857"/>
+                </ns1:solidFill>
+                <ns1:latin typeface="Microsoft YaHei"/>
+              </ns1:rPr>
+              <ns1:t>意图识别</ns1:t>
+            </ns1:r>
+          </ns1:p>
+        </ns0:txBody>
+      </ns0:sp>
+      <ns0:sp>
+        <ns0:nvSpPr>
+          <ns0:cNvPr id="14" name="TextBox 13"/>
+          <ns0:cNvSpPr txBox="1"/>
+          <ns0:nvPr/>
+        </ns0:nvSpPr>
+        <ns0:spPr>
+          <ns1:xfrm>
+            <ns1:off x="2267712" y="3154680"/>
+            <ns1:ext cx="3886200" cy="384048"/>
+          </ns1:xfrm>
+          <ns1:prstGeom prst="rect">
+            <ns1:avLst/>
+          </ns1:prstGeom>
+          <ns1:noFill/>
+        </ns0:spPr>
+        <ns0:txBody>
+          <ns1:bodyPr wrap="square" lIns="18288" rIns="18288">
+            <ns1:spAutoFit/>
+          </ns1:bodyPr>
+          <ns1:lstStyle/>
+          <ns1:p>
+            <ns1:pPr algn="l"/>
+            <ns1:r>
+              <ns1:rPr sz="1150" b="0">
+                <ns1:solidFill>
+                  <ns1:srgbClr val="1E293B"/>
+                </ns1:solidFill>
+                <ns1:latin typeface="Microsoft YaHei"/>
+              </ns1:rPr>
+              <ns1:t>区分概括、关键词、复习重点、复习题、卡片提示等问题类型。</ns1:t>
+            </ns1:r>
+          </ns1:p>
+        </ns0:txBody>
+      </ns0:sp>
+      <ns0:sp>
+        <ns0:nvSpPr>
+          <ns0:cNvPr id="15" name="Rounded Rectangle 14"/>
+          <ns0:cNvSpPr/>
+          <ns0:nvPr/>
+        </ns0:nvSpPr>
+        <ns0:spPr>
+          <ns1:xfrm>
+            <ns1:off x="749808" y="4096512"/>
+            <ns1:ext cx="5989320" cy="932688"/>
+          </ns1:xfrm>
+          <ns1:prstGeom prst="roundRect">
+            <ns1:avLst/>
+          </ns1:prstGeom>
+          <ns1:solidFill>
+            <ns1:srgbClr val="FFFFFF"/>
+          </ns1:solidFill>
+          <ns1:ln w="15240">
+            <ns1:solidFill>
+              <ns1:srgbClr val="CBD5E1"/>
+            </ns1:solidFill>
+          </ns1:ln>
+        </ns0:spPr>
+        <ns0:style>
+          <ns1:lnRef idx="1">
+            <ns1:schemeClr val="accent1"/>
+          </ns1:lnRef>
+          <ns1:fillRef idx="3">
+            <ns1:schemeClr val="accent1"/>
+          </ns1:fillRef>
+          <ns1:effectRef idx="2">
+            <ns1:schemeClr val="accent1"/>
+          </ns1:effectRef>
+          <ns1:fontRef idx="minor">
+            <ns1:schemeClr val="lt1"/>
+          </ns1:fontRef>
+        </ns0:style>
+        <ns0:txBody>
+          <ns1:bodyPr rtlCol="0" anchor="ctr"/>
+          <ns1:lstStyle/>
+          <ns1:p>
+            <ns1:pPr algn="ctr"/>
+          </ns1:p>
+        </ns0:txBody>
+      </ns0:sp>
+      <ns0:sp>
+        <ns0:nvSpPr>
+          <ns0:cNvPr id="16" name="TextBox 15"/>
+          <ns0:cNvSpPr txBox="1"/>
+          <ns0:nvPr/>
+        </ns0:nvSpPr>
+        <ns0:spPr>
+          <ns1:xfrm>
+            <ns1:off x="987552" y="4251960"/>
+            <ns1:ext cx="1234440" cy="274320"/>
+          </ns1:xfrm>
+          <ns1:prstGeom prst="rect">
+            <ns1:avLst/>
+          </ns1:prstGeom>
+          <ns1:noFill/>
+        </ns0:spPr>
+        <ns0:txBody>
+          <ns1:bodyPr wrap="square" lIns="18288" rIns="18288">
+            <ns1:spAutoFit/>
+          </ns1:bodyPr>
+          <ns1:lstStyle/>
+          <ns1:p>
+            <ns1:pPr algn="l"/>
+            <ns1:r>
+              <ns1:rPr sz="1500" b="1">
+                <ns1:solidFill>
+                  <ns1:srgbClr val="047857"/>
+                </ns1:solidFill>
+                <ns1:latin typeface="Microsoft YaHei"/>
+              </ns1:rPr>
+              <ns1:t>回答方式</ns1:t>
+            </ns1:r>
+          </ns1:p>
+        </ns0:txBody>
+      </ns0:sp>
+      <ns0:sp>
+        <ns0:nvSpPr>
+          <ns0:cNvPr id="17" name="TextBox 16"/>
+          <ns0:cNvSpPr txBox="1"/>
+          <ns0:nvPr/>
+        </ns0:nvSpPr>
+        <ns0:spPr>
+          <ns1:xfrm>
+            <ns1:off x="2267712" y="4251960"/>
+            <ns1:ext cx="3886200" cy="384048"/>
+          </ns1:xfrm>
+          <ns1:prstGeom prst="rect">
+            <ns1:avLst/>
+          </ns1:prstGeom>
+          <ns1:noFill/>
+        </ns0:spPr>
+        <ns0:txBody>
+          <ns1:bodyPr wrap="square" lIns="18288" rIns="18288">
+            <ns1:spAutoFit/>
+          </ns1:bodyPr>
+          <ns1:lstStyle/>
+          <ns1:p>
+            <ns1:pPr algn="l"/>
+            <ns1:r>
+              <ns1:rPr sz="1150" b="0">
+                <ns1:solidFill>
+                  <ns1:srgbClr val="1E293B"/>
+                </ns1:solidFill>
+                <ns1:latin typeface="Microsoft YaHei"/>
+              </ns1:rPr>
+              <ns1:t>使用本地规则组织答案，不依赖外部大模型接口。</ns1:t>
+            </ns1:r>
+          </ns1:p>
+        </ns0:txBody>
+      </ns0:sp>
+      <ns0:sp>
+        <ns0:nvSpPr>
+          <ns0:cNvPr id="18" name="Rounded Rectangle 17"/>
+          <ns0:cNvSpPr/>
+          <ns0:nvPr/>
+        </ns0:nvSpPr>
+        <ns0:spPr>
+          <ns1:xfrm>
+            <ns1:off x="749808" y="5321808"/>
+            <ns1:ext cx="5989320" cy="566928"/>
+          </ns1:xfrm>
+          <ns1:prstGeom prst="roundRect">
+            <ns1:avLst/>
+          </ns1:prstGeom>
+          <ns1:solidFill>
+            <ns1:srgbClr val="F0FDFA"/>
+          </ns1:solidFill>
+          <ns1:ln w="15240">
+            <ns1:solidFill>
+              <ns1:srgbClr val="5EEAD4"/>
+            </ns1:solidFill>
+          </ns1:ln>
+        </ns0:spPr>
+        <ns0:style>
+          <ns1:lnRef idx="1">
+            <ns1:schemeClr val="accent1"/>
+          </ns1:lnRef>
+          <ns1:fillRef idx="3">
+            <ns1:schemeClr val="accent1"/>
+          </ns1:fillRef>
+          <ns1:effectRef idx="2">
+            <ns1:schemeClr val="accent1"/>
+          </ns1:effectRef>
+          <ns1:fontRef idx="minor">
+            <ns1:schemeClr val="lt1"/>
+          </ns1:fontRef>
+        </ns0:style>
+        <ns0:txBody>
+          <ns1:bodyPr rtlCol="0" anchor="ctr"/>
+          <ns1:lstStyle/>
+          <ns1:p>
+            <ns1:pPr algn="ctr"/>
+          </ns1:p>
+        </ns0:txBody>
+      </ns0:sp>
+      <ns0:sp>
+        <ns0:nvSpPr>
+          <ns0:cNvPr id="19" name="TextBox 18"/>
+          <ns0:cNvSpPr txBox="1"/>
+          <ns0:nvPr/>
+        </ns0:nvSpPr>
+        <ns0:spPr>
+          <ns1:xfrm>
+            <ns1:off x="987552" y="5468112"/>
+            <ns1:ext cx="5440680" cy="219456"/>
+          </ns1:xfrm>
+          <ns1:prstGeom prst="rect">
+            <ns1:avLst/>
+          </ns1:prstGeom>
+          <ns1:noFill/>
+        </ns0:spPr>
+        <ns0:txBody>
+          <ns1:bodyPr wrap="square" lIns="18288" rIns="18288">
+            <ns1:spAutoFit/>
+          </ns1:bodyPr>
+          <ns1:lstStyle/>
+          <ns1:p>
+            <ns1:pPr algn="l"/>
+            <ns1:r>
+              <ns1:rPr sz="1200" b="0">
+                <ns1:solidFill>
+                  <ns1:srgbClr val="047857"/>
+                </ns1:solidFill>
+                <ns1:latin typeface="Microsoft YaHei"/>
+              </ns1:rPr>
+              <ns1:t>Agent 定位：围绕当前文章内容提供阅读问答，不扩展为泛聊天工具。</ns1:t>
+            </ns1:r>
+          </ns1:p>
+        </ns0:txBody>
+      </ns0:sp>
+      <ns0:pic>
+        <ns0:nvPicPr>
+          <ns0:cNvPr id="20" name="Picture 19" descr="agent_focus.png"/>
+          <ns0:cNvPicPr>
+            <ns1:picLocks noChangeAspect="1"/>
+          </ns0:cNvPicPr>
+          <ns0:nvPr/>
+        </ns0:nvPicPr>
+        <ns0:blipFill>
+          <ns1:blip ns2:embed="rId2"/>
+          <ns1:stretch>
+            <ns1:fillRect/>
+          </ns1:stretch>
+        </ns0:blipFill>
+        <ns0:spPr>
+          <ns1:xfrm>
+            <ns1:off x="8001000" y="1894384"/>
+            <ns1:ext cx="2971800" cy="4486552"/>
+          </ns1:xfrm>
+          <ns1:prstGeom prst="rect">
+            <ns1:avLst/>
+          </ns1:prstGeom>
+        </ns0:spPr>
+      </ns0:pic>
+    </ns0:spTree>
+  </ns0:cSld>
+  <ns0:clrMapOvr>
+    <ns1:masterClrMapping/>
+  </ns0:clrMapOvr>
+</ns0:sld>
 </file>
 
 <file path=ppt/slides/slide9.xml><?xml version="1.0" encoding="utf-8"?>

--- a/docs/SmartReadAgent_V1.0_期末演示PPT.pptx
+++ b/docs/SmartReadAgent_V1.0_期末演示PPT.pptx
@@ -20,6 +20,7 @@
     <p:sldId id="268" r:id="rId19"/>
     <p:sldId id="269" r:id="rId20"/>
     <p:sldId id="270" r:id="rId21"/>
+    <p:sldId id="271" r:id="rId22"/>
   </p:sldIdLst>
   <p:sldSz cx="12191695" cy="6858000" type="screen4x3"/>
   <p:notesSz cx="6858000" cy="9144000"/>
@@ -8117,6 +8118,427 @@
 </ns0:sld>
 </file>
 
+<file path=ppt/slides/slide16.xml><?xml version="1.0" encoding="utf-8"?>
+<p:sld xmlns:a="http://schemas.openxmlformats.org/drawingml/2006/main" xmlns:p="http://schemas.openxmlformats.org/presentationml/2006/main" xmlns:r="http://schemas.openxmlformats.org/officeDocument/2006/relationships">
+  <p:cSld>
+    <p:bg>
+      <p:bgPr>
+        <a:solidFill>
+          <a:srgbClr val="F7FAFC"/>
+        </a:solidFill>
+        <a:effectLst/>
+      </p:bgPr>
+    </p:bg>
+    <p:spTree>
+      <p:nvGrpSpPr>
+        <p:cNvPr id="1" name=""/>
+        <p:cNvGrpSpPr/>
+        <p:nvPr/>
+      </p:nvGrpSpPr>
+      <p:grpSpPr/>
+      <p:sp>
+        <p:nvSpPr>
+          <p:cNvPr id="2" name="TextBox 1"/>
+          <p:cNvSpPr txBox="1"/>
+          <p:nvPr/>
+        </p:nvSpPr>
+        <p:spPr>
+          <a:xfrm>
+            <a:off x="594360" y="411480"/>
+            <a:ext cx="914400" cy="384048"/>
+          </a:xfrm>
+          <a:prstGeom prst="rect">
+            <a:avLst/>
+          </a:prstGeom>
+          <a:noFill/>
+        </p:spPr>
+        <p:txBody>
+          <a:bodyPr wrap="none">
+            <a:spAutoFit/>
+          </a:bodyPr>
+          <a:lstStyle/>
+          <a:p>
+            <a:pPr algn="l"/>
+            <a:r>
+              <a:rPr sz="1800" b="1">
+                <a:solidFill>
+                  <a:srgbClr val="1F4E79"/>
+                </a:solidFill>
+              </a:rPr>
+              <a:t>16</a:t>
+            </a:r>
+          </a:p>
+        </p:txBody>
+      </p:sp>
+      <p:sp>
+        <p:nvSpPr>
+          <p:cNvPr id="3" name="TextBox 2"/>
+          <p:cNvSpPr txBox="1"/>
+          <p:nvPr/>
+        </p:nvSpPr>
+        <p:spPr>
+          <a:xfrm>
+            <a:off x="1097280" y="457200"/>
+            <a:ext cx="1828800" cy="320040"/>
+          </a:xfrm>
+          <a:prstGeom prst="rect">
+            <a:avLst/>
+          </a:prstGeom>
+          <a:noFill/>
+        </p:spPr>
+        <p:txBody>
+          <a:bodyPr wrap="none">
+            <a:spAutoFit/>
+          </a:bodyPr>
+          <a:lstStyle/>
+          <a:p>
+            <a:r>
+              <a:rPr sz="1200">
+                <a:solidFill>
+                  <a:srgbClr val="4E7499"/>
+                </a:solidFill>
+              </a:rPr>
+              <a:t>结束</a:t>
+            </a:r>
+          </a:p>
+        </p:txBody>
+      </p:sp>
+      <p:sp>
+        <p:nvSpPr>
+          <p:cNvPr id="4" name="TextBox 3"/>
+          <p:cNvSpPr txBox="1"/>
+          <p:nvPr/>
+        </p:nvSpPr>
+        <p:spPr>
+          <a:xfrm>
+            <a:off x="960120" y="1234440"/>
+            <a:ext cx="10241280" cy="868680"/>
+          </a:xfrm>
+          <a:prstGeom prst="rect">
+            <a:avLst/>
+          </a:prstGeom>
+          <a:noFill/>
+        </p:spPr>
+        <p:txBody>
+          <a:bodyPr wrap="none">
+            <a:spAutoFit/>
+          </a:bodyPr>
+          <a:lstStyle/>
+          <a:p>
+            <a:pPr algn="ctr"/>
+            <a:r>
+              <a:rPr sz="3800" b="1">
+                <a:solidFill>
+                  <a:srgbClr val="111827"/>
+                </a:solidFill>
+              </a:rPr>
+              <a:t>谢谢老师和同学</a:t>
+            </a:r>
+          </a:p>
+        </p:txBody>
+      </p:sp>
+      <p:sp>
+        <p:nvSpPr>
+          <p:cNvPr id="5" name="TextBox 4"/>
+          <p:cNvSpPr txBox="1"/>
+          <p:nvPr/>
+        </p:nvSpPr>
+        <p:spPr>
+          <a:xfrm>
+            <a:off x="960120" y="2103120"/>
+            <a:ext cx="10241280" cy="502920"/>
+          </a:xfrm>
+          <a:prstGeom prst="rect">
+            <a:avLst/>
+          </a:prstGeom>
+          <a:noFill/>
+        </p:spPr>
+        <p:txBody>
+          <a:bodyPr wrap="none">
+            <a:spAutoFit/>
+          </a:bodyPr>
+          <a:lstStyle/>
+          <a:p>
+            <a:pPr algn="ctr"/>
+            <a:r>
+              <a:rPr sz="2000">
+                <a:solidFill>
+                  <a:srgbClr val="3B82F6"/>
+                </a:solidFill>
+              </a:rPr>
+              <a:t>SmartRead Agent V1.0｜A03 组 林立洲 / 江轩宇</a:t>
+            </a:r>
+          </a:p>
+        </p:txBody>
+      </p:sp>
+      <p:sp>
+        <p:nvSpPr>
+          <p:cNvPr id="6" name="Rounded Rectangle 5"/>
+          <p:cNvSpPr/>
+          <p:nvPr/>
+        </p:nvSpPr>
+        <p:spPr>
+          <a:xfrm>
+            <a:off x="914400" y="3063240"/>
+            <a:ext cx="3246120" cy="1143000"/>
+          </a:xfrm>
+          <a:prstGeom prst="roundRect">
+            <a:avLst/>
+          </a:prstGeom>
+          <a:solidFill>
+            <a:srgbClr val="EFF6FF"/>
+          </a:solidFill>
+          <a:ln w="15240">
+            <a:solidFill>
+              <a:srgbClr val="60A5FA"/>
+            </a:solidFill>
+          </a:ln>
+        </p:spPr>
+        <p:style>
+          <a:lnRef idx="1">
+            <a:schemeClr val="accent1"/>
+          </a:lnRef>
+          <a:fillRef idx="3">
+            <a:schemeClr val="accent1"/>
+          </a:fillRef>
+          <a:effectRef idx="2">
+            <a:schemeClr val="accent1"/>
+          </a:effectRef>
+          <a:fontRef idx="minor">
+            <a:schemeClr val="lt1"/>
+          </a:fontRef>
+        </p:style>
+        <p:txBody>
+          <a:bodyPr rtlCol="0" anchor="ctr" lIns="164592" rIns="164592" tIns="146304"/>
+          <a:lstStyle/>
+          <a:p>
+            <a:pPr algn="ctr"/>
+            <a:r>
+              <a:rPr sz="1500" b="1">
+                <a:solidFill>
+                  <a:srgbClr val="1E40AF"/>
+                </a:solidFill>
+              </a:rPr>
+              <a:t>移动端阅读分析闭环</a:t>
+            </a:r>
+          </a:p>
+          <a:p>
+            <a:pPr algn="ctr"/>
+            <a:r>
+              <a:rPr sz="1100">
+                <a:solidFill>
+                  <a:srgbClr val="374151"/>
+                </a:solidFill>
+              </a:rPr>
+              <a:t>文本输入、摘要、关键词、学习材料与历史记录</a:t>
+            </a:r>
+          </a:p>
+        </p:txBody>
+      </p:sp>
+      <p:sp>
+        <p:nvSpPr>
+          <p:cNvPr id="7" name="Rounded Rectangle 6"/>
+          <p:cNvSpPr/>
+          <p:nvPr/>
+        </p:nvSpPr>
+        <p:spPr>
+          <a:xfrm>
+            <a:off x="4453128" y="3063240"/>
+            <a:ext cx="3246120" cy="1143000"/>
+          </a:xfrm>
+          <a:prstGeom prst="roundRect">
+            <a:avLst/>
+          </a:prstGeom>
+          <a:solidFill>
+            <a:srgbClr val="EFF6FF"/>
+          </a:solidFill>
+          <a:ln w="15240">
+            <a:solidFill>
+              <a:srgbClr val="60A5FA"/>
+            </a:solidFill>
+          </a:ln>
+        </p:spPr>
+        <p:style>
+          <a:lnRef idx="1">
+            <a:schemeClr val="accent1"/>
+          </a:lnRef>
+          <a:fillRef idx="3">
+            <a:schemeClr val="accent1"/>
+          </a:fillRef>
+          <a:effectRef idx="2">
+            <a:schemeClr val="accent1"/>
+          </a:effectRef>
+          <a:fontRef idx="minor">
+            <a:schemeClr val="lt1"/>
+          </a:fontRef>
+        </p:style>
+        <p:txBody>
+          <a:bodyPr rtlCol="0" anchor="ctr" lIns="164592" rIns="164592" tIns="146304"/>
+          <a:lstStyle/>
+          <a:p>
+            <a:pPr algn="ctr"/>
+            <a:r>
+              <a:rPr sz="1500" b="1">
+                <a:solidFill>
+                  <a:srgbClr val="1E40AF"/>
+                </a:solidFill>
+              </a:rPr>
+              <a:t>LiteRT 端侧推理</a:t>
+            </a:r>
+          </a:p>
+          <a:p>
+            <a:pPr algn="ctr"/>
+            <a:r>
+              <a:rPr sz="1100">
+                <a:solidFill>
+                  <a:srgbClr val="374151"/>
+                </a:solidFill>
+              </a:rPr>
+              <a:t>模型随 APK 集成，在 Android 端完成句子重要性评分</a:t>
+            </a:r>
+          </a:p>
+        </p:txBody>
+      </p:sp>
+      <p:sp>
+        <p:nvSpPr>
+          <p:cNvPr id="8" name="Rounded Rectangle 7"/>
+          <p:cNvSpPr/>
+          <p:nvPr/>
+        </p:nvSpPr>
+        <p:spPr>
+          <a:xfrm>
+            <a:off x="7991856" y="3063240"/>
+            <a:ext cx="3246120" cy="1143000"/>
+          </a:xfrm>
+          <a:prstGeom prst="roundRect">
+            <a:avLst/>
+          </a:prstGeom>
+          <a:solidFill>
+            <a:srgbClr val="EFF6FF"/>
+          </a:solidFill>
+          <a:ln w="15240">
+            <a:solidFill>
+              <a:srgbClr val="60A5FA"/>
+            </a:solidFill>
+          </a:ln>
+        </p:spPr>
+        <p:style>
+          <a:lnRef idx="1">
+            <a:schemeClr val="accent1"/>
+          </a:lnRef>
+          <a:fillRef idx="3">
+            <a:schemeClr val="accent1"/>
+          </a:fillRef>
+          <a:effectRef idx="2">
+            <a:schemeClr val="accent1"/>
+          </a:effectRef>
+          <a:fontRef idx="minor">
+            <a:schemeClr val="lt1"/>
+          </a:fontRef>
+        </p:style>
+        <p:txBody>
+          <a:bodyPr rtlCol="0" anchor="ctr" lIns="164592" rIns="164592" tIns="146304"/>
+          <a:lstStyle/>
+          <a:p>
+            <a:pPr algn="ctr"/>
+            <a:r>
+              <a:rPr sz="1500" b="1">
+                <a:solidFill>
+                  <a:srgbClr val="1E40AF"/>
+                </a:solidFill>
+              </a:rPr>
+              <a:t>本地阅读 Agent</a:t>
+            </a:r>
+          </a:p>
+          <a:p>
+            <a:pPr algn="ctr"/>
+            <a:r>
+              <a:rPr sz="1100">
+                <a:solidFill>
+                  <a:srgbClr val="374151"/>
+                </a:solidFill>
+              </a:rPr>
+              <a:t>围绕当前文章内容提供稳定、可解释的阅读问答</a:t>
+            </a:r>
+          </a:p>
+        </p:txBody>
+      </p:sp>
+      <p:sp>
+        <p:nvSpPr>
+          <p:cNvPr id="9" name="TextBox 8"/>
+          <p:cNvSpPr txBox="1"/>
+          <p:nvPr/>
+        </p:nvSpPr>
+        <p:spPr>
+          <a:xfrm>
+            <a:off x="1828800" y="4800600"/>
+            <a:ext cx="8503920" cy="411480"/>
+          </a:xfrm>
+          <a:prstGeom prst="rect">
+            <a:avLst/>
+          </a:prstGeom>
+          <a:noFill/>
+        </p:spPr>
+        <p:txBody>
+          <a:bodyPr wrap="none">
+            <a:spAutoFit/>
+          </a:bodyPr>
+          <a:lstStyle/>
+          <a:p>
+            <a:pPr algn="ctr"/>
+            <a:r>
+              <a:rPr sz="2200" b="1">
+                <a:solidFill>
+                  <a:srgbClr val="111827"/>
+                </a:solidFill>
+              </a:rPr>
+              <a:t>欢迎老师和同学提问</a:t>
+            </a:r>
+          </a:p>
+        </p:txBody>
+      </p:sp>
+      <p:sp>
+        <p:nvSpPr>
+          <p:cNvPr id="10" name="TextBox 9"/>
+          <p:cNvSpPr txBox="1"/>
+          <p:nvPr/>
+        </p:nvSpPr>
+        <p:spPr>
+          <a:xfrm>
+            <a:off x="640080" y="6080760"/>
+            <a:ext cx="10881360" cy="320040"/>
+          </a:xfrm>
+          <a:prstGeom prst="rect">
+            <a:avLst/>
+          </a:prstGeom>
+          <a:noFill/>
+        </p:spPr>
+        <p:txBody>
+          <a:bodyPr wrap="none">
+            <a:spAutoFit/>
+          </a:bodyPr>
+          <a:lstStyle/>
+          <a:p>
+            <a:pPr algn="ctr"/>
+            <a:r>
+              <a:rPr sz="1100">
+                <a:solidFill>
+                  <a:srgbClr val="6B7280"/>
+                </a:solidFill>
+              </a:rPr>
+              <a:t>福建师范大学 2023 级软件工程 2 班｜软件项目研发实践（3）</a:t>
+            </a:r>
+          </a:p>
+        </p:txBody>
+      </p:sp>
+    </p:spTree>
+  </p:cSld>
+  <p:clrMapOvr>
+    <a:masterClrMapping/>
+  </p:clrMapOvr>
+</p:sld>
+</file>
+
 <file path=ppt/slides/slide2.xml><?xml version="1.0" encoding="utf-8"?>
 <p:sld xmlns:a="http://schemas.openxmlformats.org/drawingml/2006/main" xmlns:p="http://schemas.openxmlformats.org/presentationml/2006/main" xmlns:r="http://schemas.openxmlformats.org/officeDocument/2006/relationships">
   <p:cSld>

--- a/docs/SmartReadAgent_V1.0_期末演示PPT.pptx
+++ b/docs/SmartReadAgent_V1.0_期末演示PPT.pptx
@@ -8492,7 +8492,7 @@
                   <a:srgbClr val="111827"/>
                 </a:solidFill>
               </a:rPr>
-              <a:t>欢迎老师和同学提问</a:t>
+              <a:t>接下来播放 App 运行视频</a:t>
             </a:r>
           </a:p>
         </p:txBody>
